--- a/presentation/slide-presentation.pptx
+++ b/presentation/slide-presentation.pptx
@@ -11,13 +11,13 @@
     <p:sldId id="259" r:id="rId5"/>
     <p:sldId id="260" r:id="rId6"/>
     <p:sldId id="261" r:id="rId7"/>
-    <p:sldId id="268" r:id="rId8"/>
-    <p:sldId id="262" r:id="rId9"/>
-    <p:sldId id="263" r:id="rId10"/>
-    <p:sldId id="265" r:id="rId11"/>
-    <p:sldId id="269" r:id="rId12"/>
-    <p:sldId id="270" r:id="rId13"/>
-    <p:sldId id="267" r:id="rId14"/>
+    <p:sldId id="262" r:id="rId8"/>
+    <p:sldId id="263" r:id="rId9"/>
+    <p:sldId id="265" r:id="rId10"/>
+    <p:sldId id="267" r:id="rId11"/>
+    <p:sldId id="271" r:id="rId12"/>
+    <p:sldId id="268" r:id="rId13"/>
+    <p:sldId id="269" r:id="rId14"/>
   </p:sldIdLst>
   <p:sldSz cx="9144000" cy="6858000" type="screen4x3"/>
   <p:notesSz cx="6858000" cy="9144000"/>
@@ -651,7 +651,7 @@
           <a:p>
             <a:fld id="{5BCAD085-E8A6-8845-BD4E-CB4CCA059FC4}" type="datetimeFigureOut">
               <a:rPr lang="en-US" smtClean="0"/>
-              <a:t>9/8/2026</a:t>
+              <a:t>9/9/2026</a:t>
             </a:fld>
             <a:endParaRPr lang="en-US"/>
           </a:p>
@@ -752,7 +752,7 @@
           </a:ln>
           <a:extLst>
             <a:ext uri="{91240B29-F687-4f45-9708-019B960494DF}">
-              <a14:hiddenLine xmlns="" xmlns:a14="http://schemas.microsoft.com/office/drawing/2010/main" w="9525">
+              <a14:hiddenLine xmlns:a14="http://schemas.microsoft.com/office/drawing/2010/main" xmlns="" w="9525">
                 <a:solidFill>
                   <a:srgbClr val="000000"/>
                 </a:solidFill>
@@ -807,7 +807,7 @@
           </a:ln>
           <a:extLst>
             <a:ext uri="{91240B29-F687-4f45-9708-019B960494DF}">
-              <a14:hiddenLine xmlns="" xmlns:a14="http://schemas.microsoft.com/office/drawing/2010/main" w="9525">
+              <a14:hiddenLine xmlns:a14="http://schemas.microsoft.com/office/drawing/2010/main" xmlns="" w="9525">
                 <a:solidFill>
                   <a:srgbClr val="000000"/>
                 </a:solidFill>
@@ -1062,7 +1062,7 @@
           <a:p>
             <a:fld id="{5BCAD085-E8A6-8845-BD4E-CB4CCA059FC4}" type="datetimeFigureOut">
               <a:rPr lang="en-US" smtClean="0"/>
-              <a:t>9/8/2026</a:t>
+              <a:t>9/9/2026</a:t>
             </a:fld>
             <a:endParaRPr lang="en-US"/>
           </a:p>
@@ -1310,7 +1310,7 @@
           <a:p>
             <a:fld id="{5BCAD085-E8A6-8845-BD4E-CB4CCA059FC4}" type="datetimeFigureOut">
               <a:rPr lang="en-US" smtClean="0"/>
-              <a:t>9/8/2026</a:t>
+              <a:t>9/9/2026</a:t>
             </a:fld>
             <a:endParaRPr lang="en-US"/>
           </a:p>
@@ -1850,7 +1850,7 @@
           <a:p>
             <a:fld id="{5BCAD085-E8A6-8845-BD4E-CB4CCA059FC4}" type="datetimeFigureOut">
               <a:rPr lang="en-US" smtClean="0"/>
-              <a:t>9/8/2026</a:t>
+              <a:t>9/9/2026</a:t>
             </a:fld>
             <a:endParaRPr lang="en-US"/>
           </a:p>
@@ -2098,7 +2098,7 @@
           <a:p>
             <a:fld id="{5BCAD085-E8A6-8845-BD4E-CB4CCA059FC4}" type="datetimeFigureOut">
               <a:rPr lang="en-US" smtClean="0"/>
-              <a:t>9/8/2026</a:t>
+              <a:t>9/9/2026</a:t>
             </a:fld>
             <a:endParaRPr lang="en-US"/>
           </a:p>
@@ -2630,7 +2630,7 @@
           <a:p>
             <a:fld id="{5BCAD085-E8A6-8845-BD4E-CB4CCA059FC4}" type="datetimeFigureOut">
               <a:rPr lang="en-US" smtClean="0"/>
-              <a:t>9/8/2026</a:t>
+              <a:t>9/9/2026</a:t>
             </a:fld>
             <a:endParaRPr lang="en-US"/>
           </a:p>
@@ -2927,7 +2927,7 @@
           <a:p>
             <a:fld id="{5BCAD085-E8A6-8845-BD4E-CB4CCA059FC4}" type="datetimeFigureOut">
               <a:rPr lang="en-US" smtClean="0"/>
-              <a:t>9/8/2026</a:t>
+              <a:t>9/9/2026</a:t>
             </a:fld>
             <a:endParaRPr lang="en-US"/>
           </a:p>
@@ -3101,7 +3101,7 @@
           <a:p>
             <a:fld id="{5BCAD085-E8A6-8845-BD4E-CB4CCA059FC4}" type="datetimeFigureOut">
               <a:rPr lang="en-US" smtClean="0"/>
-              <a:t>9/8/2026</a:t>
+              <a:t>9/9/2026</a:t>
             </a:fld>
             <a:endParaRPr lang="en-US"/>
           </a:p>
@@ -3281,7 +3281,7 @@
           <a:p>
             <a:fld id="{5BCAD085-E8A6-8845-BD4E-CB4CCA059FC4}" type="datetimeFigureOut">
               <a:rPr lang="en-US" smtClean="0"/>
-              <a:t>9/8/2026</a:t>
+              <a:t>9/9/2026</a:t>
             </a:fld>
             <a:endParaRPr lang="en-US"/>
           </a:p>
@@ -3466,7 +3466,7 @@
           <a:p>
             <a:fld id="{5BCAD085-E8A6-8845-BD4E-CB4CCA059FC4}" type="datetimeFigureOut">
               <a:rPr lang="en-US" smtClean="0"/>
-              <a:t>9/8/2026</a:t>
+              <a:t>9/9/2026</a:t>
             </a:fld>
             <a:endParaRPr lang="en-US"/>
           </a:p>
@@ -3722,7 +3722,7 @@
           <a:p>
             <a:fld id="{5BCAD085-E8A6-8845-BD4E-CB4CCA059FC4}" type="datetimeFigureOut">
               <a:rPr lang="en-US" smtClean="0"/>
-              <a:t>9/8/2026</a:t>
+              <a:t>9/9/2026</a:t>
             </a:fld>
             <a:endParaRPr lang="en-US"/>
           </a:p>
@@ -4024,7 +4024,7 @@
           <a:p>
             <a:fld id="{5BCAD085-E8A6-8845-BD4E-CB4CCA059FC4}" type="datetimeFigureOut">
               <a:rPr lang="en-US" smtClean="0"/>
-              <a:t>9/8/2026</a:t>
+              <a:t>9/9/2026</a:t>
             </a:fld>
             <a:endParaRPr lang="en-US"/>
           </a:p>
@@ -4466,7 +4466,7 @@
           <a:p>
             <a:fld id="{5BCAD085-E8A6-8845-BD4E-CB4CCA059FC4}" type="datetimeFigureOut">
               <a:rPr lang="en-US" smtClean="0"/>
-              <a:t>9/8/2026</a:t>
+              <a:t>9/9/2026</a:t>
             </a:fld>
             <a:endParaRPr lang="en-US"/>
           </a:p>
@@ -4584,7 +4584,7 @@
           <a:p>
             <a:fld id="{5BCAD085-E8A6-8845-BD4E-CB4CCA059FC4}" type="datetimeFigureOut">
               <a:rPr lang="en-US" smtClean="0"/>
-              <a:t>9/8/2026</a:t>
+              <a:t>9/9/2026</a:t>
             </a:fld>
             <a:endParaRPr lang="en-US"/>
           </a:p>
@@ -4679,7 +4679,7 @@
           <a:p>
             <a:fld id="{5BCAD085-E8A6-8845-BD4E-CB4CCA059FC4}" type="datetimeFigureOut">
               <a:rPr lang="en-US" smtClean="0"/>
-              <a:t>9/8/2026</a:t>
+              <a:t>9/9/2026</a:t>
             </a:fld>
             <a:endParaRPr lang="en-US"/>
           </a:p>
@@ -4962,7 +4962,7 @@
           <a:p>
             <a:fld id="{5BCAD085-E8A6-8845-BD4E-CB4CCA059FC4}" type="datetimeFigureOut">
               <a:rPr lang="en-US" smtClean="0"/>
-              <a:t>9/8/2026</a:t>
+              <a:t>9/9/2026</a:t>
             </a:fld>
             <a:endParaRPr lang="en-US"/>
           </a:p>
@@ -5253,7 +5253,7 @@
           <a:p>
             <a:fld id="{5BCAD085-E8A6-8845-BD4E-CB4CCA059FC4}" type="datetimeFigureOut">
               <a:rPr lang="en-US" smtClean="0"/>
-              <a:t>9/8/2026</a:t>
+              <a:t>9/9/2026</a:t>
             </a:fld>
             <a:endParaRPr lang="en-US"/>
           </a:p>
@@ -5777,7 +5777,7 @@
           <a:p>
             <a:fld id="{5BCAD085-E8A6-8845-BD4E-CB4CCA059FC4}" type="datetimeFigureOut">
               <a:rPr lang="en-US" smtClean="0"/>
-              <a:t>9/8/2026</a:t>
+              <a:t>9/9/2026</a:t>
             </a:fld>
             <a:endParaRPr lang="en-US"/>
           </a:p>
@@ -6324,14 +6324,14 @@
           <a:lstStyle/>
           <a:p>
             <a:r>
-              <a:rPr lang="en-US" dirty="0" err="1"/>
+              <a:rPr lang="en-US" b="1" dirty="0" err="1"/>
               <a:t>SBiZ</a:t>
             </a:r>
             <a:r>
-              <a:rPr lang="en-US" dirty="0"/>
+              <a:rPr lang="en-US" b="1" dirty="0"/>
               <a:t> Application</a:t>
             </a:r>
-            <a:endParaRPr dirty="0"/>
+            <a:endParaRPr b="1" dirty="0"/>
           </a:p>
         </p:txBody>
       </p:sp>
@@ -6351,25 +6351,58 @@
           <a:lstStyle/>
           <a:p>
             <a:r>
-              <a:rPr dirty="0"/>
-              <a:t>Solusi </a:t>
-            </a:r>
-            <a:r>
-              <a:rPr dirty="0" err="1"/>
-              <a:t>Terpadu</a:t>
-            </a:r>
-            <a:r>
-              <a:rPr dirty="0"/>
+              <a:rPr lang="en-US" b="1" dirty="0"/>
+              <a:t>Satu </a:t>
+            </a:r>
+            <a:r>
+              <a:rPr lang="en-US" b="1" dirty="0" err="1"/>
+              <a:t>Sistem</a:t>
+            </a:r>
+            <a:r>
+              <a:rPr lang="en-US" b="1" dirty="0"/>
               <a:t> </a:t>
             </a:r>
             <a:r>
-              <a:rPr dirty="0" err="1"/>
+              <a:rPr lang="en-US" b="1" dirty="0" err="1"/>
+              <a:t>Terintegrasi</a:t>
+            </a:r>
+            <a:r>
+              <a:rPr lang="en-US" b="1" dirty="0"/>
+              <a:t> </a:t>
+            </a:r>
+            <a:r>
+              <a:rPr lang="en-US" b="1" dirty="0" err="1"/>
               <a:t>untuk</a:t>
             </a:r>
             <a:r>
-              <a:rPr dirty="0"/>
-              <a:t> Usaha Retail B2C Anda</a:t>
-            </a:r>
+              <a:rPr lang="en-US" b="1" dirty="0"/>
+              <a:t> </a:t>
+            </a:r>
+            <a:r>
+              <a:rPr lang="en-US" b="1" dirty="0" err="1"/>
+              <a:t>Memangkas</a:t>
+            </a:r>
+            <a:r>
+              <a:rPr lang="en-US" b="1" dirty="0"/>
+              <a:t> </a:t>
+            </a:r>
+            <a:r>
+              <a:rPr lang="en-US" b="1" dirty="0" err="1"/>
+              <a:t>Operasional</a:t>
+            </a:r>
+            <a:r>
+              <a:rPr lang="en-US" b="1" dirty="0"/>
+              <a:t> Manual &amp; </a:t>
+            </a:r>
+            <a:r>
+              <a:rPr lang="en-US" b="1" dirty="0" err="1"/>
+              <a:t>Meningkatkan</a:t>
+            </a:r>
+            <a:r>
+              <a:rPr lang="en-US" b="1" dirty="0"/>
+              <a:t> Profit Usaha Anda</a:t>
+            </a:r>
+            <a:endParaRPr b="1" dirty="0"/>
           </a:p>
         </p:txBody>
       </p:sp>
@@ -6408,72 +6441,458 @@
             <p:ph type="title"/>
           </p:nvPr>
         </p:nvSpPr>
+        <p:spPr/>
+        <p:txBody>
+          <a:bodyPr/>
+          <a:lstStyle/>
+          <a:p>
+            <a:r>
+              <a:rPr lang="en-US" b="1" dirty="0" err="1"/>
+              <a:t>Opsi</a:t>
+            </a:r>
+            <a:r>
+              <a:rPr lang="en-US" b="1" dirty="0"/>
+              <a:t> </a:t>
+            </a:r>
+            <a:r>
+              <a:rPr lang="en-US" b="1" dirty="0" err="1"/>
+              <a:t>Layanan</a:t>
+            </a:r>
+            <a:r>
+              <a:rPr lang="en-US" b="1" dirty="0"/>
+              <a:t> &amp; </a:t>
+            </a:r>
+            <a:r>
+              <a:rPr lang="en-US" b="1" dirty="0" err="1"/>
+              <a:t>Investasi</a:t>
+            </a:r>
+            <a:r>
+              <a:rPr lang="en-US" b="1" dirty="0"/>
+              <a:t> </a:t>
+            </a:r>
+            <a:r>
+              <a:rPr lang="en-US" b="1" dirty="0" err="1"/>
+              <a:t>Efisien</a:t>
+            </a:r>
+            <a:endParaRPr dirty="0"/>
+          </a:p>
+        </p:txBody>
+      </p:sp>
+      <p:sp>
+        <p:nvSpPr>
+          <p:cNvPr id="3" name="Content Placeholder 2"/>
+          <p:cNvSpPr>
+            <a:spLocks noGrp="1"/>
+          </p:cNvSpPr>
+          <p:nvPr>
+            <p:ph idx="1"/>
+          </p:nvPr>
+        </p:nvSpPr>
         <p:spPr>
           <a:xfrm>
-            <a:off x="982133" y="457201"/>
-            <a:ext cx="7704667" cy="664028"/>
+            <a:off x="719666" y="2263334"/>
+            <a:ext cx="7704667" cy="3005351"/>
           </a:xfrm>
         </p:spPr>
         <p:txBody>
           <a:bodyPr>
-            <a:normAutofit fontScale="90000"/>
+            <a:normAutofit/>
           </a:bodyPr>
           <a:lstStyle/>
           <a:p>
-            <a:r>
-              <a:rPr dirty="0" err="1"/>
-              <a:t>Contoh</a:t>
-            </a:r>
-            <a:r>
-              <a:rPr dirty="0"/>
+            <a:pPr marL="0" indent="0" fontAlgn="base">
+              <a:buNone/>
+            </a:pPr>
+            <a:endParaRPr lang="en-US" sz="2200" b="1" dirty="0"/>
+          </a:p>
+          <a:p>
+            <a:pPr marL="0" indent="0" fontAlgn="base">
+              <a:buNone/>
+            </a:pPr>
+            <a:r>
+              <a:rPr lang="en-US" sz="2000" b="1" dirty="0"/>
+              <a:t>Managed Cloud Hanya Rp 33.oo0 /Hari  (Rp 12.000.000 / </a:t>
+            </a:r>
+            <a:r>
+              <a:rPr lang="en-US" sz="2000" b="1" dirty="0" err="1"/>
+              <a:t>Tahun</a:t>
+            </a:r>
+            <a:r>
+              <a:rPr lang="en-US" sz="2000" b="1" dirty="0"/>
+              <a:t>):</a:t>
+            </a:r>
+            <a:endParaRPr lang="en-US" sz="2000" dirty="0"/>
+          </a:p>
+          <a:p>
+            <a:pPr fontAlgn="base"/>
+            <a:r>
+              <a:rPr lang="en-US" sz="1400" dirty="0" err="1"/>
+              <a:t>Sudah</a:t>
+            </a:r>
+            <a:r>
+              <a:rPr lang="en-US" sz="1400" dirty="0"/>
               <a:t> </a:t>
             </a:r>
             <a:r>
-              <a:rPr dirty="0" err="1"/>
-              <a:t>Tampilan</a:t>
-            </a:r>
-            <a:r>
-              <a:rPr dirty="0"/>
-              <a:t> Reseller Area</a:t>
-            </a:r>
+              <a:rPr lang="en-US" sz="1400" dirty="0" err="1"/>
+              <a:t>termasuk</a:t>
+            </a:r>
+            <a:r>
+              <a:rPr lang="en-US" sz="1400" dirty="0"/>
+              <a:t> Cloud Server + Maintenance + Data</a:t>
+            </a:r>
+          </a:p>
+          <a:p>
+            <a:pPr fontAlgn="base"/>
+            <a:r>
+              <a:rPr lang="en-US" sz="1400" dirty="0"/>
+              <a:t>Unlimited User, Sales, Reseller, Unlimited </a:t>
+            </a:r>
+            <a:r>
+              <a:rPr lang="en-US" sz="1400" dirty="0" err="1"/>
+              <a:t>Transaksi</a:t>
+            </a:r>
+            <a:r>
+              <a:rPr lang="en-US" sz="1400" dirty="0"/>
+              <a:t>.</a:t>
+            </a:r>
+          </a:p>
+          <a:p>
+            <a:pPr fontAlgn="base"/>
+            <a:r>
+              <a:rPr lang="en-US" sz="1400" dirty="0"/>
+              <a:t>Bantuan </a:t>
+            </a:r>
+            <a:r>
+              <a:rPr lang="en-US" sz="1400" dirty="0" err="1"/>
+              <a:t>migrasi</a:t>
+            </a:r>
+            <a:r>
+              <a:rPr lang="en-US" sz="1400" dirty="0"/>
+              <a:t> data </a:t>
+            </a:r>
+            <a:r>
+              <a:rPr lang="en-US" sz="1400" dirty="0" err="1"/>
+              <a:t>awal</a:t>
+            </a:r>
+            <a:r>
+              <a:rPr lang="en-US" sz="1400" dirty="0"/>
+              <a:t> &amp; </a:t>
+            </a:r>
+            <a:r>
+              <a:rPr lang="en-US" sz="1400" dirty="0" err="1"/>
+              <a:t>pelatihan</a:t>
+            </a:r>
+            <a:r>
+              <a:rPr lang="en-US" sz="1400" dirty="0"/>
+              <a:t> </a:t>
+            </a:r>
+            <a:r>
+              <a:rPr lang="en-US" sz="1400" dirty="0" err="1"/>
+              <a:t>tim</a:t>
+            </a:r>
+            <a:r>
+              <a:rPr lang="en-US" sz="1400" dirty="0"/>
+              <a:t> </a:t>
+            </a:r>
+            <a:r>
+              <a:rPr lang="en-US" sz="1400" dirty="0" err="1"/>
+              <a:t>operasional</a:t>
+            </a:r>
+            <a:r>
+              <a:rPr lang="en-US" sz="1400" dirty="0"/>
+              <a:t>.</a:t>
+            </a:r>
+            <a:endParaRPr lang="en-US" dirty="0"/>
+          </a:p>
+          <a:p>
+            <a:pPr marL="0" indent="0">
+              <a:buNone/>
+            </a:pPr>
+            <a:endParaRPr lang="en-US" dirty="0"/>
+          </a:p>
+          <a:p>
+            <a:pPr marL="0" indent="0">
+              <a:buNone/>
+            </a:pPr>
+            <a:endParaRPr lang="en-US" dirty="0"/>
+          </a:p>
+          <a:p>
+            <a:pPr marL="0" indent="0">
+              <a:buNone/>
+            </a:pPr>
+            <a:endParaRPr dirty="0"/>
+          </a:p>
+        </p:txBody>
+      </p:sp>
+    </p:spTree>
+  </p:cSld>
+  <p:clrMapOvr>
+    <a:masterClrMapping/>
+  </p:clrMapOvr>
+</p:sld>
+</file>
+
+<file path=ppt/slides/slide11.xml><?xml version="1.0" encoding="utf-8"?>
+<p:sld xmlns:a="http://schemas.openxmlformats.org/drawingml/2006/main" xmlns:r="http://schemas.openxmlformats.org/officeDocument/2006/relationships" xmlns:p="http://schemas.openxmlformats.org/presentationml/2006/main">
+  <p:cSld>
+    <p:spTree>
+      <p:nvGrpSpPr>
+        <p:cNvPr id="1" name="">
+          <a:extLst>
+            <a:ext uri="{FF2B5EF4-FFF2-40B4-BE49-F238E27FC236}">
+              <a16:creationId xmlns:a16="http://schemas.microsoft.com/office/drawing/2014/main" id="{8A025711-474A-C5D3-5219-3B385E1F4533}"/>
+            </a:ext>
+          </a:extLst>
+        </p:cNvPr>
+        <p:cNvGrpSpPr/>
+        <p:nvPr/>
+      </p:nvGrpSpPr>
+      <p:grpSpPr>
+        <a:xfrm>
+          <a:off x="0" y="0"/>
+          <a:ext cx="0" cy="0"/>
+          <a:chOff x="0" y="0"/>
+          <a:chExt cx="0" cy="0"/>
+        </a:xfrm>
+      </p:grpSpPr>
+      <p:sp>
+        <p:nvSpPr>
+          <p:cNvPr id="2" name="Title 1">
+            <a:extLst>
+              <a:ext uri="{FF2B5EF4-FFF2-40B4-BE49-F238E27FC236}">
+                <a16:creationId xmlns:a16="http://schemas.microsoft.com/office/drawing/2014/main" id="{133F1E3F-0AB4-898D-98EA-9C07D033426F}"/>
+              </a:ext>
+            </a:extLst>
+          </p:cNvPr>
+          <p:cNvSpPr>
+            <a:spLocks noGrp="1"/>
+          </p:cNvSpPr>
+          <p:nvPr>
+            <p:ph type="title"/>
+          </p:nvPr>
+        </p:nvSpPr>
+        <p:spPr/>
+        <p:txBody>
+          <a:bodyPr>
+            <a:normAutofit/>
+          </a:bodyPr>
+          <a:lstStyle/>
+          <a:p>
+            <a:r>
+              <a:rPr sz="5400" b="1" dirty="0"/>
+              <a:t>Kesimpulan</a:t>
+            </a:r>
+          </a:p>
+        </p:txBody>
+      </p:sp>
+      <p:sp>
+        <p:nvSpPr>
+          <p:cNvPr id="3" name="Content Placeholder 2">
+            <a:extLst>
+              <a:ext uri="{FF2B5EF4-FFF2-40B4-BE49-F238E27FC236}">
+                <a16:creationId xmlns:a16="http://schemas.microsoft.com/office/drawing/2014/main" id="{51B3BE87-5DFF-2A5F-E729-39A121B66DA3}"/>
+              </a:ext>
+            </a:extLst>
+          </p:cNvPr>
+          <p:cNvSpPr>
+            <a:spLocks noGrp="1"/>
+          </p:cNvSpPr>
+          <p:nvPr>
+            <p:ph idx="1"/>
+          </p:nvPr>
+        </p:nvSpPr>
+        <p:spPr>
+          <a:xfrm>
+            <a:off x="719666" y="2198914"/>
+            <a:ext cx="4189791" cy="3332816"/>
+          </a:xfrm>
+        </p:spPr>
+        <p:txBody>
+          <a:bodyPr>
+            <a:normAutofit/>
+          </a:bodyPr>
+          <a:lstStyle/>
+          <a:p>
+            <a:r>
+              <a:rPr lang="en-US" sz="1600" b="1" dirty="0" err="1"/>
+              <a:t>SBiZ</a:t>
+            </a:r>
+            <a:r>
+              <a:rPr lang="en-US" sz="1600" b="1" dirty="0"/>
+              <a:t> Application:</a:t>
+            </a:r>
+            <a:r>
+              <a:rPr lang="en-US" sz="1600" dirty="0"/>
+              <a:t> </a:t>
+            </a:r>
+            <a:r>
+              <a:rPr lang="en-US" sz="1600" dirty="0" err="1"/>
+              <a:t>Investasi</a:t>
+            </a:r>
+            <a:r>
+              <a:rPr lang="en-US" sz="1600" dirty="0"/>
+              <a:t> </a:t>
+            </a:r>
+            <a:r>
+              <a:rPr lang="en-US" sz="1600" dirty="0" err="1"/>
+              <a:t>terbaik</a:t>
+            </a:r>
+            <a:r>
+              <a:rPr lang="en-US" sz="1600" dirty="0"/>
+              <a:t> </a:t>
+            </a:r>
+            <a:r>
+              <a:rPr lang="en-US" sz="1600" dirty="0" err="1"/>
+              <a:t>untuk</a:t>
+            </a:r>
+            <a:r>
+              <a:rPr lang="en-US" sz="1600" dirty="0"/>
+              <a:t> </a:t>
+            </a:r>
+            <a:r>
+              <a:rPr lang="en-US" sz="1600" dirty="0" err="1"/>
+              <a:t>mengubah</a:t>
+            </a:r>
+            <a:r>
+              <a:rPr lang="en-US" sz="1600" dirty="0"/>
+              <a:t> </a:t>
+            </a:r>
+            <a:r>
+              <a:rPr lang="en-US" sz="1600" dirty="0" err="1"/>
+              <a:t>operasional</a:t>
+            </a:r>
+            <a:r>
+              <a:rPr lang="en-US" sz="1600" dirty="0"/>
+              <a:t> manual yang </a:t>
+            </a:r>
+            <a:r>
+              <a:rPr lang="en-US" sz="1600" dirty="0" err="1"/>
+              <a:t>rumit</a:t>
+            </a:r>
+            <a:r>
+              <a:rPr lang="en-US" sz="1600" dirty="0"/>
+              <a:t> </a:t>
+            </a:r>
+            <a:r>
+              <a:rPr lang="en-US" sz="1600" dirty="0" err="1"/>
+              <a:t>menjadi</a:t>
+            </a:r>
+            <a:r>
+              <a:rPr lang="en-US" sz="1600" dirty="0"/>
+              <a:t> </a:t>
+            </a:r>
+            <a:r>
+              <a:rPr lang="en-US" sz="1600" dirty="0" err="1"/>
+              <a:t>otomatis</a:t>
+            </a:r>
+            <a:r>
+              <a:rPr lang="en-US" sz="1600" dirty="0"/>
+              <a:t>, </a:t>
+            </a:r>
+            <a:r>
+              <a:rPr lang="en-US" sz="1600" dirty="0" err="1"/>
+              <a:t>rapi</a:t>
+            </a:r>
+            <a:r>
+              <a:rPr lang="en-US" sz="1600" dirty="0"/>
+              <a:t>, dan </a:t>
+            </a:r>
+            <a:r>
+              <a:rPr lang="en-US" sz="1600" dirty="0" err="1"/>
+              <a:t>menguntungkan</a:t>
+            </a:r>
+            <a:r>
+              <a:rPr lang="en-US" sz="1600" dirty="0"/>
+              <a:t>.</a:t>
+            </a:r>
+          </a:p>
+          <a:p>
+            <a:r>
+              <a:rPr lang="en-US" sz="1600" b="1" dirty="0"/>
+              <a:t>Akses Demo </a:t>
+            </a:r>
+            <a:r>
+              <a:rPr lang="en-US" sz="1600" b="1" dirty="0" err="1"/>
+              <a:t>Aplikasi</a:t>
+            </a:r>
+            <a:r>
+              <a:rPr lang="en-US" sz="1600" b="1" dirty="0"/>
+              <a:t>:</a:t>
+            </a:r>
+            <a:r>
+              <a:rPr lang="en-US" sz="1600" dirty="0"/>
+              <a:t>  </a:t>
+            </a:r>
+            <a:r>
+              <a:rPr lang="en-US" sz="1600" dirty="0">
+                <a:hlinkClick r:id="rId2"/>
+              </a:rPr>
+              <a:t>https://app.sbiz-app.my.id</a:t>
+            </a:r>
+            <a:endParaRPr lang="en-US" sz="1600" dirty="0"/>
+          </a:p>
+          <a:p>
+            <a:r>
+              <a:rPr lang="en-US" sz="1600" b="1" dirty="0"/>
+              <a:t>User Demo:</a:t>
+            </a:r>
+            <a:r>
+              <a:rPr lang="en-US" sz="1600" dirty="0"/>
+              <a:t> admin | </a:t>
+            </a:r>
+            <a:r>
+              <a:rPr lang="en-US" sz="1600" b="1" dirty="0"/>
+              <a:t>Password:</a:t>
+            </a:r>
+            <a:r>
+              <a:rPr lang="en-US" sz="1600" dirty="0"/>
+              <a:t> 1234</a:t>
+            </a:r>
+          </a:p>
+          <a:p>
+            <a:r>
+              <a:rPr lang="en-US" sz="1600" b="1" dirty="0" err="1"/>
+              <a:t>Hubungi</a:t>
+            </a:r>
+            <a:r>
+              <a:rPr lang="en-US" sz="1600" b="1" dirty="0"/>
+              <a:t> Kami </a:t>
+            </a:r>
+            <a:r>
+              <a:rPr lang="en-US" sz="1600" b="1" dirty="0" err="1"/>
+              <a:t>Sekarang</a:t>
+            </a:r>
+            <a:r>
+              <a:rPr lang="en-US" sz="1600" b="1" dirty="0"/>
+              <a:t> </a:t>
+            </a:r>
+            <a:r>
+              <a:rPr lang="en-US" sz="1600" b="1" dirty="0" err="1"/>
+              <a:t>untuk</a:t>
+            </a:r>
+            <a:r>
+              <a:rPr lang="en-US" sz="1600" b="1" dirty="0"/>
+              <a:t> </a:t>
+            </a:r>
+            <a:r>
+              <a:rPr lang="en-US" sz="1600" b="1" dirty="0" err="1"/>
+              <a:t>Konsultasi</a:t>
+            </a:r>
+            <a:r>
+              <a:rPr lang="en-US" sz="1600" b="1" dirty="0"/>
+              <a:t> &amp; Demo Gratis!</a:t>
+            </a:r>
+            <a:endParaRPr lang="en-US" sz="1600" dirty="0"/>
           </a:p>
         </p:txBody>
       </p:sp>
       <p:pic>
         <p:nvPicPr>
-          <p:cNvPr id="7" name="Content Placeholder 6">
+          <p:cNvPr id="7" name="Picture 6">
             <a:extLst>
               <a:ext uri="{FF2B5EF4-FFF2-40B4-BE49-F238E27FC236}">
-                <a16:creationId xmlns:a16="http://schemas.microsoft.com/office/drawing/2014/main" id="{5F99DF1A-5FCC-33F5-D25F-665332D6BCAF}"/>
-              </a:ext>
-            </a:extLst>
-          </p:cNvPr>
-          <p:cNvPicPr>
-            <a:picLocks noGrp="1" noChangeAspect="1"/>
-          </p:cNvPicPr>
-          <p:nvPr>
-            <p:ph idx="1"/>
-          </p:nvPr>
-        </p:nvPicPr>
-        <p:blipFill>
-          <a:blip r:embed="rId2"/>
-          <a:stretch>
-            <a:fillRect/>
-          </a:stretch>
-        </p:blipFill>
-        <p:spPr>
-          <a:xfrm>
-            <a:off x="982133" y="1284514"/>
-            <a:ext cx="4910335" cy="3332163"/>
-          </a:xfrm>
-        </p:spPr>
-      </p:pic>
-      <p:pic>
-        <p:nvPicPr>
-          <p:cNvPr id="9" name="Picture 8">
-            <a:extLst>
-              <a:ext uri="{FF2B5EF4-FFF2-40B4-BE49-F238E27FC236}">
-                <a16:creationId xmlns:a16="http://schemas.microsoft.com/office/drawing/2014/main" id="{8CE5A44D-F786-D08D-60AC-83EA485FDB51}"/>
+                <a16:creationId xmlns:a16="http://schemas.microsoft.com/office/drawing/2014/main" id="{148ADB36-03DA-517F-7912-8F8DA96E9786}"/>
               </a:ext>
             </a:extLst>
           </p:cNvPr>
@@ -6490,8 +6909,8 @@
         </p:blipFill>
         <p:spPr>
           <a:xfrm>
-            <a:off x="6155934" y="1121229"/>
-            <a:ext cx="2386630" cy="5366657"/>
+            <a:off x="4964011" y="2573075"/>
+            <a:ext cx="3924166" cy="1607039"/>
           </a:xfrm>
           <a:prstGeom prst="rect">
             <a:avLst/>
@@ -6499,6 +6918,11 @@
         </p:spPr>
       </p:pic>
     </p:spTree>
+    <p:extLst>
+      <p:ext uri="{BB962C8B-B14F-4D97-AF65-F5344CB8AC3E}">
+        <p14:creationId xmlns:p14="http://schemas.microsoft.com/office/powerpoint/2010/main" val="4086431298"/>
+      </p:ext>
+    </p:extLst>
   </p:cSld>
   <p:clrMapOvr>
     <a:masterClrMapping/>
@@ -6506,7 +6930,158 @@
 </p:sld>
 </file>
 
-<file path=ppt/slides/slide11.xml><?xml version="1.0" encoding="utf-8"?>
+<file path=ppt/slides/slide12.xml><?xml version="1.0" encoding="utf-8"?>
+<p:sld xmlns:a="http://schemas.openxmlformats.org/drawingml/2006/main" xmlns:r="http://schemas.openxmlformats.org/officeDocument/2006/relationships" xmlns:p="http://schemas.openxmlformats.org/presentationml/2006/main">
+  <p:cSld>
+    <p:spTree>
+      <p:nvGrpSpPr>
+        <p:cNvPr id="1" name="">
+          <a:extLst>
+            <a:ext uri="{FF2B5EF4-FFF2-40B4-BE49-F238E27FC236}">
+              <a16:creationId xmlns:a16="http://schemas.microsoft.com/office/drawing/2014/main" id="{53653320-1AFC-9E7B-4C28-9C5C839B66A2}"/>
+            </a:ext>
+          </a:extLst>
+        </p:cNvPr>
+        <p:cNvGrpSpPr/>
+        <p:nvPr/>
+      </p:nvGrpSpPr>
+      <p:grpSpPr>
+        <a:xfrm>
+          <a:off x="0" y="0"/>
+          <a:ext cx="0" cy="0"/>
+          <a:chOff x="0" y="0"/>
+          <a:chExt cx="0" cy="0"/>
+        </a:xfrm>
+      </p:grpSpPr>
+      <p:sp>
+        <p:nvSpPr>
+          <p:cNvPr id="2" name="Title 1">
+            <a:extLst>
+              <a:ext uri="{FF2B5EF4-FFF2-40B4-BE49-F238E27FC236}">
+                <a16:creationId xmlns:a16="http://schemas.microsoft.com/office/drawing/2014/main" id="{07D8A67F-CC4E-BCA7-E099-57E8720344A4}"/>
+              </a:ext>
+            </a:extLst>
+          </p:cNvPr>
+          <p:cNvSpPr>
+            <a:spLocks noGrp="1"/>
+          </p:cNvSpPr>
+          <p:nvPr>
+            <p:ph type="title"/>
+          </p:nvPr>
+        </p:nvSpPr>
+        <p:spPr>
+          <a:xfrm>
+            <a:off x="982133" y="457201"/>
+            <a:ext cx="7704667" cy="718456"/>
+          </a:xfrm>
+        </p:spPr>
+        <p:txBody>
+          <a:bodyPr/>
+          <a:lstStyle/>
+          <a:p>
+            <a:r>
+              <a:rPr lang="en-US" dirty="0"/>
+              <a:t>All Screen </a:t>
+            </a:r>
+            <a:r>
+              <a:rPr lang="en-US" dirty="0" err="1"/>
+              <a:t>SBiZ</a:t>
+            </a:r>
+            <a:endParaRPr dirty="0"/>
+          </a:p>
+        </p:txBody>
+      </p:sp>
+      <p:sp>
+        <p:nvSpPr>
+          <p:cNvPr id="4" name="Content Placeholder 3">
+            <a:extLst>
+              <a:ext uri="{FF2B5EF4-FFF2-40B4-BE49-F238E27FC236}">
+                <a16:creationId xmlns:a16="http://schemas.microsoft.com/office/drawing/2014/main" id="{24C0A3F3-A012-4455-3567-890440E55842}"/>
+              </a:ext>
+            </a:extLst>
+          </p:cNvPr>
+          <p:cNvSpPr>
+            <a:spLocks noGrp="1"/>
+          </p:cNvSpPr>
+          <p:nvPr>
+            <p:ph idx="1"/>
+          </p:nvPr>
+        </p:nvSpPr>
+        <p:spPr>
+          <a:xfrm>
+            <a:off x="1090990" y="1583871"/>
+            <a:ext cx="7704667" cy="381000"/>
+          </a:xfrm>
+        </p:spPr>
+        <p:txBody>
+          <a:bodyPr>
+            <a:normAutofit fontScale="92500" lnSpcReduction="20000"/>
+          </a:bodyPr>
+          <a:lstStyle/>
+          <a:p>
+            <a:pPr marL="0" indent="0">
+              <a:buNone/>
+            </a:pPr>
+            <a:r>
+              <a:rPr lang="en-US" dirty="0" err="1">
+                <a:hlinkClick r:id="rId2"/>
+              </a:rPr>
+              <a:t>Screenshoot</a:t>
+            </a:r>
+            <a:r>
+              <a:rPr lang="en-US" dirty="0">
+                <a:hlinkClick r:id="rId2"/>
+              </a:rPr>
+              <a:t> Application</a:t>
+            </a:r>
+            <a:endParaRPr lang="en-US" dirty="0"/>
+          </a:p>
+        </p:txBody>
+      </p:sp>
+      <p:pic>
+        <p:nvPicPr>
+          <p:cNvPr id="6" name="Picture 5">
+            <a:extLst>
+              <a:ext uri="{FF2B5EF4-FFF2-40B4-BE49-F238E27FC236}">
+                <a16:creationId xmlns:a16="http://schemas.microsoft.com/office/drawing/2014/main" id="{73FE4F4D-DA44-4224-6F8B-EC69AFFDB12A}"/>
+              </a:ext>
+            </a:extLst>
+          </p:cNvPr>
+          <p:cNvPicPr>
+            <a:picLocks noChangeAspect="1"/>
+          </p:cNvPicPr>
+          <p:nvPr/>
+        </p:nvPicPr>
+        <p:blipFill>
+          <a:blip r:embed="rId3"/>
+          <a:stretch>
+            <a:fillRect/>
+          </a:stretch>
+        </p:blipFill>
+        <p:spPr>
+          <a:xfrm>
+            <a:off x="1090990" y="2144486"/>
+            <a:ext cx="7511143" cy="3810624"/>
+          </a:xfrm>
+          <a:prstGeom prst="rect">
+            <a:avLst/>
+          </a:prstGeom>
+        </p:spPr>
+      </p:pic>
+    </p:spTree>
+    <p:extLst>
+      <p:ext uri="{BB962C8B-B14F-4D97-AF65-F5344CB8AC3E}">
+        <p14:creationId xmlns:p14="http://schemas.microsoft.com/office/powerpoint/2010/main" val="2475563122"/>
+      </p:ext>
+    </p:extLst>
+  </p:cSld>
+  <p:clrMapOvr>
+    <a:masterClrMapping/>
+  </p:clrMapOvr>
+</p:sld>
+</file>
+
+<file path=ppt/slides/slide13.xml><?xml version="1.0" encoding="utf-8"?>
 <p:sld xmlns:a="http://schemas.openxmlformats.org/drawingml/2006/main" xmlns:r="http://schemas.openxmlformats.org/officeDocument/2006/relationships" xmlns:p="http://schemas.openxmlformats.org/presentationml/2006/main">
   <p:cSld>
     <p:spTree>
@@ -6559,11 +7134,11 @@
           <a:p>
             <a:r>
               <a:rPr lang="en-US" dirty="0"/>
-              <a:t>All </a:t>
+              <a:t>All Screen </a:t>
             </a:r>
             <a:r>
               <a:rPr lang="en-US" dirty="0" err="1"/>
-              <a:t>Screenshoot</a:t>
+              <a:t>SBiZ</a:t>
             </a:r>
             <a:r>
               <a:rPr lang="en-US" dirty="0"/>
@@ -6663,497 +7238,6 @@
 </p:sld>
 </file>
 
-<file path=ppt/slides/slide12.xml><?xml version="1.0" encoding="utf-8"?>
-<p:sld xmlns:a="http://schemas.openxmlformats.org/drawingml/2006/main" xmlns:r="http://schemas.openxmlformats.org/officeDocument/2006/relationships" xmlns:p="http://schemas.openxmlformats.org/presentationml/2006/main">
-  <p:cSld>
-    <p:spTree>
-      <p:nvGrpSpPr>
-        <p:cNvPr id="1" name="">
-          <a:extLst>
-            <a:ext uri="{FF2B5EF4-FFF2-40B4-BE49-F238E27FC236}">
-              <a16:creationId xmlns:a16="http://schemas.microsoft.com/office/drawing/2014/main" id="{71F76655-376E-5A21-DFF5-62FAB154F88E}"/>
-            </a:ext>
-          </a:extLst>
-        </p:cNvPr>
-        <p:cNvGrpSpPr/>
-        <p:nvPr/>
-      </p:nvGrpSpPr>
-      <p:grpSpPr>
-        <a:xfrm>
-          <a:off x="0" y="0"/>
-          <a:ext cx="0" cy="0"/>
-          <a:chOff x="0" y="0"/>
-          <a:chExt cx="0" cy="0"/>
-        </a:xfrm>
-      </p:grpSpPr>
-      <p:sp>
-        <p:nvSpPr>
-          <p:cNvPr id="2" name="Title 1">
-            <a:extLst>
-              <a:ext uri="{FF2B5EF4-FFF2-40B4-BE49-F238E27FC236}">
-                <a16:creationId xmlns:a16="http://schemas.microsoft.com/office/drawing/2014/main" id="{E5FE441C-42F7-DBC1-874D-8C35AFE37C8D}"/>
-              </a:ext>
-            </a:extLst>
-          </p:cNvPr>
-          <p:cNvSpPr>
-            <a:spLocks noGrp="1"/>
-          </p:cNvSpPr>
-          <p:nvPr>
-            <p:ph type="title"/>
-          </p:nvPr>
-        </p:nvSpPr>
-        <p:spPr>
-          <a:xfrm>
-            <a:off x="982133" y="457201"/>
-            <a:ext cx="7704667" cy="664028"/>
-          </a:xfrm>
-        </p:spPr>
-        <p:txBody>
-          <a:bodyPr>
-            <a:normAutofit fontScale="90000"/>
-          </a:bodyPr>
-          <a:lstStyle/>
-          <a:p>
-            <a:r>
-              <a:rPr lang="en-US" dirty="0"/>
-              <a:t>Demo </a:t>
-            </a:r>
-            <a:r>
-              <a:rPr lang="en-US" dirty="0" err="1"/>
-              <a:t>Aplikasi</a:t>
-            </a:r>
-            <a:r>
-              <a:rPr lang="en-US" dirty="0"/>
-              <a:t> </a:t>
-            </a:r>
-            <a:endParaRPr dirty="0"/>
-          </a:p>
-        </p:txBody>
-      </p:sp>
-      <p:sp>
-        <p:nvSpPr>
-          <p:cNvPr id="5" name="Rectangle 4">
-            <a:extLst>
-              <a:ext uri="{FF2B5EF4-FFF2-40B4-BE49-F238E27FC236}">
-                <a16:creationId xmlns:a16="http://schemas.microsoft.com/office/drawing/2014/main" id="{588403C5-76FD-3534-CF95-6633DB201659}"/>
-              </a:ext>
-            </a:extLst>
-          </p:cNvPr>
-          <p:cNvSpPr/>
-          <p:nvPr/>
-        </p:nvSpPr>
-        <p:spPr>
-          <a:xfrm>
-            <a:off x="2358893" y="1552193"/>
-            <a:ext cx="4426212" cy="923330"/>
-          </a:xfrm>
-          <a:prstGeom prst="rect">
-            <a:avLst/>
-          </a:prstGeom>
-          <a:noFill/>
-        </p:spPr>
-        <p:txBody>
-          <a:bodyPr wrap="none" lIns="91440" tIns="45720" rIns="91440" bIns="45720">
-            <a:spAutoFit/>
-          </a:bodyPr>
-          <a:lstStyle/>
-          <a:p>
-            <a:pPr algn="ctr"/>
-            <a:r>
-              <a:rPr lang="en-US" sz="5400" b="0" cap="none" spc="0" dirty="0">
-                <a:ln w="0"/>
-                <a:solidFill>
-                  <a:schemeClr val="tx1"/>
-                </a:solidFill>
-                <a:effectLst>
-                  <a:outerShdw blurRad="38100" dist="19050" dir="2700000" algn="tl" rotWithShape="0">
-                    <a:schemeClr val="dk1">
-                      <a:alpha val="40000"/>
-                    </a:schemeClr>
-                  </a:outerShdw>
-                </a:effectLst>
-                <a:hlinkClick r:id="rId2"/>
-              </a:rPr>
-              <a:t>Demo </a:t>
-            </a:r>
-            <a:r>
-              <a:rPr lang="en-US" sz="5400" b="0" cap="none" spc="0" dirty="0" err="1">
-                <a:ln w="0"/>
-                <a:solidFill>
-                  <a:schemeClr val="tx1"/>
-                </a:solidFill>
-                <a:effectLst>
-                  <a:outerShdw blurRad="38100" dist="19050" dir="2700000" algn="tl" rotWithShape="0">
-                    <a:schemeClr val="dk1">
-                      <a:alpha val="40000"/>
-                    </a:schemeClr>
-                  </a:outerShdw>
-                </a:effectLst>
-                <a:hlinkClick r:id="rId2"/>
-              </a:rPr>
-              <a:t>Aplikasi</a:t>
-            </a:r>
-            <a:r>
-              <a:rPr lang="en-US" sz="5400" b="0" cap="none" spc="0" dirty="0">
-                <a:ln w="0"/>
-                <a:solidFill>
-                  <a:schemeClr val="tx1"/>
-                </a:solidFill>
-                <a:effectLst>
-                  <a:outerShdw blurRad="38100" dist="19050" dir="2700000" algn="tl" rotWithShape="0">
-                    <a:schemeClr val="dk1">
-                      <a:alpha val="40000"/>
-                    </a:schemeClr>
-                  </a:outerShdw>
-                </a:effectLst>
-              </a:rPr>
-              <a:t> </a:t>
-            </a:r>
-          </a:p>
-        </p:txBody>
-      </p:sp>
-      <p:pic>
-        <p:nvPicPr>
-          <p:cNvPr id="7" name="Picture 6">
-            <a:extLst>
-              <a:ext uri="{FF2B5EF4-FFF2-40B4-BE49-F238E27FC236}">
-                <a16:creationId xmlns:a16="http://schemas.microsoft.com/office/drawing/2014/main" id="{148ADB36-03DA-517F-7912-8F8DA96E9786}"/>
-              </a:ext>
-            </a:extLst>
-          </p:cNvPr>
-          <p:cNvPicPr>
-            <a:picLocks noChangeAspect="1"/>
-          </p:cNvPicPr>
-          <p:nvPr/>
-        </p:nvPicPr>
-        <p:blipFill>
-          <a:blip r:embed="rId3"/>
-          <a:stretch>
-            <a:fillRect/>
-          </a:stretch>
-        </p:blipFill>
-        <p:spPr>
-          <a:xfrm>
-            <a:off x="1238078" y="2725895"/>
-            <a:ext cx="6667843" cy="2730640"/>
-          </a:xfrm>
-          <a:prstGeom prst="rect">
-            <a:avLst/>
-          </a:prstGeom>
-        </p:spPr>
-      </p:pic>
-    </p:spTree>
-    <p:extLst>
-      <p:ext uri="{BB962C8B-B14F-4D97-AF65-F5344CB8AC3E}">
-        <p14:creationId xmlns:p14="http://schemas.microsoft.com/office/powerpoint/2010/main" val="2740457540"/>
-      </p:ext>
-    </p:extLst>
-  </p:cSld>
-  <p:clrMapOvr>
-    <a:masterClrMapping/>
-  </p:clrMapOvr>
-</p:sld>
-</file>
-
-<file path=ppt/slides/slide13.xml><?xml version="1.0" encoding="utf-8"?>
-<p:sld xmlns:a="http://schemas.openxmlformats.org/drawingml/2006/main" xmlns:r="http://schemas.openxmlformats.org/officeDocument/2006/relationships" xmlns:p="http://schemas.openxmlformats.org/presentationml/2006/main">
-  <p:cSld>
-    <p:spTree>
-      <p:nvGrpSpPr>
-        <p:cNvPr id="1" name=""/>
-        <p:cNvGrpSpPr/>
-        <p:nvPr/>
-      </p:nvGrpSpPr>
-      <p:grpSpPr>
-        <a:xfrm>
-          <a:off x="0" y="0"/>
-          <a:ext cx="0" cy="0"/>
-          <a:chOff x="0" y="0"/>
-          <a:chExt cx="0" cy="0"/>
-        </a:xfrm>
-      </p:grpSpPr>
-      <p:sp>
-        <p:nvSpPr>
-          <p:cNvPr id="2" name="Title 1"/>
-          <p:cNvSpPr>
-            <a:spLocks noGrp="1"/>
-          </p:cNvSpPr>
-          <p:nvPr>
-            <p:ph type="title"/>
-          </p:nvPr>
-        </p:nvSpPr>
-        <p:spPr/>
-        <p:txBody>
-          <a:bodyPr/>
-          <a:lstStyle/>
-          <a:p>
-            <a:r>
-              <a:t>Kesimpulan</a:t>
-            </a:r>
-          </a:p>
-        </p:txBody>
-      </p:sp>
-      <p:sp>
-        <p:nvSpPr>
-          <p:cNvPr id="3" name="Content Placeholder 2"/>
-          <p:cNvSpPr>
-            <a:spLocks noGrp="1"/>
-          </p:cNvSpPr>
-          <p:nvPr>
-            <p:ph idx="1"/>
-          </p:nvPr>
-        </p:nvSpPr>
-        <p:spPr>
-          <a:xfrm>
-            <a:off x="719666" y="2198914"/>
-            <a:ext cx="7704667" cy="3332816"/>
-          </a:xfrm>
-        </p:spPr>
-        <p:txBody>
-          <a:bodyPr/>
-          <a:lstStyle/>
-          <a:p>
-            <a:r>
-              <a:rPr dirty="0"/>
-              <a:t>- </a:t>
-            </a:r>
-            <a:r>
-              <a:rPr dirty="0" err="1"/>
-              <a:t>Aplikasi</a:t>
-            </a:r>
-            <a:r>
-              <a:rPr dirty="0"/>
-              <a:t> </a:t>
-            </a:r>
-            <a:r>
-              <a:rPr dirty="0" err="1"/>
-              <a:t>ini</a:t>
-            </a:r>
-            <a:r>
-              <a:rPr dirty="0"/>
-              <a:t> </a:t>
-            </a:r>
-            <a:r>
-              <a:rPr dirty="0" err="1"/>
-              <a:t>dirancang</a:t>
-            </a:r>
-            <a:r>
-              <a:rPr dirty="0"/>
-              <a:t> </a:t>
-            </a:r>
-            <a:r>
-              <a:rPr dirty="0" err="1"/>
-              <a:t>khusus</a:t>
-            </a:r>
-            <a:r>
-              <a:rPr dirty="0"/>
-              <a:t> </a:t>
-            </a:r>
-            <a:r>
-              <a:rPr dirty="0" err="1"/>
-              <a:t>untuk</a:t>
-            </a:r>
-            <a:r>
-              <a:rPr dirty="0"/>
-              <a:t> </a:t>
-            </a:r>
-            <a:r>
-              <a:rPr dirty="0" err="1"/>
-              <a:t>usaha</a:t>
-            </a:r>
-            <a:r>
-              <a:rPr dirty="0"/>
-              <a:t> retail B2C</a:t>
-            </a:r>
-          </a:p>
-          <a:p>
-            <a:r>
-              <a:rPr sz="2000" dirty="0"/>
-              <a:t>- </a:t>
-            </a:r>
-            <a:r>
-              <a:rPr sz="2000" dirty="0" err="1"/>
-              <a:t>Memudahkan</a:t>
-            </a:r>
-            <a:r>
-              <a:rPr sz="2000" dirty="0"/>
-              <a:t> </a:t>
-            </a:r>
-            <a:r>
-              <a:rPr sz="2000" dirty="0" err="1"/>
-              <a:t>pemantauan</a:t>
-            </a:r>
-            <a:r>
-              <a:rPr sz="2000" dirty="0"/>
-              <a:t>, </a:t>
-            </a:r>
-            <a:r>
-              <a:rPr sz="2000" dirty="0" err="1"/>
-              <a:t>penjualan</a:t>
-            </a:r>
-            <a:r>
-              <a:rPr sz="2000" dirty="0"/>
-              <a:t>, </a:t>
-            </a:r>
-            <a:r>
-              <a:rPr sz="2000" dirty="0" err="1"/>
-              <a:t>pengiriman</a:t>
-            </a:r>
-            <a:r>
-              <a:rPr sz="2000" dirty="0"/>
-              <a:t>, dan </a:t>
-            </a:r>
-            <a:r>
-              <a:rPr sz="2000" dirty="0" err="1"/>
-              <a:t>stok</a:t>
-            </a:r>
-            <a:endParaRPr sz="2000" dirty="0"/>
-          </a:p>
-          <a:p>
-            <a:r>
-              <a:rPr dirty="0"/>
-              <a:t>- </a:t>
-            </a:r>
-            <a:r>
-              <a:rPr dirty="0" err="1"/>
-              <a:t>Cocok</a:t>
-            </a:r>
-            <a:r>
-              <a:rPr dirty="0"/>
-              <a:t> </a:t>
-            </a:r>
-            <a:r>
-              <a:rPr dirty="0" err="1"/>
-              <a:t>untuk</a:t>
-            </a:r>
-            <a:r>
-              <a:rPr dirty="0"/>
-              <a:t> </a:t>
-            </a:r>
-            <a:r>
-              <a:rPr dirty="0" err="1"/>
-              <a:t>berbagai</a:t>
-            </a:r>
-            <a:r>
-              <a:rPr dirty="0"/>
-              <a:t> </a:t>
-            </a:r>
-            <a:r>
-              <a:rPr dirty="0" err="1"/>
-              <a:t>jenis</a:t>
-            </a:r>
-            <a:r>
-              <a:rPr dirty="0"/>
-              <a:t> </a:t>
-            </a:r>
-            <a:r>
-              <a:rPr dirty="0" err="1"/>
-              <a:t>usaha</a:t>
-            </a:r>
-            <a:r>
-              <a:rPr dirty="0"/>
-              <a:t> </a:t>
-            </a:r>
-            <a:r>
-              <a:rPr dirty="0" err="1"/>
-              <a:t>barang</a:t>
-            </a:r>
-            <a:endParaRPr lang="en-US" dirty="0"/>
-          </a:p>
-          <a:p>
-            <a:pPr marL="0" indent="0">
-              <a:buNone/>
-            </a:pPr>
-            <a:endParaRPr dirty="0"/>
-          </a:p>
-          <a:p>
-            <a:r>
-              <a:rPr dirty="0"/>
-              <a:t>🎯 </a:t>
-            </a:r>
-            <a:r>
-              <a:rPr dirty="0" err="1"/>
-              <a:t>Segera</a:t>
-            </a:r>
-            <a:r>
-              <a:rPr dirty="0"/>
-              <a:t> </a:t>
-            </a:r>
-            <a:r>
-              <a:rPr dirty="0" err="1"/>
-              <a:t>gunakan</a:t>
-            </a:r>
-            <a:r>
-              <a:rPr dirty="0"/>
-              <a:t> </a:t>
-            </a:r>
-            <a:r>
-              <a:rPr dirty="0" err="1"/>
-              <a:t>aplikasi</a:t>
-            </a:r>
-            <a:r>
-              <a:rPr dirty="0"/>
-              <a:t> </a:t>
-            </a:r>
-            <a:r>
-              <a:rPr dirty="0" err="1"/>
-              <a:t>ini</a:t>
-            </a:r>
-            <a:r>
-              <a:rPr dirty="0"/>
-              <a:t> </a:t>
-            </a:r>
-            <a:r>
-              <a:rPr dirty="0" err="1"/>
-              <a:t>untuk</a:t>
-            </a:r>
-            <a:r>
-              <a:rPr dirty="0"/>
-              <a:t> </a:t>
-            </a:r>
-            <a:r>
-              <a:rPr dirty="0" err="1"/>
-              <a:t>meningkatkan</a:t>
-            </a:r>
-            <a:r>
-              <a:rPr dirty="0"/>
-              <a:t> </a:t>
-            </a:r>
-            <a:r>
-              <a:rPr dirty="0" err="1"/>
-              <a:t>efisiensi</a:t>
-            </a:r>
-            <a:r>
-              <a:rPr dirty="0"/>
-              <a:t> dan </a:t>
-            </a:r>
-            <a:r>
-              <a:rPr dirty="0" err="1"/>
-              <a:t>keuntungan</a:t>
-            </a:r>
-            <a:r>
-              <a:rPr dirty="0"/>
-              <a:t> </a:t>
-            </a:r>
-            <a:r>
-              <a:rPr dirty="0" err="1"/>
-              <a:t>usaha</a:t>
-            </a:r>
-            <a:r>
-              <a:rPr dirty="0"/>
-              <a:t> Anda!</a:t>
-            </a:r>
-          </a:p>
-        </p:txBody>
-      </p:sp>
-    </p:spTree>
-  </p:cSld>
-  <p:clrMapOvr>
-    <a:masterClrMapping/>
-  </p:clrMapOvr>
-</p:sld>
-</file>
-
 <file path=ppt/slides/slide2.xml><?xml version="1.0" encoding="utf-8"?>
 <p:sld xmlns:a="http://schemas.openxmlformats.org/drawingml/2006/main" xmlns:r="http://schemas.openxmlformats.org/officeDocument/2006/relationships" xmlns:p="http://schemas.openxmlformats.org/presentationml/2006/main">
   <p:cSld>
@@ -7189,374 +7273,1018 @@
         </p:spPr>
         <p:txBody>
           <a:bodyPr>
-            <a:normAutofit/>
+            <a:noAutofit/>
           </a:bodyPr>
           <a:lstStyle/>
           <a:p>
             <a:r>
-              <a:rPr sz="3200" b="1" dirty="0" err="1"/>
+              <a:rPr lang="en-US" sz="3200" b="1" dirty="0" err="1"/>
+              <a:t>Realitas</a:t>
+            </a:r>
+            <a:r>
+              <a:rPr lang="en-US" sz="3200" b="1" dirty="0"/>
+              <a:t> &amp; </a:t>
+            </a:r>
+            <a:r>
+              <a:rPr lang="en-US" sz="3200" b="1" dirty="0" err="1"/>
               <a:t>Masalah</a:t>
             </a:r>
             <a:r>
-              <a:rPr sz="3200" b="1" dirty="0"/>
-              <a:t> Umum </a:t>
-            </a:r>
-            <a:r>
-              <a:rPr sz="3200" b="1" dirty="0" err="1"/>
-              <a:t>dalam</a:t>
-            </a:r>
-            <a:r>
-              <a:rPr sz="3200" b="1" dirty="0"/>
-              <a:t> Usaha Retail B2C</a:t>
-            </a:r>
+              <a:rPr lang="en-US" sz="3200" b="1" dirty="0"/>
+              <a:t> Usaha(The Pain Points)</a:t>
+            </a:r>
+            <a:endParaRPr sz="2800" b="1" dirty="0"/>
           </a:p>
         </p:txBody>
       </p:sp>
-      <p:sp>
-        <p:nvSpPr>
-          <p:cNvPr id="3" name="Content Placeholder 2"/>
-          <p:cNvSpPr>
-            <a:spLocks noGrp="1"/>
-          </p:cNvSpPr>
+      <p:graphicFrame>
+        <p:nvGraphicFramePr>
+          <p:cNvPr id="6" name="Content Placeholder 5">
+            <a:extLst>
+              <a:ext uri="{FF2B5EF4-FFF2-40B4-BE49-F238E27FC236}">
+                <a16:creationId xmlns:a16="http://schemas.microsoft.com/office/drawing/2014/main" id="{118A86BA-4D91-6897-C959-AC67D6319FD4}"/>
+              </a:ext>
+            </a:extLst>
+          </p:cNvPr>
+          <p:cNvGraphicFramePr>
+            <a:graphicFrameLocks noGrp="1"/>
+          </p:cNvGraphicFramePr>
           <p:nvPr>
             <p:ph idx="1"/>
+            <p:extLst>
+              <p:ext uri="{D42A27DB-BD31-4B8C-83A1-F6EECF244321}">
+                <p14:modId xmlns:p14="http://schemas.microsoft.com/office/powerpoint/2010/main" val="3028387600"/>
+              </p:ext>
+            </p:extLst>
           </p:nvPr>
-        </p:nvSpPr>
-        <p:spPr>
-          <a:xfrm>
-            <a:off x="1123647" y="1554869"/>
-            <a:ext cx="7704667" cy="3332816"/>
-          </a:xfrm>
-        </p:spPr>
-        <p:txBody>
-          <a:bodyPr>
-            <a:normAutofit fontScale="70000" lnSpcReduction="20000"/>
-          </a:bodyPr>
-          <a:lstStyle/>
-          <a:p>
-            <a:r>
-              <a:rPr lang="en-US" dirty="0"/>
-              <a:t>S</a:t>
-            </a:r>
-            <a:r>
-              <a:rPr dirty="0"/>
-              <a:t>ulit </a:t>
-            </a:r>
-            <a:r>
-              <a:rPr dirty="0" err="1"/>
-              <a:t>memantau</a:t>
-            </a:r>
-            <a:r>
-              <a:rPr dirty="0"/>
-              <a:t> </a:t>
-            </a:r>
-            <a:r>
-              <a:rPr dirty="0" err="1"/>
-              <a:t>stok</a:t>
-            </a:r>
-            <a:r>
-              <a:rPr dirty="0"/>
-              <a:t> </a:t>
-            </a:r>
-            <a:r>
-              <a:rPr dirty="0" err="1"/>
-              <a:t>secara</a:t>
-            </a:r>
-            <a:r>
-              <a:rPr dirty="0"/>
-              <a:t> real-time</a:t>
-            </a:r>
-            <a:endParaRPr lang="en-US" dirty="0"/>
-          </a:p>
-          <a:p>
-            <a:r>
-              <a:rPr lang="en-US" dirty="0"/>
-              <a:t>Sulit </a:t>
-            </a:r>
-            <a:r>
-              <a:rPr lang="en-US" dirty="0" err="1"/>
-              <a:t>mengelola</a:t>
-            </a:r>
-            <a:r>
-              <a:rPr lang="en-US" dirty="0"/>
-              <a:t> </a:t>
-            </a:r>
-            <a:r>
-              <a:rPr lang="en-US" dirty="0" err="1"/>
-              <a:t>pemesanan</a:t>
-            </a:r>
-            <a:endParaRPr dirty="0"/>
-          </a:p>
-          <a:p>
-            <a:r>
-              <a:rPr dirty="0" err="1"/>
-              <a:t>Kurangnya</a:t>
-            </a:r>
-            <a:r>
-              <a:rPr dirty="0"/>
-              <a:t> data </a:t>
-            </a:r>
-            <a:r>
-              <a:rPr lang="en-US" dirty="0"/>
-              <a:t>dan </a:t>
-            </a:r>
-            <a:r>
-              <a:rPr lang="en-US" dirty="0" err="1"/>
-              <a:t>laporan</a:t>
-            </a:r>
-            <a:r>
-              <a:rPr lang="en-US" dirty="0"/>
-              <a:t> </a:t>
-            </a:r>
-            <a:r>
-              <a:rPr dirty="0" err="1"/>
-              <a:t>penjualan</a:t>
-            </a:r>
-            <a:r>
-              <a:rPr lang="en-US" dirty="0"/>
-              <a:t> </a:t>
-            </a:r>
-            <a:r>
-              <a:rPr dirty="0"/>
-              <a:t>yang </a:t>
-            </a:r>
-            <a:r>
-              <a:rPr dirty="0" err="1"/>
-              <a:t>akurat</a:t>
-            </a:r>
-            <a:r>
-              <a:rPr lang="en-US" dirty="0"/>
-              <a:t> &amp; </a:t>
-            </a:r>
-            <a:r>
-              <a:rPr lang="en-US" dirty="0" err="1"/>
-              <a:t>realtime</a:t>
-            </a:r>
-            <a:r>
-              <a:rPr lang="en-US" dirty="0"/>
-              <a:t> </a:t>
-            </a:r>
-          </a:p>
-          <a:p>
-            <a:r>
-              <a:rPr lang="en-US" dirty="0" err="1"/>
-              <a:t>Kurangnya</a:t>
-            </a:r>
-            <a:r>
-              <a:rPr lang="en-US" dirty="0"/>
-              <a:t> data dan </a:t>
-            </a:r>
-            <a:r>
-              <a:rPr lang="en-US" dirty="0" err="1"/>
-              <a:t>laporan</a:t>
-            </a:r>
-            <a:r>
-              <a:rPr lang="en-US" dirty="0"/>
-              <a:t> </a:t>
-            </a:r>
-            <a:r>
-              <a:rPr lang="en-US" dirty="0" err="1"/>
-              <a:t>keuangan</a:t>
-            </a:r>
-            <a:r>
-              <a:rPr lang="en-US" dirty="0"/>
-              <a:t> yang </a:t>
-            </a:r>
-            <a:r>
-              <a:rPr lang="en-US" dirty="0" err="1"/>
-              <a:t>akurat</a:t>
-            </a:r>
-            <a:r>
-              <a:rPr lang="en-US" dirty="0"/>
-              <a:t> &amp; </a:t>
-            </a:r>
-            <a:r>
-              <a:rPr lang="en-US" dirty="0" err="1"/>
-              <a:t>realtime</a:t>
-            </a:r>
-            <a:endParaRPr lang="en-US" dirty="0"/>
-          </a:p>
-          <a:p>
-            <a:r>
-              <a:rPr lang="en-US" dirty="0" err="1"/>
-              <a:t>Validasi</a:t>
-            </a:r>
-            <a:r>
-              <a:rPr lang="en-US" dirty="0"/>
-              <a:t> &amp; </a:t>
-            </a:r>
-            <a:r>
-              <a:rPr lang="en-US" dirty="0" err="1"/>
-              <a:t>verifikasi</a:t>
-            </a:r>
-            <a:r>
-              <a:rPr lang="en-US" dirty="0"/>
-              <a:t> </a:t>
-            </a:r>
-            <a:r>
-              <a:rPr lang="en-US" dirty="0" err="1"/>
-              <a:t>Pembayaran</a:t>
-            </a:r>
-            <a:r>
-              <a:rPr lang="en-US" dirty="0"/>
-              <a:t> </a:t>
-            </a:r>
-            <a:r>
-              <a:rPr lang="en-US" dirty="0" err="1"/>
-              <a:t>tidak</a:t>
-            </a:r>
-            <a:r>
-              <a:rPr lang="en-US" dirty="0"/>
-              <a:t> </a:t>
-            </a:r>
-            <a:r>
-              <a:rPr lang="en-US" dirty="0" err="1"/>
-              <a:t>terkelola</a:t>
-            </a:r>
-            <a:r>
-              <a:rPr lang="en-US" dirty="0"/>
-              <a:t> </a:t>
-            </a:r>
-            <a:r>
-              <a:rPr lang="en-US" dirty="0" err="1"/>
-              <a:t>dengan</a:t>
-            </a:r>
-            <a:r>
-              <a:rPr lang="en-US" dirty="0"/>
-              <a:t> </a:t>
-            </a:r>
-            <a:r>
-              <a:rPr lang="en-US" dirty="0" err="1"/>
-              <a:t>baik</a:t>
-            </a:r>
-            <a:r>
-              <a:rPr lang="en-US" dirty="0"/>
-              <a:t> </a:t>
-            </a:r>
-          </a:p>
-          <a:p>
-            <a:r>
-              <a:rPr lang="en-US" dirty="0"/>
-              <a:t>Proses </a:t>
-            </a:r>
-            <a:r>
-              <a:rPr lang="en-US" dirty="0" err="1"/>
-              <a:t>pengemasan</a:t>
-            </a:r>
-            <a:r>
-              <a:rPr lang="en-US" dirty="0"/>
-              <a:t> &amp; </a:t>
-            </a:r>
-            <a:r>
-              <a:rPr lang="en-US" dirty="0" err="1"/>
-              <a:t>pengiriman</a:t>
-            </a:r>
-            <a:r>
-              <a:rPr lang="en-US" dirty="0"/>
-              <a:t> </a:t>
-            </a:r>
-            <a:r>
-              <a:rPr lang="en-US" dirty="0" err="1"/>
-              <a:t>tidak</a:t>
-            </a:r>
-            <a:r>
-              <a:rPr lang="en-US" dirty="0"/>
-              <a:t> </a:t>
-            </a:r>
-            <a:r>
-              <a:rPr lang="en-US" dirty="0" err="1"/>
-              <a:t>terkelola</a:t>
-            </a:r>
-            <a:endParaRPr lang="en-US" dirty="0"/>
-          </a:p>
-          <a:p>
-            <a:r>
-              <a:rPr lang="en-US" dirty="0"/>
-              <a:t>Tidak </a:t>
-            </a:r>
-            <a:r>
-              <a:rPr lang="en-US" dirty="0" err="1"/>
-              <a:t>ada</a:t>
-            </a:r>
-            <a:r>
-              <a:rPr lang="en-US" dirty="0"/>
-              <a:t> </a:t>
-            </a:r>
-            <a:r>
-              <a:rPr lang="en-US" dirty="0" err="1"/>
-              <a:t>varian</a:t>
-            </a:r>
-            <a:r>
-              <a:rPr lang="en-US" dirty="0"/>
-              <a:t> </a:t>
-            </a:r>
-            <a:r>
-              <a:rPr lang="en-US" dirty="0" err="1"/>
-              <a:t>produk</a:t>
-            </a:r>
-            <a:r>
-              <a:rPr lang="en-US" dirty="0"/>
-              <a:t> bundling</a:t>
-            </a:r>
-            <a:endParaRPr dirty="0"/>
-          </a:p>
-          <a:p>
-            <a:r>
-              <a:rPr dirty="0"/>
-              <a:t>Tidak </a:t>
-            </a:r>
-            <a:r>
-              <a:rPr dirty="0" err="1"/>
-              <a:t>ada</a:t>
-            </a:r>
-            <a:r>
-              <a:rPr dirty="0"/>
-              <a:t> </a:t>
-            </a:r>
-            <a:r>
-              <a:rPr dirty="0" err="1"/>
-              <a:t>sistem</a:t>
-            </a:r>
-            <a:r>
-              <a:rPr dirty="0"/>
-              <a:t> </a:t>
-            </a:r>
-            <a:r>
-              <a:rPr dirty="0" err="1"/>
-              <a:t>untuk</a:t>
-            </a:r>
-            <a:r>
-              <a:rPr dirty="0"/>
-              <a:t> reseller</a:t>
-            </a:r>
-            <a:endParaRPr lang="en-US" dirty="0"/>
-          </a:p>
-          <a:p>
-            <a:r>
-              <a:rPr lang="en-US" dirty="0"/>
-              <a:t>Tidak </a:t>
-            </a:r>
-            <a:r>
-              <a:rPr lang="en-US" dirty="0" err="1"/>
-              <a:t>Pengelolaan</a:t>
-            </a:r>
-            <a:r>
-              <a:rPr lang="en-US" dirty="0"/>
-              <a:t> Pre Order</a:t>
-            </a:r>
-            <a:endParaRPr dirty="0"/>
-          </a:p>
-          <a:p>
-            <a:pPr marL="0" indent="0">
-              <a:buNone/>
-            </a:pPr>
-            <a:r>
-              <a:rPr dirty="0"/>
-              <a:t> </a:t>
-            </a:r>
-          </a:p>
-        </p:txBody>
-      </p:sp>
+        </p:nvGraphicFramePr>
+        <p:xfrm>
+          <a:off x="1026544" y="1365120"/>
+          <a:ext cx="7704667" cy="4400550"/>
+        </p:xfrm>
+        <a:graphic>
+          <a:graphicData uri="http://schemas.openxmlformats.org/drawingml/2006/table">
+            <a:tbl>
+              <a:tblPr/>
+              <a:tblGrid>
+                <a:gridCol w="2308931">
+                  <a:extLst>
+                    <a:ext uri="{9D8B030D-6E8A-4147-A177-3AD203B41FA5}">
+                      <a16:colId xmlns:a16="http://schemas.microsoft.com/office/drawing/2014/main" val="3515592083"/>
+                    </a:ext>
+                  </a:extLst>
+                </a:gridCol>
+                <a:gridCol w="5395736">
+                  <a:extLst>
+                    <a:ext uri="{9D8B030D-6E8A-4147-A177-3AD203B41FA5}">
+                      <a16:colId xmlns:a16="http://schemas.microsoft.com/office/drawing/2014/main" val="4124078165"/>
+                    </a:ext>
+                  </a:extLst>
+                </a:gridCol>
+              </a:tblGrid>
+              <a:tr h="568250">
+                <a:tc>
+                  <a:txBody>
+                    <a:bodyPr/>
+                    <a:lstStyle/>
+                    <a:p>
+                      <a:pPr rtl="0" fontAlgn="t">
+                        <a:spcBef>
+                          <a:spcPts val="750"/>
+                        </a:spcBef>
+                        <a:spcAft>
+                          <a:spcPts val="750"/>
+                        </a:spcAft>
+                        <a:buNone/>
+                      </a:pPr>
+                      <a:r>
+                        <a:rPr lang="en-US" sz="1600" b="1" i="0" u="none" strike="noStrike" dirty="0" err="1">
+                          <a:solidFill>
+                            <a:srgbClr val="FFFFFF"/>
+                          </a:solidFill>
+                          <a:effectLst/>
+                          <a:latin typeface="Arial" panose="020B0604020202020204" pitchFamily="34" charset="0"/>
+                        </a:rPr>
+                        <a:t>Bidang</a:t>
+                      </a:r>
+                      <a:r>
+                        <a:rPr lang="en-US" sz="1600" b="1" i="0" u="none" strike="noStrike" dirty="0">
+                          <a:solidFill>
+                            <a:srgbClr val="FFFFFF"/>
+                          </a:solidFill>
+                          <a:effectLst/>
+                          <a:latin typeface="Arial" panose="020B0604020202020204" pitchFamily="34" charset="0"/>
+                        </a:rPr>
+                        <a:t> </a:t>
+                      </a:r>
+                      <a:r>
+                        <a:rPr lang="en-US" sz="1600" b="1" i="0" u="none" strike="noStrike" dirty="0" err="1">
+                          <a:solidFill>
+                            <a:srgbClr val="FFFFFF"/>
+                          </a:solidFill>
+                          <a:effectLst/>
+                          <a:latin typeface="Arial" panose="020B0604020202020204" pitchFamily="34" charset="0"/>
+                        </a:rPr>
+                        <a:t>Operasional</a:t>
+                      </a:r>
+                      <a:endParaRPr lang="en-US" sz="2400" dirty="0">
+                        <a:effectLst/>
+                      </a:endParaRPr>
+                    </a:p>
+                  </a:txBody>
+                  <a:tcPr marL="130497" marR="130497" marT="130497" marB="130497">
+                    <a:lnL w="9525" cap="flat" cmpd="sng" algn="ctr">
+                      <a:solidFill>
+                        <a:srgbClr val="E2E8F0"/>
+                      </a:solidFill>
+                      <a:prstDash val="solid"/>
+                      <a:round/>
+                      <a:headEnd type="none" w="med" len="med"/>
+                      <a:tailEnd type="none" w="med" len="med"/>
+                    </a:lnL>
+                    <a:lnR w="9525" cap="flat" cmpd="sng" algn="ctr">
+                      <a:solidFill>
+                        <a:srgbClr val="E2E8F0"/>
+                      </a:solidFill>
+                      <a:prstDash val="solid"/>
+                      <a:round/>
+                      <a:headEnd type="none" w="med" len="med"/>
+                      <a:tailEnd type="none" w="med" len="med"/>
+                    </a:lnR>
+                    <a:lnT w="9525" cap="flat" cmpd="sng" algn="ctr">
+                      <a:solidFill>
+                        <a:srgbClr val="E2E8F0"/>
+                      </a:solidFill>
+                      <a:prstDash val="solid"/>
+                      <a:round/>
+                      <a:headEnd type="none" w="med" len="med"/>
+                      <a:tailEnd type="none" w="med" len="med"/>
+                    </a:lnT>
+                    <a:lnB w="9525" cap="flat" cmpd="sng" algn="ctr">
+                      <a:solidFill>
+                        <a:srgbClr val="E2E8F0"/>
+                      </a:solidFill>
+                      <a:prstDash val="solid"/>
+                      <a:round/>
+                      <a:headEnd type="none" w="med" len="med"/>
+                      <a:tailEnd type="none" w="med" len="med"/>
+                    </a:lnB>
+                    <a:solidFill>
+                      <a:srgbClr val="2B6CB0"/>
+                    </a:solidFill>
+                  </a:tcPr>
+                </a:tc>
+                <a:tc>
+                  <a:txBody>
+                    <a:bodyPr/>
+                    <a:lstStyle/>
+                    <a:p>
+                      <a:pPr rtl="0" fontAlgn="t">
+                        <a:spcBef>
+                          <a:spcPts val="750"/>
+                        </a:spcBef>
+                        <a:spcAft>
+                          <a:spcPts val="750"/>
+                        </a:spcAft>
+                        <a:buNone/>
+                      </a:pPr>
+                      <a:r>
+                        <a:rPr lang="en-US" sz="1600" b="1" i="0" u="none" strike="noStrike" dirty="0" err="1">
+                          <a:solidFill>
+                            <a:srgbClr val="FFFFFF"/>
+                          </a:solidFill>
+                          <a:effectLst/>
+                          <a:latin typeface="Arial" panose="020B0604020202020204" pitchFamily="34" charset="0"/>
+                        </a:rPr>
+                        <a:t>Masalah</a:t>
+                      </a:r>
+                      <a:r>
+                        <a:rPr lang="en-US" sz="1600" b="1" i="0" u="none" strike="noStrike" dirty="0">
+                          <a:solidFill>
+                            <a:srgbClr val="FFFFFF"/>
+                          </a:solidFill>
+                          <a:effectLst/>
+                          <a:latin typeface="Arial" panose="020B0604020202020204" pitchFamily="34" charset="0"/>
+                        </a:rPr>
+                        <a:t> yang Sering </a:t>
+                      </a:r>
+                      <a:r>
+                        <a:rPr lang="en-US" sz="1600" b="1" i="0" u="none" strike="noStrike" dirty="0" err="1">
+                          <a:solidFill>
+                            <a:srgbClr val="FFFFFF"/>
+                          </a:solidFill>
+                          <a:effectLst/>
+                          <a:latin typeface="Arial" panose="020B0604020202020204" pitchFamily="34" charset="0"/>
+                        </a:rPr>
+                        <a:t>Terjadi</a:t>
+                      </a:r>
+                      <a:r>
+                        <a:rPr lang="en-US" sz="1600" b="1" i="0" u="none" strike="noStrike" dirty="0">
+                          <a:solidFill>
+                            <a:srgbClr val="FFFFFF"/>
+                          </a:solidFill>
+                          <a:effectLst/>
+                          <a:latin typeface="Arial" panose="020B0604020202020204" pitchFamily="34" charset="0"/>
+                        </a:rPr>
+                        <a:t> di </a:t>
+                      </a:r>
+                      <a:r>
+                        <a:rPr lang="en-US" sz="1600" b="1" i="0" u="none" strike="noStrike" dirty="0" err="1">
+                          <a:solidFill>
+                            <a:srgbClr val="FFFFFF"/>
+                          </a:solidFill>
+                          <a:effectLst/>
+                          <a:latin typeface="Arial" panose="020B0604020202020204" pitchFamily="34" charset="0"/>
+                        </a:rPr>
+                        <a:t>Lapangan</a:t>
+                      </a:r>
+                      <a:endParaRPr lang="en-US" sz="2400" dirty="0">
+                        <a:effectLst/>
+                      </a:endParaRPr>
+                    </a:p>
+                  </a:txBody>
+                  <a:tcPr marL="130497" marR="130497" marT="130497" marB="130497">
+                    <a:lnL w="9525" cap="flat" cmpd="sng" algn="ctr">
+                      <a:solidFill>
+                        <a:srgbClr val="E2E8F0"/>
+                      </a:solidFill>
+                      <a:prstDash val="solid"/>
+                      <a:round/>
+                      <a:headEnd type="none" w="med" len="med"/>
+                      <a:tailEnd type="none" w="med" len="med"/>
+                    </a:lnL>
+                    <a:lnR w="9525" cap="flat" cmpd="sng" algn="ctr">
+                      <a:solidFill>
+                        <a:srgbClr val="E2E8F0"/>
+                      </a:solidFill>
+                      <a:prstDash val="solid"/>
+                      <a:round/>
+                      <a:headEnd type="none" w="med" len="med"/>
+                      <a:tailEnd type="none" w="med" len="med"/>
+                    </a:lnR>
+                    <a:lnT w="9525" cap="flat" cmpd="sng" algn="ctr">
+                      <a:solidFill>
+                        <a:srgbClr val="E2E8F0"/>
+                      </a:solidFill>
+                      <a:prstDash val="solid"/>
+                      <a:round/>
+                      <a:headEnd type="none" w="med" len="med"/>
+                      <a:tailEnd type="none" w="med" len="med"/>
+                    </a:lnT>
+                    <a:lnB w="9525" cap="flat" cmpd="sng" algn="ctr">
+                      <a:solidFill>
+                        <a:srgbClr val="E2E8F0"/>
+                      </a:solidFill>
+                      <a:prstDash val="solid"/>
+                      <a:round/>
+                      <a:headEnd type="none" w="med" len="med"/>
+                      <a:tailEnd type="none" w="med" len="med"/>
+                    </a:lnB>
+                    <a:solidFill>
+                      <a:srgbClr val="2B6CB0"/>
+                    </a:solidFill>
+                  </a:tcPr>
+                </a:tc>
+                <a:extLst>
+                  <a:ext uri="{0D108BD9-81ED-4DB2-BD59-A6C34878D82A}">
+                    <a16:rowId xmlns:a16="http://schemas.microsoft.com/office/drawing/2014/main" val="123463785"/>
+                  </a:ext>
+                </a:extLst>
+              </a:tr>
+              <a:tr h="923636">
+                <a:tc>
+                  <a:txBody>
+                    <a:bodyPr/>
+                    <a:lstStyle/>
+                    <a:p>
+                      <a:pPr rtl="0" fontAlgn="t">
+                        <a:spcBef>
+                          <a:spcPts val="750"/>
+                        </a:spcBef>
+                        <a:spcAft>
+                          <a:spcPts val="750"/>
+                        </a:spcAft>
+                        <a:buNone/>
+                      </a:pPr>
+                      <a:r>
+                        <a:rPr lang="en-US" sz="1600" b="1" i="0" u="none" strike="noStrike" dirty="0" err="1">
+                          <a:solidFill>
+                            <a:srgbClr val="333333"/>
+                          </a:solidFill>
+                          <a:effectLst/>
+                          <a:latin typeface="Arial" panose="020B0604020202020204" pitchFamily="34" charset="0"/>
+                        </a:rPr>
+                        <a:t>Manajemen</a:t>
+                      </a:r>
+                      <a:r>
+                        <a:rPr lang="en-US" sz="1600" b="1" i="0" u="none" strike="noStrike" dirty="0">
+                          <a:solidFill>
+                            <a:srgbClr val="333333"/>
+                          </a:solidFill>
+                          <a:effectLst/>
+                          <a:latin typeface="Arial" panose="020B0604020202020204" pitchFamily="34" charset="0"/>
+                        </a:rPr>
+                        <a:t> Stok</a:t>
+                      </a:r>
+                      <a:endParaRPr lang="en-US" sz="2400" dirty="0">
+                        <a:effectLst/>
+                      </a:endParaRPr>
+                    </a:p>
+                  </a:txBody>
+                  <a:tcPr marL="130497" marR="130497" marT="130497" marB="130497">
+                    <a:lnL w="9525" cap="flat" cmpd="sng" algn="ctr">
+                      <a:solidFill>
+                        <a:srgbClr val="E2E8F0"/>
+                      </a:solidFill>
+                      <a:prstDash val="solid"/>
+                      <a:round/>
+                      <a:headEnd type="none" w="med" len="med"/>
+                      <a:tailEnd type="none" w="med" len="med"/>
+                    </a:lnL>
+                    <a:lnR w="9525" cap="flat" cmpd="sng" algn="ctr">
+                      <a:solidFill>
+                        <a:srgbClr val="E2E8F0"/>
+                      </a:solidFill>
+                      <a:prstDash val="solid"/>
+                      <a:round/>
+                      <a:headEnd type="none" w="med" len="med"/>
+                      <a:tailEnd type="none" w="med" len="med"/>
+                    </a:lnR>
+                    <a:lnT w="9525" cap="flat" cmpd="sng" algn="ctr">
+                      <a:solidFill>
+                        <a:srgbClr val="E2E8F0"/>
+                      </a:solidFill>
+                      <a:prstDash val="solid"/>
+                      <a:round/>
+                      <a:headEnd type="none" w="med" len="med"/>
+                      <a:tailEnd type="none" w="med" len="med"/>
+                    </a:lnT>
+                    <a:lnB w="9525" cap="flat" cmpd="sng" algn="ctr">
+                      <a:solidFill>
+                        <a:srgbClr val="E2E8F0"/>
+                      </a:solidFill>
+                      <a:prstDash val="solid"/>
+                      <a:round/>
+                      <a:headEnd type="none" w="med" len="med"/>
+                      <a:tailEnd type="none" w="med" len="med"/>
+                    </a:lnB>
+                    <a:noFill/>
+                  </a:tcPr>
+                </a:tc>
+                <a:tc>
+                  <a:txBody>
+                    <a:bodyPr/>
+                    <a:lstStyle/>
+                    <a:p>
+                      <a:pPr rtl="0" fontAlgn="t">
+                        <a:spcBef>
+                          <a:spcPts val="750"/>
+                        </a:spcBef>
+                        <a:spcAft>
+                          <a:spcPts val="750"/>
+                        </a:spcAft>
+                        <a:buNone/>
+                      </a:pPr>
+                      <a:r>
+                        <a:rPr lang="en-US" sz="1600" b="0" i="0" u="none" strike="noStrike">
+                          <a:solidFill>
+                            <a:srgbClr val="333333"/>
+                          </a:solidFill>
+                          <a:effectLst/>
+                          <a:latin typeface="Arial" panose="020B0604020202020204" pitchFamily="34" charset="0"/>
+                        </a:rPr>
+                        <a:t>Stok tidak real-time, sering selisih antara catatan dan fisik gudang, serta penanganan varian/bundling yang rumit.</a:t>
+                      </a:r>
+                      <a:endParaRPr lang="en-US" sz="2400">
+                        <a:effectLst/>
+                      </a:endParaRPr>
+                    </a:p>
+                  </a:txBody>
+                  <a:tcPr marL="130497" marR="130497" marT="130497" marB="130497">
+                    <a:lnL w="9525" cap="flat" cmpd="sng" algn="ctr">
+                      <a:solidFill>
+                        <a:srgbClr val="E2E8F0"/>
+                      </a:solidFill>
+                      <a:prstDash val="solid"/>
+                      <a:round/>
+                      <a:headEnd type="none" w="med" len="med"/>
+                      <a:tailEnd type="none" w="med" len="med"/>
+                    </a:lnL>
+                    <a:lnR w="9525" cap="flat" cmpd="sng" algn="ctr">
+                      <a:solidFill>
+                        <a:srgbClr val="E2E8F0"/>
+                      </a:solidFill>
+                      <a:prstDash val="solid"/>
+                      <a:round/>
+                      <a:headEnd type="none" w="med" len="med"/>
+                      <a:tailEnd type="none" w="med" len="med"/>
+                    </a:lnR>
+                    <a:lnT w="9525" cap="flat" cmpd="sng" algn="ctr">
+                      <a:solidFill>
+                        <a:srgbClr val="E2E8F0"/>
+                      </a:solidFill>
+                      <a:prstDash val="solid"/>
+                      <a:round/>
+                      <a:headEnd type="none" w="med" len="med"/>
+                      <a:tailEnd type="none" w="med" len="med"/>
+                    </a:lnT>
+                    <a:lnB w="9525" cap="flat" cmpd="sng" algn="ctr">
+                      <a:solidFill>
+                        <a:srgbClr val="E2E8F0"/>
+                      </a:solidFill>
+                      <a:prstDash val="solid"/>
+                      <a:round/>
+                      <a:headEnd type="none" w="med" len="med"/>
+                      <a:tailEnd type="none" w="med" len="med"/>
+                    </a:lnB>
+                    <a:noFill/>
+                  </a:tcPr>
+                </a:tc>
+                <a:extLst>
+                  <a:ext uri="{0D108BD9-81ED-4DB2-BD59-A6C34878D82A}">
+                    <a16:rowId xmlns:a16="http://schemas.microsoft.com/office/drawing/2014/main" val="675744729"/>
+                  </a:ext>
+                </a:extLst>
+              </a:tr>
+              <a:tr h="923636">
+                <a:tc>
+                  <a:txBody>
+                    <a:bodyPr/>
+                    <a:lstStyle/>
+                    <a:p>
+                      <a:pPr rtl="0" fontAlgn="t">
+                        <a:spcBef>
+                          <a:spcPts val="750"/>
+                        </a:spcBef>
+                        <a:spcAft>
+                          <a:spcPts val="750"/>
+                        </a:spcAft>
+                        <a:buNone/>
+                      </a:pPr>
+                      <a:r>
+                        <a:rPr lang="en-US" sz="1600" b="1" i="0" u="none" strike="noStrike">
+                          <a:solidFill>
+                            <a:srgbClr val="333333"/>
+                          </a:solidFill>
+                          <a:effectLst/>
+                          <a:latin typeface="Arial" panose="020B0604020202020204" pitchFamily="34" charset="0"/>
+                        </a:rPr>
+                        <a:t>Pengolahan Pesanan</a:t>
+                      </a:r>
+                      <a:endParaRPr lang="en-US" sz="2400">
+                        <a:effectLst/>
+                      </a:endParaRPr>
+                    </a:p>
+                  </a:txBody>
+                  <a:tcPr marL="130497" marR="130497" marT="130497" marB="130497">
+                    <a:lnL w="9525" cap="flat" cmpd="sng" algn="ctr">
+                      <a:solidFill>
+                        <a:srgbClr val="E2E8F0"/>
+                      </a:solidFill>
+                      <a:prstDash val="solid"/>
+                      <a:round/>
+                      <a:headEnd type="none" w="med" len="med"/>
+                      <a:tailEnd type="none" w="med" len="med"/>
+                    </a:lnL>
+                    <a:lnR w="9525" cap="flat" cmpd="sng" algn="ctr">
+                      <a:solidFill>
+                        <a:srgbClr val="E2E8F0"/>
+                      </a:solidFill>
+                      <a:prstDash val="solid"/>
+                      <a:round/>
+                      <a:headEnd type="none" w="med" len="med"/>
+                      <a:tailEnd type="none" w="med" len="med"/>
+                    </a:lnR>
+                    <a:lnT w="9525" cap="flat" cmpd="sng" algn="ctr">
+                      <a:solidFill>
+                        <a:srgbClr val="E2E8F0"/>
+                      </a:solidFill>
+                      <a:prstDash val="solid"/>
+                      <a:round/>
+                      <a:headEnd type="none" w="med" len="med"/>
+                      <a:tailEnd type="none" w="med" len="med"/>
+                    </a:lnT>
+                    <a:lnB w="9525" cap="flat" cmpd="sng" algn="ctr">
+                      <a:solidFill>
+                        <a:srgbClr val="E2E8F0"/>
+                      </a:solidFill>
+                      <a:prstDash val="solid"/>
+                      <a:round/>
+                      <a:headEnd type="none" w="med" len="med"/>
+                      <a:tailEnd type="none" w="med" len="med"/>
+                    </a:lnB>
+                    <a:noFill/>
+                  </a:tcPr>
+                </a:tc>
+                <a:tc>
+                  <a:txBody>
+                    <a:bodyPr/>
+                    <a:lstStyle/>
+                    <a:p>
+                      <a:pPr rtl="0" fontAlgn="t">
+                        <a:spcBef>
+                          <a:spcPts val="750"/>
+                        </a:spcBef>
+                        <a:spcAft>
+                          <a:spcPts val="750"/>
+                        </a:spcAft>
+                        <a:buNone/>
+                      </a:pPr>
+                      <a:r>
+                        <a:rPr lang="en-US" sz="1600" b="0" i="0" u="none" strike="noStrike" dirty="0">
+                          <a:solidFill>
+                            <a:srgbClr val="333333"/>
+                          </a:solidFill>
+                          <a:effectLst/>
+                          <a:latin typeface="Arial" panose="020B0604020202020204" pitchFamily="34" charset="0"/>
+                        </a:rPr>
+                        <a:t>Proses </a:t>
+                      </a:r>
+                      <a:r>
+                        <a:rPr lang="en-US" sz="1600" b="0" i="0" u="none" strike="noStrike" dirty="0" err="1">
+                          <a:solidFill>
+                            <a:srgbClr val="333333"/>
+                          </a:solidFill>
+                          <a:effectLst/>
+                          <a:latin typeface="Arial" panose="020B0604020202020204" pitchFamily="34" charset="0"/>
+                        </a:rPr>
+                        <a:t>pengemasan</a:t>
+                      </a:r>
+                      <a:r>
+                        <a:rPr lang="en-US" sz="1600" b="0" i="0" u="none" strike="noStrike" dirty="0">
+                          <a:solidFill>
+                            <a:srgbClr val="333333"/>
+                          </a:solidFill>
+                          <a:effectLst/>
+                          <a:latin typeface="Arial" panose="020B0604020202020204" pitchFamily="34" charset="0"/>
+                        </a:rPr>
+                        <a:t>, </a:t>
+                      </a:r>
+                      <a:r>
+                        <a:rPr lang="en-US" sz="1600" b="0" i="0" u="none" strike="noStrike" dirty="0" err="1">
+                          <a:solidFill>
+                            <a:srgbClr val="333333"/>
+                          </a:solidFill>
+                          <a:effectLst/>
+                          <a:latin typeface="Arial" panose="020B0604020202020204" pitchFamily="34" charset="0"/>
+                        </a:rPr>
+                        <a:t>ekspedisi</a:t>
+                      </a:r>
+                      <a:r>
+                        <a:rPr lang="en-US" sz="1600" b="0" i="0" u="none" strike="noStrike" dirty="0">
+                          <a:solidFill>
+                            <a:srgbClr val="333333"/>
+                          </a:solidFill>
+                          <a:effectLst/>
+                          <a:latin typeface="Arial" panose="020B0604020202020204" pitchFamily="34" charset="0"/>
+                        </a:rPr>
+                        <a:t>, dan </a:t>
+                      </a:r>
+                      <a:r>
+                        <a:rPr lang="en-US" sz="1600" b="0" i="0" u="none" strike="noStrike" dirty="0" err="1">
+                          <a:solidFill>
+                            <a:srgbClr val="333333"/>
+                          </a:solidFill>
+                          <a:effectLst/>
+                          <a:latin typeface="Arial" panose="020B0604020202020204" pitchFamily="34" charset="0"/>
+                        </a:rPr>
+                        <a:t>validasi</a:t>
+                      </a:r>
+                      <a:r>
+                        <a:rPr lang="en-US" sz="1600" b="0" i="0" u="none" strike="noStrike" dirty="0">
+                          <a:solidFill>
+                            <a:srgbClr val="333333"/>
+                          </a:solidFill>
+                          <a:effectLst/>
+                          <a:latin typeface="Arial" panose="020B0604020202020204" pitchFamily="34" charset="0"/>
+                        </a:rPr>
+                        <a:t> </a:t>
+                      </a:r>
+                      <a:r>
+                        <a:rPr lang="en-US" sz="1600" b="0" i="0" u="none" strike="noStrike" dirty="0" err="1">
+                          <a:solidFill>
+                            <a:srgbClr val="333333"/>
+                          </a:solidFill>
+                          <a:effectLst/>
+                          <a:latin typeface="Arial" panose="020B0604020202020204" pitchFamily="34" charset="0"/>
+                        </a:rPr>
+                        <a:t>pembayaran</a:t>
+                      </a:r>
+                      <a:r>
+                        <a:rPr lang="en-US" sz="1600" b="0" i="0" u="none" strike="noStrike" dirty="0">
+                          <a:solidFill>
+                            <a:srgbClr val="333333"/>
+                          </a:solidFill>
+                          <a:effectLst/>
+                          <a:latin typeface="Arial" panose="020B0604020202020204" pitchFamily="34" charset="0"/>
+                        </a:rPr>
+                        <a:t> (Transfer/COD) </a:t>
+                      </a:r>
+                      <a:r>
+                        <a:rPr lang="en-US" sz="1600" b="0" i="0" u="none" strike="noStrike" dirty="0" err="1">
+                          <a:solidFill>
+                            <a:srgbClr val="333333"/>
+                          </a:solidFill>
+                          <a:effectLst/>
+                          <a:latin typeface="Arial" panose="020B0604020202020204" pitchFamily="34" charset="0"/>
+                        </a:rPr>
+                        <a:t>masih</a:t>
+                      </a:r>
+                      <a:r>
+                        <a:rPr lang="en-US" sz="1600" b="0" i="0" u="none" strike="noStrike" dirty="0">
+                          <a:solidFill>
+                            <a:srgbClr val="333333"/>
+                          </a:solidFill>
+                          <a:effectLst/>
+                          <a:latin typeface="Arial" panose="020B0604020202020204" pitchFamily="34" charset="0"/>
+                        </a:rPr>
+                        <a:t> manual dan </a:t>
+                      </a:r>
+                      <a:r>
+                        <a:rPr lang="en-US" sz="1600" b="0" i="0" u="none" strike="noStrike" dirty="0" err="1">
+                          <a:solidFill>
+                            <a:srgbClr val="333333"/>
+                          </a:solidFill>
+                          <a:effectLst/>
+                          <a:latin typeface="Arial" panose="020B0604020202020204" pitchFamily="34" charset="0"/>
+                        </a:rPr>
+                        <a:t>rentan</a:t>
+                      </a:r>
+                      <a:r>
+                        <a:rPr lang="en-US" sz="1600" b="0" i="0" u="none" strike="noStrike" dirty="0">
+                          <a:solidFill>
+                            <a:srgbClr val="333333"/>
+                          </a:solidFill>
+                          <a:effectLst/>
+                          <a:latin typeface="Arial" panose="020B0604020202020204" pitchFamily="34" charset="0"/>
+                        </a:rPr>
+                        <a:t> </a:t>
+                      </a:r>
+                      <a:r>
+                        <a:rPr lang="en-US" sz="1600" b="0" i="0" u="none" strike="noStrike" dirty="0" err="1">
+                          <a:solidFill>
+                            <a:srgbClr val="333333"/>
+                          </a:solidFill>
+                          <a:effectLst/>
+                          <a:latin typeface="Arial" panose="020B0604020202020204" pitchFamily="34" charset="0"/>
+                        </a:rPr>
+                        <a:t>kesalahan</a:t>
+                      </a:r>
+                      <a:r>
+                        <a:rPr lang="en-US" sz="1600" b="0" i="0" u="none" strike="noStrike" dirty="0">
+                          <a:solidFill>
+                            <a:srgbClr val="333333"/>
+                          </a:solidFill>
+                          <a:effectLst/>
+                          <a:latin typeface="Arial" panose="020B0604020202020204" pitchFamily="34" charset="0"/>
+                        </a:rPr>
+                        <a:t> (*human error*).</a:t>
+                      </a:r>
+                      <a:endParaRPr lang="en-US" sz="2400" dirty="0">
+                        <a:effectLst/>
+                      </a:endParaRPr>
+                    </a:p>
+                  </a:txBody>
+                  <a:tcPr marL="130497" marR="130497" marT="130497" marB="130497">
+                    <a:lnL w="9525" cap="flat" cmpd="sng" algn="ctr">
+                      <a:solidFill>
+                        <a:srgbClr val="E2E8F0"/>
+                      </a:solidFill>
+                      <a:prstDash val="solid"/>
+                      <a:round/>
+                      <a:headEnd type="none" w="med" len="med"/>
+                      <a:tailEnd type="none" w="med" len="med"/>
+                    </a:lnL>
+                    <a:lnR w="9525" cap="flat" cmpd="sng" algn="ctr">
+                      <a:solidFill>
+                        <a:srgbClr val="E2E8F0"/>
+                      </a:solidFill>
+                      <a:prstDash val="solid"/>
+                      <a:round/>
+                      <a:headEnd type="none" w="med" len="med"/>
+                      <a:tailEnd type="none" w="med" len="med"/>
+                    </a:lnR>
+                    <a:lnT w="9525" cap="flat" cmpd="sng" algn="ctr">
+                      <a:solidFill>
+                        <a:srgbClr val="E2E8F0"/>
+                      </a:solidFill>
+                      <a:prstDash val="solid"/>
+                      <a:round/>
+                      <a:headEnd type="none" w="med" len="med"/>
+                      <a:tailEnd type="none" w="med" len="med"/>
+                    </a:lnT>
+                    <a:lnB w="9525" cap="flat" cmpd="sng" algn="ctr">
+                      <a:solidFill>
+                        <a:srgbClr val="E2E8F0"/>
+                      </a:solidFill>
+                      <a:prstDash val="solid"/>
+                      <a:round/>
+                      <a:headEnd type="none" w="med" len="med"/>
+                      <a:tailEnd type="none" w="med" len="med"/>
+                    </a:lnB>
+                    <a:noFill/>
+                  </a:tcPr>
+                </a:tc>
+                <a:extLst>
+                  <a:ext uri="{0D108BD9-81ED-4DB2-BD59-A6C34878D82A}">
+                    <a16:rowId xmlns:a16="http://schemas.microsoft.com/office/drawing/2014/main" val="548796202"/>
+                  </a:ext>
+                </a:extLst>
+              </a:tr>
+              <a:tr h="923636">
+                <a:tc>
+                  <a:txBody>
+                    <a:bodyPr/>
+                    <a:lstStyle/>
+                    <a:p>
+                      <a:pPr rtl="0" fontAlgn="t">
+                        <a:spcBef>
+                          <a:spcPts val="750"/>
+                        </a:spcBef>
+                        <a:spcAft>
+                          <a:spcPts val="750"/>
+                        </a:spcAft>
+                        <a:buNone/>
+                      </a:pPr>
+                      <a:r>
+                        <a:rPr lang="en-US" sz="1600" b="1" i="0" u="none" strike="noStrike">
+                          <a:solidFill>
+                            <a:srgbClr val="333333"/>
+                          </a:solidFill>
+                          <a:effectLst/>
+                          <a:latin typeface="Arial" panose="020B0604020202020204" pitchFamily="34" charset="0"/>
+                        </a:rPr>
+                        <a:t>Jaringan Reseller</a:t>
+                      </a:r>
+                      <a:endParaRPr lang="en-US" sz="2400">
+                        <a:effectLst/>
+                      </a:endParaRPr>
+                    </a:p>
+                  </a:txBody>
+                  <a:tcPr marL="130497" marR="130497" marT="130497" marB="130497">
+                    <a:lnL w="9525" cap="flat" cmpd="sng" algn="ctr">
+                      <a:solidFill>
+                        <a:srgbClr val="E2E8F0"/>
+                      </a:solidFill>
+                      <a:prstDash val="solid"/>
+                      <a:round/>
+                      <a:headEnd type="none" w="med" len="med"/>
+                      <a:tailEnd type="none" w="med" len="med"/>
+                    </a:lnL>
+                    <a:lnR w="9525" cap="flat" cmpd="sng" algn="ctr">
+                      <a:solidFill>
+                        <a:srgbClr val="E2E8F0"/>
+                      </a:solidFill>
+                      <a:prstDash val="solid"/>
+                      <a:round/>
+                      <a:headEnd type="none" w="med" len="med"/>
+                      <a:tailEnd type="none" w="med" len="med"/>
+                    </a:lnR>
+                    <a:lnT w="9525" cap="flat" cmpd="sng" algn="ctr">
+                      <a:solidFill>
+                        <a:srgbClr val="E2E8F0"/>
+                      </a:solidFill>
+                      <a:prstDash val="solid"/>
+                      <a:round/>
+                      <a:headEnd type="none" w="med" len="med"/>
+                      <a:tailEnd type="none" w="med" len="med"/>
+                    </a:lnT>
+                    <a:lnB w="9525" cap="flat" cmpd="sng" algn="ctr">
+                      <a:solidFill>
+                        <a:srgbClr val="E2E8F0"/>
+                      </a:solidFill>
+                      <a:prstDash val="solid"/>
+                      <a:round/>
+                      <a:headEnd type="none" w="med" len="med"/>
+                      <a:tailEnd type="none" w="med" len="med"/>
+                    </a:lnB>
+                    <a:noFill/>
+                  </a:tcPr>
+                </a:tc>
+                <a:tc>
+                  <a:txBody>
+                    <a:bodyPr/>
+                    <a:lstStyle/>
+                    <a:p>
+                      <a:pPr rtl="0" fontAlgn="t">
+                        <a:spcBef>
+                          <a:spcPts val="750"/>
+                        </a:spcBef>
+                        <a:spcAft>
+                          <a:spcPts val="750"/>
+                        </a:spcAft>
+                        <a:buNone/>
+                      </a:pPr>
+                      <a:r>
+                        <a:rPr lang="sv-SE" sz="1600" b="0" i="0" u="none" strike="noStrike">
+                          <a:solidFill>
+                            <a:srgbClr val="333333"/>
+                          </a:solidFill>
+                          <a:effectLst/>
+                          <a:latin typeface="Arial" panose="020B0604020202020204" pitchFamily="34" charset="0"/>
+                        </a:rPr>
+                        <a:t>Tidak ada sistem khusus untuk mengelola harga reseller, komisi, poin, dan pesanan *dropship* secara otomatis.</a:t>
+                      </a:r>
+                      <a:endParaRPr lang="sv-SE" sz="2400">
+                        <a:effectLst/>
+                      </a:endParaRPr>
+                    </a:p>
+                  </a:txBody>
+                  <a:tcPr marL="130497" marR="130497" marT="130497" marB="130497">
+                    <a:lnL w="9525" cap="flat" cmpd="sng" algn="ctr">
+                      <a:solidFill>
+                        <a:srgbClr val="E2E8F0"/>
+                      </a:solidFill>
+                      <a:prstDash val="solid"/>
+                      <a:round/>
+                      <a:headEnd type="none" w="med" len="med"/>
+                      <a:tailEnd type="none" w="med" len="med"/>
+                    </a:lnL>
+                    <a:lnR w="9525" cap="flat" cmpd="sng" algn="ctr">
+                      <a:solidFill>
+                        <a:srgbClr val="E2E8F0"/>
+                      </a:solidFill>
+                      <a:prstDash val="solid"/>
+                      <a:round/>
+                      <a:headEnd type="none" w="med" len="med"/>
+                      <a:tailEnd type="none" w="med" len="med"/>
+                    </a:lnR>
+                    <a:lnT w="9525" cap="flat" cmpd="sng" algn="ctr">
+                      <a:solidFill>
+                        <a:srgbClr val="E2E8F0"/>
+                      </a:solidFill>
+                      <a:prstDash val="solid"/>
+                      <a:round/>
+                      <a:headEnd type="none" w="med" len="med"/>
+                      <a:tailEnd type="none" w="med" len="med"/>
+                    </a:lnT>
+                    <a:lnB w="9525" cap="flat" cmpd="sng" algn="ctr">
+                      <a:solidFill>
+                        <a:srgbClr val="E2E8F0"/>
+                      </a:solidFill>
+                      <a:prstDash val="solid"/>
+                      <a:round/>
+                      <a:headEnd type="none" w="med" len="med"/>
+                      <a:tailEnd type="none" w="med" len="med"/>
+                    </a:lnB>
+                    <a:noFill/>
+                  </a:tcPr>
+                </a:tc>
+                <a:extLst>
+                  <a:ext uri="{0D108BD9-81ED-4DB2-BD59-A6C34878D82A}">
+                    <a16:rowId xmlns:a16="http://schemas.microsoft.com/office/drawing/2014/main" val="3085596183"/>
+                  </a:ext>
+                </a:extLst>
+              </a:tr>
+              <a:tr h="923636">
+                <a:tc>
+                  <a:txBody>
+                    <a:bodyPr/>
+                    <a:lstStyle/>
+                    <a:p>
+                      <a:pPr rtl="0" fontAlgn="t">
+                        <a:spcBef>
+                          <a:spcPts val="750"/>
+                        </a:spcBef>
+                        <a:spcAft>
+                          <a:spcPts val="750"/>
+                        </a:spcAft>
+                        <a:buNone/>
+                      </a:pPr>
+                      <a:r>
+                        <a:rPr lang="en-US" sz="1600" b="1" i="0" u="none" strike="noStrike">
+                          <a:solidFill>
+                            <a:srgbClr val="333333"/>
+                          </a:solidFill>
+                          <a:effectLst/>
+                          <a:latin typeface="Arial" panose="020B0604020202020204" pitchFamily="34" charset="0"/>
+                        </a:rPr>
+                        <a:t>Laporan Keuangan</a:t>
+                      </a:r>
+                      <a:endParaRPr lang="en-US" sz="2400">
+                        <a:effectLst/>
+                      </a:endParaRPr>
+                    </a:p>
+                  </a:txBody>
+                  <a:tcPr marL="130497" marR="130497" marT="130497" marB="130497">
+                    <a:lnL w="9525" cap="flat" cmpd="sng" algn="ctr">
+                      <a:solidFill>
+                        <a:srgbClr val="E2E8F0"/>
+                      </a:solidFill>
+                      <a:prstDash val="solid"/>
+                      <a:round/>
+                      <a:headEnd type="none" w="med" len="med"/>
+                      <a:tailEnd type="none" w="med" len="med"/>
+                    </a:lnL>
+                    <a:lnR w="9525" cap="flat" cmpd="sng" algn="ctr">
+                      <a:solidFill>
+                        <a:srgbClr val="E2E8F0"/>
+                      </a:solidFill>
+                      <a:prstDash val="solid"/>
+                      <a:round/>
+                      <a:headEnd type="none" w="med" len="med"/>
+                      <a:tailEnd type="none" w="med" len="med"/>
+                    </a:lnR>
+                    <a:lnT w="9525" cap="flat" cmpd="sng" algn="ctr">
+                      <a:solidFill>
+                        <a:srgbClr val="E2E8F0"/>
+                      </a:solidFill>
+                      <a:prstDash val="solid"/>
+                      <a:round/>
+                      <a:headEnd type="none" w="med" len="med"/>
+                      <a:tailEnd type="none" w="med" len="med"/>
+                    </a:lnT>
+                    <a:lnB w="9525" cap="flat" cmpd="sng" algn="ctr">
+                      <a:solidFill>
+                        <a:srgbClr val="E2E8F0"/>
+                      </a:solidFill>
+                      <a:prstDash val="solid"/>
+                      <a:round/>
+                      <a:headEnd type="none" w="med" len="med"/>
+                      <a:tailEnd type="none" w="med" len="med"/>
+                    </a:lnB>
+                    <a:noFill/>
+                  </a:tcPr>
+                </a:tc>
+                <a:tc>
+                  <a:txBody>
+                    <a:bodyPr/>
+                    <a:lstStyle/>
+                    <a:p>
+                      <a:pPr rtl="0" fontAlgn="t">
+                        <a:spcBef>
+                          <a:spcPts val="750"/>
+                        </a:spcBef>
+                        <a:spcAft>
+                          <a:spcPts val="750"/>
+                        </a:spcAft>
+                        <a:buNone/>
+                      </a:pPr>
+                      <a:r>
+                        <a:rPr lang="nn-NO" sz="1600" b="0" i="0" u="none" strike="noStrike" dirty="0">
+                          <a:solidFill>
+                            <a:srgbClr val="333333"/>
+                          </a:solidFill>
+                          <a:effectLst/>
+                          <a:latin typeface="Arial" panose="020B0604020202020204" pitchFamily="34" charset="0"/>
+                        </a:rPr>
+                        <a:t>Laba rugi, omzet, dan laporan per transaksi tidak akurat serta membutuhkan waktu lama untuk direkap.</a:t>
+                      </a:r>
+                      <a:endParaRPr lang="nn-NO" sz="2400" dirty="0">
+                        <a:effectLst/>
+                      </a:endParaRPr>
+                    </a:p>
+                  </a:txBody>
+                  <a:tcPr marL="130497" marR="130497" marT="130497" marB="130497">
+                    <a:lnL w="9525" cap="flat" cmpd="sng" algn="ctr">
+                      <a:solidFill>
+                        <a:srgbClr val="E2E8F0"/>
+                      </a:solidFill>
+                      <a:prstDash val="solid"/>
+                      <a:round/>
+                      <a:headEnd type="none" w="med" len="med"/>
+                      <a:tailEnd type="none" w="med" len="med"/>
+                    </a:lnL>
+                    <a:lnR w="9525" cap="flat" cmpd="sng" algn="ctr">
+                      <a:solidFill>
+                        <a:srgbClr val="E2E8F0"/>
+                      </a:solidFill>
+                      <a:prstDash val="solid"/>
+                      <a:round/>
+                      <a:headEnd type="none" w="med" len="med"/>
+                      <a:tailEnd type="none" w="med" len="med"/>
+                    </a:lnR>
+                    <a:lnT w="9525" cap="flat" cmpd="sng" algn="ctr">
+                      <a:solidFill>
+                        <a:srgbClr val="E2E8F0"/>
+                      </a:solidFill>
+                      <a:prstDash val="solid"/>
+                      <a:round/>
+                      <a:headEnd type="none" w="med" len="med"/>
+                      <a:tailEnd type="none" w="med" len="med"/>
+                    </a:lnT>
+                    <a:lnB w="9525" cap="flat" cmpd="sng" algn="ctr">
+                      <a:solidFill>
+                        <a:srgbClr val="E2E8F0"/>
+                      </a:solidFill>
+                      <a:prstDash val="solid"/>
+                      <a:round/>
+                      <a:headEnd type="none" w="med" len="med"/>
+                      <a:tailEnd type="none" w="med" len="med"/>
+                    </a:lnB>
+                    <a:noFill/>
+                  </a:tcPr>
+                </a:tc>
+                <a:extLst>
+                  <a:ext uri="{0D108BD9-81ED-4DB2-BD59-A6C34878D82A}">
+                    <a16:rowId xmlns:a16="http://schemas.microsoft.com/office/drawing/2014/main" val="4258612876"/>
+                  </a:ext>
+                </a:extLst>
+              </a:tr>
+            </a:tbl>
+          </a:graphicData>
+        </a:graphic>
+      </p:graphicFrame>
     </p:spTree>
   </p:cSld>
   <p:clrMapOvr>
@@ -7598,8 +8326,26 @@
           <a:lstStyle/>
           <a:p>
             <a:r>
-              <a:t>Solusi dari Aplikasi Penjualan Retail</a:t>
-            </a:r>
+              <a:rPr lang="en-US" b="1" dirty="0"/>
+              <a:t> Solusi </a:t>
+            </a:r>
+            <a:r>
+              <a:rPr lang="en-US" b="1" dirty="0" err="1"/>
+              <a:t>Terpadu</a:t>
+            </a:r>
+            <a:r>
+              <a:rPr lang="en-US" b="1" dirty="0"/>
+              <a:t> </a:t>
+            </a:r>
+            <a:r>
+              <a:rPr lang="en-US" b="1" dirty="0" err="1"/>
+              <a:t>SBiZ</a:t>
+            </a:r>
+            <a:r>
+              <a:rPr lang="en-US" b="1" dirty="0"/>
+              <a:t> Application</a:t>
+            </a:r>
+            <a:endParaRPr dirty="0"/>
           </a:p>
         </p:txBody>
       </p:sp>
@@ -7621,67 +8367,50 @@
         </p:spPr>
         <p:txBody>
           <a:bodyPr>
-            <a:normAutofit lnSpcReduction="10000"/>
+            <a:normAutofit fontScale="92500" lnSpcReduction="10000"/>
           </a:bodyPr>
           <a:lstStyle/>
           <a:p>
-            <a:r>
-              <a:rPr dirty="0"/>
-              <a:t>- </a:t>
-            </a:r>
-            <a:r>
-              <a:rPr dirty="0" err="1"/>
-              <a:t>Sistem</a:t>
-            </a:r>
-            <a:r>
-              <a:rPr dirty="0"/>
-              <a:t> </a:t>
-            </a:r>
-            <a:r>
-              <a:rPr dirty="0" err="1"/>
-              <a:t>penjualan</a:t>
-            </a:r>
-            <a:r>
-              <a:rPr dirty="0"/>
-              <a:t> </a:t>
+            <a:pPr fontAlgn="base"/>
+            <a:r>
+              <a:rPr lang="en-US" b="1" dirty="0" err="1"/>
+              <a:t>Kontrol</a:t>
+            </a:r>
+            <a:r>
+              <a:rPr lang="en-US" b="1" dirty="0"/>
+              <a:t> Stok </a:t>
+            </a:r>
+            <a:r>
+              <a:rPr lang="en-US" b="1" dirty="0" err="1"/>
+              <a:t>Akurat</a:t>
+            </a:r>
+            <a:r>
+              <a:rPr lang="en-US" b="1" dirty="0"/>
+              <a:t>:</a:t>
+            </a:r>
+            <a:r>
+              <a:rPr lang="en-US" dirty="0"/>
+              <a:t> Kartu </a:t>
             </a:r>
             <a:r>
               <a:rPr lang="en-US" dirty="0" err="1"/>
-              <a:t>tekelola</a:t>
+              <a:t>stok</a:t>
             </a:r>
             <a:r>
               <a:rPr lang="en-US" dirty="0"/>
               <a:t> </a:t>
             </a:r>
             <a:r>
-              <a:rPr dirty="0"/>
-              <a:t>dan real-time</a:t>
-            </a:r>
-          </a:p>
-          <a:p>
-            <a:r>
-              <a:rPr dirty="0"/>
-              <a:t>- </a:t>
-            </a:r>
-            <a:r>
-              <a:rPr dirty="0" err="1"/>
-              <a:t>Validasi</a:t>
-            </a:r>
-            <a:r>
-              <a:rPr dirty="0"/>
-              <a:t> </a:t>
-            </a:r>
-            <a:r>
-              <a:rPr dirty="0" err="1"/>
-              <a:t>pembayaran</a:t>
-            </a:r>
-            <a:r>
-              <a:rPr dirty="0"/>
-              <a:t> </a:t>
-            </a:r>
-            <a:r>
               <a:rPr lang="en-US" dirty="0" err="1"/>
-              <a:t>terkendali</a:t>
+              <a:t>otomatis</a:t>
+            </a:r>
+            <a:r>
+              <a:rPr lang="en-US" dirty="0"/>
+              <a:t>, </a:t>
+            </a:r>
+            <a:r>
+              <a:rPr lang="en-US" dirty="0" err="1"/>
+              <a:t>penanganan</a:t>
             </a:r>
             <a:r>
               <a:rPr lang="en-US" dirty="0"/>
@@ -7689,7 +8418,15 @@
             </a:r>
             <a:r>
               <a:rPr lang="en-US" dirty="0" err="1"/>
-              <a:t>dengan</a:t>
+              <a:t>varian</a:t>
+            </a:r>
+            <a:r>
+              <a:rPr lang="en-US" dirty="0"/>
+              <a:t>, </a:t>
+            </a:r>
+            <a:r>
+              <a:rPr lang="en-US" dirty="0" err="1"/>
+              <a:t>hingga</a:t>
             </a:r>
             <a:r>
               <a:rPr lang="en-US" dirty="0"/>
@@ -7697,180 +8434,317 @@
             </a:r>
             <a:r>
               <a:rPr lang="en-US" dirty="0" err="1"/>
-              <a:t>baik</a:t>
-            </a:r>
-            <a:endParaRPr dirty="0"/>
-          </a:p>
-          <a:p>
-            <a:r>
-              <a:rPr dirty="0"/>
-              <a:t>- </a:t>
-            </a:r>
-            <a:r>
-              <a:rPr dirty="0" err="1"/>
-              <a:t>Manajemen</a:t>
-            </a:r>
-            <a:r>
-              <a:rPr dirty="0"/>
+              <a:t>fitur</a:t>
+            </a:r>
+            <a:r>
+              <a:rPr lang="en-US" dirty="0"/>
               <a:t> </a:t>
             </a:r>
             <a:r>
-              <a:rPr dirty="0" err="1"/>
-              <a:t>stok</a:t>
-            </a:r>
-            <a:r>
-              <a:rPr dirty="0"/>
+              <a:rPr lang="en-US" dirty="0" err="1"/>
+              <a:t>produk</a:t>
+            </a:r>
+            <a:r>
+              <a:rPr lang="en-US" dirty="0"/>
+              <a:t> *bundling* &amp; *pre-order*.</a:t>
+            </a:r>
+          </a:p>
+          <a:p>
+            <a:pPr fontAlgn="base"/>
+            <a:r>
+              <a:rPr lang="en-US" b="1" dirty="0" err="1"/>
+              <a:t>Otomasi</a:t>
+            </a:r>
+            <a:r>
+              <a:rPr lang="en-US" b="1" dirty="0"/>
               <a:t> </a:t>
             </a:r>
             <a:r>
-              <a:rPr dirty="0" err="1"/>
+              <a:rPr lang="en-US" b="1" dirty="0" err="1"/>
+              <a:t>Penjualan</a:t>
+            </a:r>
+            <a:r>
+              <a:rPr lang="en-US" b="1" dirty="0"/>
+              <a:t> &amp; </a:t>
+            </a:r>
+            <a:r>
+              <a:rPr lang="en-US" b="1" dirty="0" err="1"/>
+              <a:t>Pembayaran</a:t>
+            </a:r>
+            <a:r>
+              <a:rPr lang="en-US" b="1" dirty="0"/>
+              <a:t>:</a:t>
+            </a:r>
+            <a:r>
+              <a:rPr lang="en-US" dirty="0"/>
+              <a:t> </a:t>
+            </a:r>
+            <a:r>
+              <a:rPr lang="en-US" dirty="0" err="1"/>
+              <a:t>Validasi</a:t>
+            </a:r>
+            <a:r>
+              <a:rPr lang="en-US" dirty="0"/>
+              <a:t> </a:t>
+            </a:r>
+            <a:r>
+              <a:rPr lang="en-US" dirty="0" err="1"/>
+              <a:t>otomatis</a:t>
+            </a:r>
+            <a:r>
+              <a:rPr lang="en-US" dirty="0"/>
+              <a:t> </a:t>
+            </a:r>
+            <a:r>
+              <a:rPr lang="en-US" dirty="0" err="1"/>
+              <a:t>transaksi</a:t>
+            </a:r>
+            <a:r>
+              <a:rPr lang="en-US" dirty="0"/>
+              <a:t> transfer, COD, </a:t>
+            </a:r>
+            <a:r>
+              <a:rPr lang="en-US" dirty="0" err="1"/>
+              <a:t>serta</a:t>
+            </a:r>
+            <a:r>
+              <a:rPr lang="en-US" dirty="0"/>
+              <a:t> </a:t>
+            </a:r>
+            <a:r>
+              <a:rPr lang="en-US" dirty="0" err="1"/>
+              <a:t>integrasi</a:t>
+            </a:r>
+            <a:r>
+              <a:rPr lang="en-US" dirty="0"/>
+              <a:t> </a:t>
+            </a:r>
+            <a:r>
+              <a:rPr lang="en-US" dirty="0" err="1"/>
+              <a:t>resi</a:t>
+            </a:r>
+            <a:r>
+              <a:rPr lang="en-US" dirty="0"/>
+              <a:t> </a:t>
+            </a:r>
+            <a:r>
+              <a:rPr lang="en-US" dirty="0" err="1"/>
+              <a:t>ekspedisi</a:t>
+            </a:r>
+            <a:r>
+              <a:rPr lang="en-US" dirty="0"/>
+              <a:t>.</a:t>
+            </a:r>
+          </a:p>
+          <a:p>
+            <a:pPr fontAlgn="base"/>
+            <a:r>
+              <a:rPr lang="en-US" b="1" dirty="0"/>
+              <a:t>Portal Reseller </a:t>
+            </a:r>
+            <a:r>
+              <a:rPr lang="en-US" b="1" dirty="0" err="1"/>
+              <a:t>Mandiri</a:t>
+            </a:r>
+            <a:r>
+              <a:rPr lang="en-US" b="1" dirty="0"/>
+              <a:t>:</a:t>
+            </a:r>
+            <a:r>
+              <a:rPr lang="en-US" dirty="0"/>
+              <a:t> </a:t>
+            </a:r>
+            <a:r>
+              <a:rPr lang="en-US" dirty="0" err="1"/>
+              <a:t>Sistem</a:t>
+            </a:r>
+            <a:r>
+              <a:rPr lang="en-US" dirty="0"/>
+              <a:t> </a:t>
+            </a:r>
+            <a:r>
+              <a:rPr lang="en-US" dirty="0" err="1"/>
+              <a:t>khusus</a:t>
+            </a:r>
+            <a:r>
+              <a:rPr lang="en-US" dirty="0"/>
+              <a:t> reseller </a:t>
+            </a:r>
+            <a:r>
+              <a:rPr lang="en-US" dirty="0" err="1"/>
               <a:t>lengkap</a:t>
             </a:r>
             <a:r>
-              <a:rPr dirty="0"/>
-              <a:t> &amp; </a:t>
-            </a:r>
-            <a:r>
-              <a:rPr dirty="0" err="1"/>
-              <a:t>akurat</a:t>
-            </a:r>
-            <a:endParaRPr dirty="0"/>
-          </a:p>
-          <a:p>
-            <a:r>
-              <a:rPr dirty="0"/>
-              <a:t>- </a:t>
-            </a:r>
-            <a:r>
-              <a:rPr sz="2000" dirty="0" err="1"/>
-              <a:t>Laporan</a:t>
-            </a:r>
-            <a:r>
-              <a:rPr sz="2000" dirty="0"/>
+              <a:rPr lang="en-US" dirty="0"/>
               <a:t> </a:t>
             </a:r>
             <a:r>
-              <a:rPr sz="2000" dirty="0" err="1"/>
-              <a:t>penjualan</a:t>
-            </a:r>
-            <a:r>
-              <a:rPr lang="en-US" sz="2000" dirty="0"/>
+              <a:rPr lang="en-US" dirty="0" err="1"/>
+              <a:t>dengan</a:t>
+            </a:r>
+            <a:r>
+              <a:rPr lang="en-US" dirty="0"/>
+              <a:t> </a:t>
+            </a:r>
+            <a:r>
+              <a:rPr lang="en-US" dirty="0" err="1"/>
+              <a:t>harga</a:t>
+            </a:r>
+            <a:r>
+              <a:rPr lang="en-US" dirty="0"/>
+              <a:t> </a:t>
+            </a:r>
+            <a:r>
+              <a:rPr lang="en-US" dirty="0" err="1"/>
+              <a:t>bertingkat</a:t>
+            </a:r>
+            <a:r>
+              <a:rPr lang="en-US" dirty="0"/>
               <a:t>, </a:t>
             </a:r>
             <a:r>
-              <a:rPr lang="en-US" sz="2000" dirty="0" err="1"/>
-              <a:t>laba</a:t>
-            </a:r>
-            <a:r>
-              <a:rPr lang="en-US" sz="2000" dirty="0"/>
-              <a:t>, </a:t>
-            </a:r>
-            <a:r>
-              <a:rPr lang="en-US" sz="2000" dirty="0" err="1"/>
-              <a:t>keungan</a:t>
-            </a:r>
-            <a:r>
-              <a:rPr lang="en-US" sz="2000" dirty="0"/>
+              <a:rPr lang="en-US" dirty="0" err="1"/>
+              <a:t>perhitungan</a:t>
+            </a:r>
+            <a:r>
+              <a:rPr lang="en-US" dirty="0"/>
               <a:t> </a:t>
             </a:r>
             <a:r>
-              <a:rPr sz="2000" dirty="0" err="1"/>
-              <a:t>secara</a:t>
-            </a:r>
-            <a:r>
-              <a:rPr sz="2000" dirty="0"/>
+              <a:rPr lang="en-US" dirty="0" err="1"/>
+              <a:t>komisi</a:t>
+            </a:r>
+            <a:r>
+              <a:rPr lang="en-US" dirty="0"/>
+              <a:t>, dan </a:t>
+            </a:r>
+            <a:r>
+              <a:rPr lang="en-US" dirty="0" err="1"/>
+              <a:t>akumulasi</a:t>
+            </a:r>
+            <a:r>
+              <a:rPr lang="en-US" dirty="0"/>
               <a:t> </a:t>
-            </a:r>
-            <a:r>
-              <a:rPr sz="2000" dirty="0" err="1"/>
-              <a:t>instan</a:t>
-            </a:r>
-            <a:r>
-              <a:rPr lang="en-US" sz="2000" dirty="0"/>
-              <a:t> &amp; </a:t>
-            </a:r>
-            <a:r>
-              <a:rPr lang="en-US" sz="2000" dirty="0" err="1"/>
-              <a:t>realtime</a:t>
-            </a:r>
-            <a:endParaRPr dirty="0"/>
-          </a:p>
-          <a:p>
-            <a:r>
-              <a:rPr dirty="0"/>
-              <a:t>- </a:t>
-            </a:r>
-            <a:r>
-              <a:rPr dirty="0" err="1"/>
-              <a:t>Sistem</a:t>
-            </a:r>
-            <a:r>
-              <a:rPr dirty="0"/>
-              <a:t> </a:t>
-            </a:r>
-            <a:r>
-              <a:rPr dirty="0" err="1"/>
-              <a:t>pengiriman</a:t>
-            </a:r>
-            <a:r>
-              <a:rPr dirty="0"/>
-              <a:t> dan </a:t>
-            </a:r>
-            <a:r>
-              <a:rPr dirty="0" err="1"/>
-              <a:t>pelacakan</a:t>
-            </a:r>
-            <a:endParaRPr dirty="0"/>
-          </a:p>
-          <a:p>
-            <a:r>
-              <a:rPr dirty="0"/>
-              <a:t>- Fitur reseller </a:t>
-            </a:r>
-            <a:r>
-              <a:rPr dirty="0" err="1"/>
-              <a:t>lengkap</a:t>
-            </a:r>
-            <a:r>
-              <a:rPr dirty="0"/>
-              <a:t> </a:t>
-            </a:r>
-            <a:r>
-              <a:rPr dirty="0" err="1"/>
-              <a:t>dengan</a:t>
-            </a:r>
-            <a:r>
-              <a:rPr dirty="0"/>
-              <a:t> </a:t>
-            </a:r>
-            <a:r>
-              <a:rPr dirty="0" err="1"/>
-              <a:t>komisi</a:t>
-            </a:r>
-            <a:r>
-              <a:rPr lang="en-US" dirty="0"/>
-              <a:t> &amp; </a:t>
             </a:r>
             <a:r>
               <a:rPr lang="en-US" dirty="0" err="1"/>
               <a:t>poin</a:t>
             </a:r>
-            <a:endParaRPr lang="en-US" dirty="0"/>
-          </a:p>
-          <a:p>
             <a:r>
               <a:rPr lang="en-US" dirty="0"/>
-              <a:t>- </a:t>
+              <a:t>.</a:t>
+            </a:r>
+          </a:p>
+          <a:p>
+            <a:pPr fontAlgn="base"/>
+            <a:r>
+              <a:rPr lang="en-US" b="1" dirty="0" err="1"/>
+              <a:t>Laporan</a:t>
+            </a:r>
+            <a:r>
+              <a:rPr lang="en-US" b="1" dirty="0"/>
+              <a:t> </a:t>
+            </a:r>
+            <a:r>
+              <a:rPr lang="en-US" b="1" dirty="0" err="1"/>
+              <a:t>Instan</a:t>
+            </a:r>
+            <a:r>
+              <a:rPr lang="en-US" b="1" dirty="0"/>
+              <a:t> Real-Time:</a:t>
+            </a:r>
+            <a:r>
+              <a:rPr lang="en-US" dirty="0"/>
+              <a:t> </a:t>
             </a:r>
             <a:r>
               <a:rPr lang="en-US" dirty="0" err="1"/>
-              <a:t>Penglolaan</a:t>
+              <a:t>Pantau</a:t>
             </a:r>
             <a:r>
               <a:rPr lang="en-US" dirty="0"/>
-              <a:t> Preorder</a:t>
-            </a:r>
-            <a:endParaRPr dirty="0"/>
+              <a:t> </a:t>
+            </a:r>
+            <a:r>
+              <a:rPr lang="en-US" dirty="0" err="1"/>
+              <a:t>omzet</a:t>
+            </a:r>
+            <a:r>
+              <a:rPr lang="en-US" dirty="0"/>
+              <a:t>, </a:t>
+            </a:r>
+            <a:r>
+              <a:rPr lang="en-US" dirty="0" err="1"/>
+              <a:t>biaya</a:t>
+            </a:r>
+            <a:r>
+              <a:rPr lang="en-US" dirty="0"/>
+              <a:t> </a:t>
+            </a:r>
+            <a:r>
+              <a:rPr lang="en-US" dirty="0" err="1"/>
+              <a:t>iklan</a:t>
+            </a:r>
+            <a:r>
+              <a:rPr lang="en-US" dirty="0"/>
+              <a:t> (ROAS), </a:t>
+            </a:r>
+            <a:r>
+              <a:rPr lang="en-US" dirty="0" err="1"/>
+              <a:t>hingga</a:t>
+            </a:r>
+            <a:r>
+              <a:rPr lang="en-US" dirty="0"/>
+              <a:t> </a:t>
+            </a:r>
+            <a:r>
+              <a:rPr lang="en-US" dirty="0" err="1"/>
+              <a:t>laba</a:t>
+            </a:r>
+            <a:r>
+              <a:rPr lang="en-US" dirty="0"/>
+              <a:t> </a:t>
+            </a:r>
+            <a:r>
+              <a:rPr lang="en-US" dirty="0" err="1"/>
+              <a:t>bersih</a:t>
+            </a:r>
+            <a:r>
+              <a:rPr lang="en-US" dirty="0"/>
+              <a:t> </a:t>
+            </a:r>
+            <a:r>
+              <a:rPr lang="en-US" dirty="0" err="1"/>
+              <a:t>kapan</a:t>
+            </a:r>
+            <a:r>
+              <a:rPr lang="en-US" dirty="0"/>
+              <a:t> </a:t>
+            </a:r>
+            <a:r>
+              <a:rPr lang="en-US" dirty="0" err="1"/>
+              <a:t>saja</a:t>
+            </a:r>
+            <a:r>
+              <a:rPr lang="en-US" dirty="0"/>
+              <a:t> </a:t>
+            </a:r>
+            <a:r>
+              <a:rPr lang="en-US" dirty="0" err="1"/>
+              <a:t>dari</a:t>
+            </a:r>
+            <a:r>
+              <a:rPr lang="en-US" dirty="0"/>
+              <a:t> mana </a:t>
+            </a:r>
+            <a:r>
+              <a:rPr lang="en-US" dirty="0" err="1"/>
+              <a:t>saja</a:t>
+            </a:r>
+            <a:r>
+              <a:rPr lang="en-US" dirty="0"/>
+              <a:t>.</a:t>
+            </a:r>
           </a:p>
         </p:txBody>
       </p:sp>
@@ -7915,229 +8789,1262 @@
           <a:lstStyle/>
           <a:p>
             <a:r>
-              <a:t>Fitur Utama Aplikasi</a:t>
-            </a:r>
+              <a:rPr lang="en-US" b="1" dirty="0" err="1"/>
+              <a:t>Ekosistem</a:t>
+            </a:r>
+            <a:r>
+              <a:rPr lang="en-US" b="1" dirty="0"/>
+              <a:t> Fitur </a:t>
+            </a:r>
+            <a:r>
+              <a:rPr lang="en-US" b="1" dirty="0" err="1"/>
+              <a:t>Unggulan</a:t>
+            </a:r>
+            <a:r>
+              <a:rPr lang="en-US" b="1" dirty="0"/>
+              <a:t> </a:t>
+            </a:r>
+            <a:r>
+              <a:rPr lang="en-US" b="1" dirty="0" err="1"/>
+              <a:t>SBiZ</a:t>
+            </a:r>
+            <a:endParaRPr dirty="0"/>
           </a:p>
         </p:txBody>
       </p:sp>
-      <p:sp>
-        <p:nvSpPr>
-          <p:cNvPr id="3" name="Content Placeholder 2"/>
-          <p:cNvSpPr>
-            <a:spLocks noGrp="1"/>
-          </p:cNvSpPr>
+      <p:graphicFrame>
+        <p:nvGraphicFramePr>
+          <p:cNvPr id="6" name="Content Placeholder 5">
+            <a:extLst>
+              <a:ext uri="{FF2B5EF4-FFF2-40B4-BE49-F238E27FC236}">
+                <a16:creationId xmlns:a16="http://schemas.microsoft.com/office/drawing/2014/main" id="{F020EDE1-69E4-8274-1117-A12C476476F0}"/>
+              </a:ext>
+            </a:extLst>
+          </p:cNvPr>
+          <p:cNvGraphicFramePr>
+            <a:graphicFrameLocks noGrp="1"/>
+          </p:cNvGraphicFramePr>
           <p:nvPr>
             <p:ph idx="1"/>
+            <p:extLst>
+              <p:ext uri="{D42A27DB-BD31-4B8C-83A1-F6EECF244321}">
+                <p14:modId xmlns:p14="http://schemas.microsoft.com/office/powerpoint/2010/main" val="274231035"/>
+              </p:ext>
+            </p:extLst>
           </p:nvPr>
-        </p:nvSpPr>
-        <p:spPr>
-          <a:xfrm>
-            <a:off x="1069218" y="2133600"/>
-            <a:ext cx="7704667" cy="3332816"/>
-          </a:xfrm>
-        </p:spPr>
-        <p:txBody>
-          <a:bodyPr>
-            <a:normAutofit lnSpcReduction="10000"/>
-          </a:bodyPr>
-          <a:lstStyle/>
-          <a:p>
-            <a:r>
-              <a:rPr dirty="0"/>
-              <a:t>- Dashboard </a:t>
-            </a:r>
-            <a:r>
-              <a:rPr dirty="0" err="1"/>
-              <a:t>penjualan</a:t>
-            </a:r>
-            <a:r>
-              <a:rPr dirty="0"/>
-              <a:t> </a:t>
-            </a:r>
-            <a:r>
-              <a:rPr dirty="0" err="1"/>
-              <a:t>harian</a:t>
-            </a:r>
-            <a:endParaRPr dirty="0"/>
-          </a:p>
-          <a:p>
-            <a:r>
-              <a:rPr dirty="0"/>
-              <a:t>- </a:t>
-            </a:r>
-            <a:r>
-              <a:rPr lang="en-US" dirty="0"/>
-              <a:t>Model </a:t>
-            </a:r>
-            <a:r>
-              <a:rPr lang="en-US" dirty="0" err="1"/>
-              <a:t>pemesanan</a:t>
-            </a:r>
-            <a:endParaRPr lang="en-US" dirty="0"/>
-          </a:p>
-          <a:p>
-            <a:r>
-              <a:rPr lang="en-US" dirty="0"/>
-              <a:t>- </a:t>
-            </a:r>
-            <a:r>
-              <a:rPr dirty="0"/>
-              <a:t>Modul </a:t>
-            </a:r>
-            <a:r>
-              <a:rPr dirty="0" err="1"/>
-              <a:t>manajemen</a:t>
-            </a:r>
-            <a:r>
-              <a:rPr dirty="0"/>
-              <a:t> </a:t>
-            </a:r>
-            <a:r>
-              <a:rPr dirty="0" err="1"/>
-              <a:t>stok</a:t>
-            </a:r>
-            <a:r>
-              <a:rPr dirty="0"/>
-              <a:t> &amp; </a:t>
-            </a:r>
-            <a:r>
-              <a:rPr dirty="0" err="1"/>
-              <a:t>kartu</a:t>
-            </a:r>
-            <a:r>
-              <a:rPr dirty="0"/>
-              <a:t> </a:t>
-            </a:r>
-            <a:r>
-              <a:rPr dirty="0" err="1"/>
-              <a:t>stok</a:t>
-            </a:r>
-            <a:endParaRPr dirty="0"/>
-          </a:p>
-          <a:p>
-            <a:r>
-              <a:rPr dirty="0"/>
-              <a:t>- </a:t>
-            </a:r>
-            <a:r>
-              <a:rPr dirty="0" err="1"/>
-              <a:t>Validasi</a:t>
-            </a:r>
-            <a:r>
-              <a:rPr dirty="0"/>
-              <a:t> </a:t>
-            </a:r>
-            <a:r>
-              <a:rPr dirty="0" err="1"/>
-              <a:t>pembayaran</a:t>
-            </a:r>
-            <a:r>
-              <a:rPr dirty="0"/>
-              <a:t> transfer &amp; COD</a:t>
-            </a:r>
-          </a:p>
-          <a:p>
-            <a:r>
-              <a:rPr dirty="0"/>
-              <a:t>- Modul </a:t>
-            </a:r>
-            <a:r>
-              <a:rPr lang="en-US" dirty="0" err="1"/>
-              <a:t>pengemasan</a:t>
-            </a:r>
-            <a:r>
-              <a:rPr lang="en-US" dirty="0"/>
-              <a:t> &amp; </a:t>
-            </a:r>
-            <a:r>
-              <a:rPr dirty="0" err="1"/>
-              <a:t>pengiriman</a:t>
-            </a:r>
-            <a:r>
-              <a:rPr dirty="0"/>
-              <a:t> via </a:t>
-            </a:r>
-            <a:r>
-              <a:rPr dirty="0" err="1"/>
-              <a:t>ekspedisi</a:t>
-            </a:r>
-            <a:endParaRPr dirty="0"/>
-          </a:p>
-          <a:p>
-            <a:r>
-              <a:rPr dirty="0"/>
-              <a:t>-</a:t>
-            </a:r>
-            <a:r>
-              <a:rPr lang="en-US" dirty="0"/>
-              <a:t> </a:t>
-            </a:r>
-            <a:r>
-              <a:rPr lang="en-US" dirty="0" err="1"/>
-              <a:t>Laporan</a:t>
-            </a:r>
-            <a:r>
-              <a:rPr lang="en-US" dirty="0"/>
-              <a:t> </a:t>
-            </a:r>
-            <a:r>
-              <a:rPr lang="en-US" dirty="0" err="1"/>
-              <a:t>penjualan</a:t>
-            </a:r>
-            <a:r>
-              <a:rPr lang="en-US" dirty="0"/>
-              <a:t>  &amp; </a:t>
-            </a:r>
-            <a:r>
-              <a:rPr lang="en-US" dirty="0" err="1"/>
-              <a:t>keuangan</a:t>
-            </a:r>
-            <a:r>
-              <a:rPr dirty="0"/>
-              <a:t> </a:t>
-            </a:r>
-            <a:endParaRPr lang="en-US" dirty="0"/>
-          </a:p>
-          <a:p>
-            <a:r>
-              <a:rPr lang="en-US" dirty="0"/>
-              <a:t>- </a:t>
-            </a:r>
-            <a:r>
-              <a:rPr dirty="0" err="1"/>
-              <a:t>Sistem</a:t>
-            </a:r>
-            <a:r>
-              <a:rPr dirty="0"/>
-              <a:t> reseller (</a:t>
-            </a:r>
-            <a:r>
-              <a:rPr dirty="0" err="1"/>
-              <a:t>harga</a:t>
-            </a:r>
-            <a:r>
-              <a:rPr dirty="0"/>
-              <a:t>, </a:t>
-            </a:r>
-            <a:r>
-              <a:rPr dirty="0" err="1"/>
-              <a:t>komisi</a:t>
-            </a:r>
-            <a:r>
-              <a:rPr dirty="0"/>
-              <a:t>, </a:t>
-            </a:r>
-            <a:r>
-              <a:rPr dirty="0" err="1"/>
-              <a:t>produk</a:t>
-            </a:r>
-            <a:r>
-              <a:rPr dirty="0"/>
-              <a:t>)</a:t>
-            </a:r>
-          </a:p>
-        </p:txBody>
-      </p:sp>
+        </p:nvGraphicFramePr>
+        <p:xfrm>
+          <a:off x="1517899" y="2054735"/>
+          <a:ext cx="6643968" cy="3410316"/>
+        </p:xfrm>
+        <a:graphic>
+          <a:graphicData uri="http://schemas.openxmlformats.org/drawingml/2006/table">
+            <a:tbl>
+              <a:tblPr/>
+              <a:tblGrid>
+                <a:gridCol w="2009072">
+                  <a:extLst>
+                    <a:ext uri="{9D8B030D-6E8A-4147-A177-3AD203B41FA5}">
+                      <a16:colId xmlns:a16="http://schemas.microsoft.com/office/drawing/2014/main" val="8899574"/>
+                    </a:ext>
+                  </a:extLst>
+                </a:gridCol>
+                <a:gridCol w="4634896">
+                  <a:extLst>
+                    <a:ext uri="{9D8B030D-6E8A-4147-A177-3AD203B41FA5}">
+                      <a16:colId xmlns:a16="http://schemas.microsoft.com/office/drawing/2014/main" val="1700626846"/>
+                    </a:ext>
+                  </a:extLst>
+                </a:gridCol>
+              </a:tblGrid>
+              <a:tr h="223731">
+                <a:tc>
+                  <a:txBody>
+                    <a:bodyPr/>
+                    <a:lstStyle/>
+                    <a:p>
+                      <a:pPr rtl="0" fontAlgn="t">
+                        <a:spcBef>
+                          <a:spcPts val="750"/>
+                        </a:spcBef>
+                        <a:spcAft>
+                          <a:spcPts val="750"/>
+                        </a:spcAft>
+                        <a:buNone/>
+                      </a:pPr>
+                      <a:r>
+                        <a:rPr lang="en-US" sz="1200" b="1" i="0" u="none" strike="noStrike">
+                          <a:solidFill>
+                            <a:srgbClr val="FFFFFF"/>
+                          </a:solidFill>
+                          <a:effectLst/>
+                          <a:latin typeface="Arial" panose="020B0604020202020204" pitchFamily="34" charset="0"/>
+                        </a:rPr>
+                        <a:t>Modul</a:t>
+                      </a:r>
+                      <a:endParaRPr lang="en-US" sz="2400">
+                        <a:effectLst/>
+                      </a:endParaRPr>
+                    </a:p>
+                  </a:txBody>
+                  <a:tcPr marL="59503" marR="59503" marT="59503" marB="59503">
+                    <a:lnL w="9525" cap="flat" cmpd="sng" algn="ctr">
+                      <a:solidFill>
+                        <a:srgbClr val="E2E8F0"/>
+                      </a:solidFill>
+                      <a:prstDash val="solid"/>
+                      <a:round/>
+                      <a:headEnd type="none" w="med" len="med"/>
+                      <a:tailEnd type="none" w="med" len="med"/>
+                    </a:lnL>
+                    <a:lnR w="9525" cap="flat" cmpd="sng" algn="ctr">
+                      <a:solidFill>
+                        <a:srgbClr val="E2E8F0"/>
+                      </a:solidFill>
+                      <a:prstDash val="solid"/>
+                      <a:round/>
+                      <a:headEnd type="none" w="med" len="med"/>
+                      <a:tailEnd type="none" w="med" len="med"/>
+                    </a:lnR>
+                    <a:lnT w="9525" cap="flat" cmpd="sng" algn="ctr">
+                      <a:solidFill>
+                        <a:srgbClr val="E2E8F0"/>
+                      </a:solidFill>
+                      <a:prstDash val="solid"/>
+                      <a:round/>
+                      <a:headEnd type="none" w="med" len="med"/>
+                      <a:tailEnd type="none" w="med" len="med"/>
+                    </a:lnT>
+                    <a:lnB w="9525" cap="flat" cmpd="sng" algn="ctr">
+                      <a:solidFill>
+                        <a:srgbClr val="E2E8F0"/>
+                      </a:solidFill>
+                      <a:prstDash val="solid"/>
+                      <a:round/>
+                      <a:headEnd type="none" w="med" len="med"/>
+                      <a:tailEnd type="none" w="med" len="med"/>
+                    </a:lnB>
+                    <a:solidFill>
+                      <a:srgbClr val="2B6CB0"/>
+                    </a:solidFill>
+                  </a:tcPr>
+                </a:tc>
+                <a:tc>
+                  <a:txBody>
+                    <a:bodyPr/>
+                    <a:lstStyle/>
+                    <a:p>
+                      <a:pPr rtl="0" fontAlgn="t">
+                        <a:spcBef>
+                          <a:spcPts val="750"/>
+                        </a:spcBef>
+                        <a:spcAft>
+                          <a:spcPts val="750"/>
+                        </a:spcAft>
+                        <a:buNone/>
+                      </a:pPr>
+                      <a:r>
+                        <a:rPr lang="en-US" sz="1200" b="1" i="0" u="none" strike="noStrike">
+                          <a:solidFill>
+                            <a:srgbClr val="FFFFFF"/>
+                          </a:solidFill>
+                          <a:effectLst/>
+                          <a:latin typeface="Arial" panose="020B0604020202020204" pitchFamily="34" charset="0"/>
+                        </a:rPr>
+                        <a:t>Fitur Utama &amp; Fungsi</a:t>
+                      </a:r>
+                      <a:endParaRPr lang="en-US" sz="2400">
+                        <a:effectLst/>
+                      </a:endParaRPr>
+                    </a:p>
+                  </a:txBody>
+                  <a:tcPr marL="59503" marR="59503" marT="59503" marB="59503">
+                    <a:lnL w="9525" cap="flat" cmpd="sng" algn="ctr">
+                      <a:solidFill>
+                        <a:srgbClr val="E2E8F0"/>
+                      </a:solidFill>
+                      <a:prstDash val="solid"/>
+                      <a:round/>
+                      <a:headEnd type="none" w="med" len="med"/>
+                      <a:tailEnd type="none" w="med" len="med"/>
+                    </a:lnL>
+                    <a:lnR w="9525" cap="flat" cmpd="sng" algn="ctr">
+                      <a:solidFill>
+                        <a:srgbClr val="E2E8F0"/>
+                      </a:solidFill>
+                      <a:prstDash val="solid"/>
+                      <a:round/>
+                      <a:headEnd type="none" w="med" len="med"/>
+                      <a:tailEnd type="none" w="med" len="med"/>
+                    </a:lnR>
+                    <a:lnT w="9525" cap="flat" cmpd="sng" algn="ctr">
+                      <a:solidFill>
+                        <a:srgbClr val="E2E8F0"/>
+                      </a:solidFill>
+                      <a:prstDash val="solid"/>
+                      <a:round/>
+                      <a:headEnd type="none" w="med" len="med"/>
+                      <a:tailEnd type="none" w="med" len="med"/>
+                    </a:lnT>
+                    <a:lnB w="9525" cap="flat" cmpd="sng" algn="ctr">
+                      <a:solidFill>
+                        <a:srgbClr val="E2E8F0"/>
+                      </a:solidFill>
+                      <a:prstDash val="solid"/>
+                      <a:round/>
+                      <a:headEnd type="none" w="med" len="med"/>
+                      <a:tailEnd type="none" w="med" len="med"/>
+                    </a:lnB>
+                    <a:solidFill>
+                      <a:srgbClr val="2B6CB0"/>
+                    </a:solidFill>
+                  </a:tcPr>
+                </a:tc>
+                <a:extLst>
+                  <a:ext uri="{0D108BD9-81ED-4DB2-BD59-A6C34878D82A}">
+                    <a16:rowId xmlns:a16="http://schemas.microsoft.com/office/drawing/2014/main" val="318523607"/>
+                  </a:ext>
+                </a:extLst>
+              </a:tr>
+              <a:tr h="642631">
+                <a:tc>
+                  <a:txBody>
+                    <a:bodyPr/>
+                    <a:lstStyle/>
+                    <a:p>
+                      <a:pPr rtl="0" fontAlgn="t">
+                        <a:spcBef>
+                          <a:spcPts val="750"/>
+                        </a:spcBef>
+                        <a:spcAft>
+                          <a:spcPts val="750"/>
+                        </a:spcAft>
+                        <a:buNone/>
+                      </a:pPr>
+                      <a:r>
+                        <a:rPr lang="en-US" sz="1200" b="1" i="0" u="none" strike="noStrike" dirty="0">
+                          <a:solidFill>
+                            <a:srgbClr val="333333"/>
+                          </a:solidFill>
+                          <a:effectLst/>
+                          <a:latin typeface="Arial" panose="020B0604020202020204" pitchFamily="34" charset="0"/>
+                        </a:rPr>
+                        <a:t>Dashboard &amp; Analytics</a:t>
+                      </a:r>
+                      <a:endParaRPr lang="en-US" sz="2400" dirty="0">
+                        <a:effectLst/>
+                      </a:endParaRPr>
+                    </a:p>
+                  </a:txBody>
+                  <a:tcPr marL="59503" marR="59503" marT="59503" marB="59503">
+                    <a:lnL w="9525" cap="flat" cmpd="sng" algn="ctr">
+                      <a:solidFill>
+                        <a:srgbClr val="E2E8F0"/>
+                      </a:solidFill>
+                      <a:prstDash val="solid"/>
+                      <a:round/>
+                      <a:headEnd type="none" w="med" len="med"/>
+                      <a:tailEnd type="none" w="med" len="med"/>
+                    </a:lnL>
+                    <a:lnR w="9525" cap="flat" cmpd="sng" algn="ctr">
+                      <a:solidFill>
+                        <a:srgbClr val="E2E8F0"/>
+                      </a:solidFill>
+                      <a:prstDash val="solid"/>
+                      <a:round/>
+                      <a:headEnd type="none" w="med" len="med"/>
+                      <a:tailEnd type="none" w="med" len="med"/>
+                    </a:lnR>
+                    <a:lnT w="9525" cap="flat" cmpd="sng" algn="ctr">
+                      <a:solidFill>
+                        <a:srgbClr val="E2E8F0"/>
+                      </a:solidFill>
+                      <a:prstDash val="solid"/>
+                      <a:round/>
+                      <a:headEnd type="none" w="med" len="med"/>
+                      <a:tailEnd type="none" w="med" len="med"/>
+                    </a:lnT>
+                    <a:lnB w="9525" cap="flat" cmpd="sng" algn="ctr">
+                      <a:solidFill>
+                        <a:srgbClr val="E2E8F0"/>
+                      </a:solidFill>
+                      <a:prstDash val="solid"/>
+                      <a:round/>
+                      <a:headEnd type="none" w="med" len="med"/>
+                      <a:tailEnd type="none" w="med" len="med"/>
+                    </a:lnB>
+                    <a:noFill/>
+                  </a:tcPr>
+                </a:tc>
+                <a:tc>
+                  <a:txBody>
+                    <a:bodyPr/>
+                    <a:lstStyle/>
+                    <a:p>
+                      <a:pPr rtl="0" fontAlgn="t">
+                        <a:spcBef>
+                          <a:spcPts val="750"/>
+                        </a:spcBef>
+                        <a:spcAft>
+                          <a:spcPts val="750"/>
+                        </a:spcAft>
+                        <a:buNone/>
+                      </a:pPr>
+                      <a:r>
+                        <a:rPr lang="sv-SE" sz="1200" b="0" i="0" u="none" strike="noStrike">
+                          <a:solidFill>
+                            <a:srgbClr val="333333"/>
+                          </a:solidFill>
+                          <a:effectLst/>
+                          <a:latin typeface="Arial" panose="020B0604020202020204" pitchFamily="34" charset="0"/>
+                        </a:rPr>
+                        <a:t>Ringkasan omzet harian, grafik transaksi real-time, dan pemantauan status pesanan (Belum Dikemas / Belum Bayar).</a:t>
+                      </a:r>
+                      <a:endParaRPr lang="sv-SE" sz="2400">
+                        <a:effectLst/>
+                      </a:endParaRPr>
+                    </a:p>
+                  </a:txBody>
+                  <a:tcPr marL="59503" marR="59503" marT="59503" marB="59503">
+                    <a:lnL w="9525" cap="flat" cmpd="sng" algn="ctr">
+                      <a:solidFill>
+                        <a:srgbClr val="E2E8F0"/>
+                      </a:solidFill>
+                      <a:prstDash val="solid"/>
+                      <a:round/>
+                      <a:headEnd type="none" w="med" len="med"/>
+                      <a:tailEnd type="none" w="med" len="med"/>
+                    </a:lnL>
+                    <a:lnR w="9525" cap="flat" cmpd="sng" algn="ctr">
+                      <a:solidFill>
+                        <a:srgbClr val="E2E8F0"/>
+                      </a:solidFill>
+                      <a:prstDash val="solid"/>
+                      <a:round/>
+                      <a:headEnd type="none" w="med" len="med"/>
+                      <a:tailEnd type="none" w="med" len="med"/>
+                    </a:lnR>
+                    <a:lnT w="9525" cap="flat" cmpd="sng" algn="ctr">
+                      <a:solidFill>
+                        <a:srgbClr val="E2E8F0"/>
+                      </a:solidFill>
+                      <a:prstDash val="solid"/>
+                      <a:round/>
+                      <a:headEnd type="none" w="med" len="med"/>
+                      <a:tailEnd type="none" w="med" len="med"/>
+                    </a:lnT>
+                    <a:lnB w="9525" cap="flat" cmpd="sng" algn="ctr">
+                      <a:solidFill>
+                        <a:srgbClr val="E2E8F0"/>
+                      </a:solidFill>
+                      <a:prstDash val="solid"/>
+                      <a:round/>
+                      <a:headEnd type="none" w="med" len="med"/>
+                      <a:tailEnd type="none" w="med" len="med"/>
+                    </a:lnB>
+                    <a:noFill/>
+                  </a:tcPr>
+                </a:tc>
+                <a:extLst>
+                  <a:ext uri="{0D108BD9-81ED-4DB2-BD59-A6C34878D82A}">
+                    <a16:rowId xmlns:a16="http://schemas.microsoft.com/office/drawing/2014/main" val="1220205466"/>
+                  </a:ext>
+                </a:extLst>
+              </a:tr>
+              <a:tr h="642631">
+                <a:tc>
+                  <a:txBody>
+                    <a:bodyPr/>
+                    <a:lstStyle/>
+                    <a:p>
+                      <a:pPr rtl="0" fontAlgn="t">
+                        <a:spcBef>
+                          <a:spcPts val="750"/>
+                        </a:spcBef>
+                        <a:spcAft>
+                          <a:spcPts val="750"/>
+                        </a:spcAft>
+                        <a:buNone/>
+                      </a:pPr>
+                      <a:r>
+                        <a:rPr lang="en-US" sz="1200" b="1" i="0" u="none" strike="noStrike">
+                          <a:solidFill>
+                            <a:srgbClr val="333333"/>
+                          </a:solidFill>
+                          <a:effectLst/>
+                          <a:latin typeface="Arial" panose="020B0604020202020204" pitchFamily="34" charset="0"/>
+                        </a:rPr>
+                        <a:t>Manajemen Penjualan</a:t>
+                      </a:r>
+                      <a:endParaRPr lang="en-US" sz="2400">
+                        <a:effectLst/>
+                      </a:endParaRPr>
+                    </a:p>
+                  </a:txBody>
+                  <a:tcPr marL="59503" marR="59503" marT="59503" marB="59503">
+                    <a:lnL w="9525" cap="flat" cmpd="sng" algn="ctr">
+                      <a:solidFill>
+                        <a:srgbClr val="E2E8F0"/>
+                      </a:solidFill>
+                      <a:prstDash val="solid"/>
+                      <a:round/>
+                      <a:headEnd type="none" w="med" len="med"/>
+                      <a:tailEnd type="none" w="med" len="med"/>
+                    </a:lnL>
+                    <a:lnR w="9525" cap="flat" cmpd="sng" algn="ctr">
+                      <a:solidFill>
+                        <a:srgbClr val="E2E8F0"/>
+                      </a:solidFill>
+                      <a:prstDash val="solid"/>
+                      <a:round/>
+                      <a:headEnd type="none" w="med" len="med"/>
+                      <a:tailEnd type="none" w="med" len="med"/>
+                    </a:lnR>
+                    <a:lnT w="9525" cap="flat" cmpd="sng" algn="ctr">
+                      <a:solidFill>
+                        <a:srgbClr val="E2E8F0"/>
+                      </a:solidFill>
+                      <a:prstDash val="solid"/>
+                      <a:round/>
+                      <a:headEnd type="none" w="med" len="med"/>
+                      <a:tailEnd type="none" w="med" len="med"/>
+                    </a:lnT>
+                    <a:lnB w="9525" cap="flat" cmpd="sng" algn="ctr">
+                      <a:solidFill>
+                        <a:srgbClr val="E2E8F0"/>
+                      </a:solidFill>
+                      <a:prstDash val="solid"/>
+                      <a:round/>
+                      <a:headEnd type="none" w="med" len="med"/>
+                      <a:tailEnd type="none" w="med" len="med"/>
+                    </a:lnB>
+                    <a:noFill/>
+                  </a:tcPr>
+                </a:tc>
+                <a:tc>
+                  <a:txBody>
+                    <a:bodyPr/>
+                    <a:lstStyle/>
+                    <a:p>
+                      <a:pPr rtl="0" fontAlgn="t">
+                        <a:spcBef>
+                          <a:spcPts val="750"/>
+                        </a:spcBef>
+                        <a:spcAft>
+                          <a:spcPts val="750"/>
+                        </a:spcAft>
+                        <a:buNone/>
+                      </a:pPr>
+                      <a:r>
+                        <a:rPr lang="en-US" sz="1200" b="0" i="0" u="none" strike="noStrike">
+                          <a:solidFill>
+                            <a:srgbClr val="333333"/>
+                          </a:solidFill>
+                          <a:effectLst/>
+                          <a:latin typeface="Arial" panose="020B0604020202020204" pitchFamily="34" charset="0"/>
+                        </a:rPr>
+                        <a:t>Modul SO, integrasi marketplace, cetak faktur, pelacakan resi pengiriman, serta pengelolaan Pre-Order.</a:t>
+                      </a:r>
+                      <a:endParaRPr lang="en-US" sz="2400">
+                        <a:effectLst/>
+                      </a:endParaRPr>
+                    </a:p>
+                  </a:txBody>
+                  <a:tcPr marL="59503" marR="59503" marT="59503" marB="59503">
+                    <a:lnL w="9525" cap="flat" cmpd="sng" algn="ctr">
+                      <a:solidFill>
+                        <a:srgbClr val="E2E8F0"/>
+                      </a:solidFill>
+                      <a:prstDash val="solid"/>
+                      <a:round/>
+                      <a:headEnd type="none" w="med" len="med"/>
+                      <a:tailEnd type="none" w="med" len="med"/>
+                    </a:lnL>
+                    <a:lnR w="9525" cap="flat" cmpd="sng" algn="ctr">
+                      <a:solidFill>
+                        <a:srgbClr val="E2E8F0"/>
+                      </a:solidFill>
+                      <a:prstDash val="solid"/>
+                      <a:round/>
+                      <a:headEnd type="none" w="med" len="med"/>
+                      <a:tailEnd type="none" w="med" len="med"/>
+                    </a:lnR>
+                    <a:lnT w="9525" cap="flat" cmpd="sng" algn="ctr">
+                      <a:solidFill>
+                        <a:srgbClr val="E2E8F0"/>
+                      </a:solidFill>
+                      <a:prstDash val="solid"/>
+                      <a:round/>
+                      <a:headEnd type="none" w="med" len="med"/>
+                      <a:tailEnd type="none" w="med" len="med"/>
+                    </a:lnT>
+                    <a:lnB w="9525" cap="flat" cmpd="sng" algn="ctr">
+                      <a:solidFill>
+                        <a:srgbClr val="E2E8F0"/>
+                      </a:solidFill>
+                      <a:prstDash val="solid"/>
+                      <a:round/>
+                      <a:headEnd type="none" w="med" len="med"/>
+                      <a:tailEnd type="none" w="med" len="med"/>
+                    </a:lnB>
+                    <a:noFill/>
+                  </a:tcPr>
+                </a:tc>
+                <a:extLst>
+                  <a:ext uri="{0D108BD9-81ED-4DB2-BD59-A6C34878D82A}">
+                    <a16:rowId xmlns:a16="http://schemas.microsoft.com/office/drawing/2014/main" val="4216531834"/>
+                  </a:ext>
+                </a:extLst>
+              </a:tr>
+              <a:tr h="537906">
+                <a:tc>
+                  <a:txBody>
+                    <a:bodyPr/>
+                    <a:lstStyle/>
+                    <a:p>
+                      <a:pPr rtl="0" fontAlgn="t">
+                        <a:spcBef>
+                          <a:spcPts val="750"/>
+                        </a:spcBef>
+                        <a:spcAft>
+                          <a:spcPts val="750"/>
+                        </a:spcAft>
+                        <a:buNone/>
+                      </a:pPr>
+                      <a:r>
+                        <a:rPr lang="en-US" sz="1200" b="1" i="0" u="none" strike="noStrike">
+                          <a:solidFill>
+                            <a:srgbClr val="333333"/>
+                          </a:solidFill>
+                          <a:effectLst/>
+                          <a:latin typeface="Arial" panose="020B0604020202020204" pitchFamily="34" charset="0"/>
+                        </a:rPr>
+                        <a:t>Sistem Reseller &amp; Area</a:t>
+                      </a:r>
+                      <a:endParaRPr lang="en-US" sz="2400">
+                        <a:effectLst/>
+                      </a:endParaRPr>
+                    </a:p>
+                  </a:txBody>
+                  <a:tcPr marL="59503" marR="59503" marT="59503" marB="59503">
+                    <a:lnL w="9525" cap="flat" cmpd="sng" algn="ctr">
+                      <a:solidFill>
+                        <a:srgbClr val="E2E8F0"/>
+                      </a:solidFill>
+                      <a:prstDash val="solid"/>
+                      <a:round/>
+                      <a:headEnd type="none" w="med" len="med"/>
+                      <a:tailEnd type="none" w="med" len="med"/>
+                    </a:lnL>
+                    <a:lnR w="9525" cap="flat" cmpd="sng" algn="ctr">
+                      <a:solidFill>
+                        <a:srgbClr val="E2E8F0"/>
+                      </a:solidFill>
+                      <a:prstDash val="solid"/>
+                      <a:round/>
+                      <a:headEnd type="none" w="med" len="med"/>
+                      <a:tailEnd type="none" w="med" len="med"/>
+                    </a:lnR>
+                    <a:lnT w="9525" cap="flat" cmpd="sng" algn="ctr">
+                      <a:solidFill>
+                        <a:srgbClr val="E2E8F0"/>
+                      </a:solidFill>
+                      <a:prstDash val="solid"/>
+                      <a:round/>
+                      <a:headEnd type="none" w="med" len="med"/>
+                      <a:tailEnd type="none" w="med" len="med"/>
+                    </a:lnT>
+                    <a:lnB w="9525" cap="flat" cmpd="sng" algn="ctr">
+                      <a:solidFill>
+                        <a:srgbClr val="E2E8F0"/>
+                      </a:solidFill>
+                      <a:prstDash val="solid"/>
+                      <a:round/>
+                      <a:headEnd type="none" w="med" len="med"/>
+                      <a:tailEnd type="none" w="med" len="med"/>
+                    </a:lnB>
+                    <a:noFill/>
+                  </a:tcPr>
+                </a:tc>
+                <a:tc>
+                  <a:txBody>
+                    <a:bodyPr/>
+                    <a:lstStyle/>
+                    <a:p>
+                      <a:pPr rtl="0" fontAlgn="t">
+                        <a:spcBef>
+                          <a:spcPts val="750"/>
+                        </a:spcBef>
+                        <a:spcAft>
+                          <a:spcPts val="750"/>
+                        </a:spcAft>
+                        <a:buNone/>
+                      </a:pPr>
+                      <a:r>
+                        <a:rPr lang="en-US" sz="1200" b="0" i="0" u="none" strike="noStrike" dirty="0">
+                          <a:solidFill>
+                            <a:srgbClr val="333333"/>
+                          </a:solidFill>
+                          <a:effectLst/>
+                          <a:latin typeface="Arial" panose="020B0604020202020204" pitchFamily="34" charset="0"/>
+                        </a:rPr>
+                        <a:t>Dashboard </a:t>
+                      </a:r>
+                      <a:r>
+                        <a:rPr lang="en-US" sz="1200" b="0" i="0" u="none" strike="noStrike" dirty="0" err="1">
+                          <a:solidFill>
+                            <a:srgbClr val="333333"/>
+                          </a:solidFill>
+                          <a:effectLst/>
+                          <a:latin typeface="Arial" panose="020B0604020202020204" pitchFamily="34" charset="0"/>
+                        </a:rPr>
+                        <a:t>khusus</a:t>
+                      </a:r>
+                      <a:r>
+                        <a:rPr lang="en-US" sz="1200" b="0" i="0" u="none" strike="noStrike" dirty="0">
+                          <a:solidFill>
+                            <a:srgbClr val="333333"/>
+                          </a:solidFill>
+                          <a:effectLst/>
+                          <a:latin typeface="Arial" panose="020B0604020202020204" pitchFamily="34" charset="0"/>
+                        </a:rPr>
+                        <a:t> reseller, </a:t>
+                      </a:r>
+                      <a:r>
+                        <a:rPr lang="en-US" sz="1200" b="0" i="0" u="none" strike="noStrike" dirty="0" err="1">
+                          <a:solidFill>
+                            <a:srgbClr val="333333"/>
+                          </a:solidFill>
+                          <a:effectLst/>
+                          <a:latin typeface="Arial" panose="020B0604020202020204" pitchFamily="34" charset="0"/>
+                        </a:rPr>
+                        <a:t>komisi</a:t>
+                      </a:r>
+                      <a:r>
+                        <a:rPr lang="en-US" sz="1200" b="0" i="0" u="none" strike="noStrike" dirty="0">
+                          <a:solidFill>
+                            <a:srgbClr val="333333"/>
+                          </a:solidFill>
+                          <a:effectLst/>
+                          <a:latin typeface="Arial" panose="020B0604020202020204" pitchFamily="34" charset="0"/>
+                        </a:rPr>
+                        <a:t> </a:t>
+                      </a:r>
+                      <a:r>
+                        <a:rPr lang="en-US" sz="1200" b="0" i="0" u="none" strike="noStrike" dirty="0" err="1">
+                          <a:solidFill>
+                            <a:srgbClr val="333333"/>
+                          </a:solidFill>
+                          <a:effectLst/>
+                          <a:latin typeface="Arial" panose="020B0604020202020204" pitchFamily="34" charset="0"/>
+                        </a:rPr>
+                        <a:t>otomatis</a:t>
+                      </a:r>
+                      <a:r>
+                        <a:rPr lang="en-US" sz="1200" b="0" i="0" u="none" strike="noStrike" dirty="0">
+                          <a:solidFill>
+                            <a:srgbClr val="333333"/>
+                          </a:solidFill>
+                          <a:effectLst/>
+                          <a:latin typeface="Arial" panose="020B0604020202020204" pitchFamily="34" charset="0"/>
+                        </a:rPr>
+                        <a:t>, </a:t>
+                      </a:r>
+                      <a:r>
+                        <a:rPr lang="en-US" sz="1200" b="0" i="0" u="none" strike="noStrike" dirty="0" err="1">
+                          <a:solidFill>
+                            <a:srgbClr val="333333"/>
+                          </a:solidFill>
+                          <a:effectLst/>
+                          <a:latin typeface="Arial" panose="020B0604020202020204" pitchFamily="34" charset="0"/>
+                        </a:rPr>
+                        <a:t>katalog</a:t>
+                      </a:r>
+                      <a:r>
+                        <a:rPr lang="en-US" sz="1200" b="0" i="0" u="none" strike="noStrike" dirty="0">
+                          <a:solidFill>
+                            <a:srgbClr val="333333"/>
+                          </a:solidFill>
+                          <a:effectLst/>
+                          <a:latin typeface="Arial" panose="020B0604020202020204" pitchFamily="34" charset="0"/>
+                        </a:rPr>
+                        <a:t> </a:t>
+                      </a:r>
+                      <a:r>
+                        <a:rPr lang="en-US" sz="1200" b="0" i="0" u="none" strike="noStrike" dirty="0" err="1">
+                          <a:solidFill>
+                            <a:srgbClr val="333333"/>
+                          </a:solidFill>
+                          <a:effectLst/>
+                          <a:latin typeface="Arial" panose="020B0604020202020204" pitchFamily="34" charset="0"/>
+                        </a:rPr>
+                        <a:t>produk</a:t>
+                      </a:r>
+                      <a:r>
+                        <a:rPr lang="en-US" sz="1200" b="0" i="0" u="none" strike="noStrike" dirty="0">
+                          <a:solidFill>
+                            <a:srgbClr val="333333"/>
+                          </a:solidFill>
+                          <a:effectLst/>
+                          <a:latin typeface="Arial" panose="020B0604020202020204" pitchFamily="34" charset="0"/>
+                        </a:rPr>
+                        <a:t>, dan </a:t>
+                      </a:r>
+                      <a:r>
+                        <a:rPr lang="en-US" sz="1200" b="0" i="0" u="none" strike="noStrike" dirty="0" err="1">
+                          <a:solidFill>
+                            <a:srgbClr val="333333"/>
+                          </a:solidFill>
+                          <a:effectLst/>
+                          <a:latin typeface="Arial" panose="020B0604020202020204" pitchFamily="34" charset="0"/>
+                        </a:rPr>
+                        <a:t>sistem</a:t>
+                      </a:r>
+                      <a:r>
+                        <a:rPr lang="en-US" sz="1200" b="0" i="0" u="none" strike="noStrike" dirty="0">
+                          <a:solidFill>
+                            <a:srgbClr val="333333"/>
+                          </a:solidFill>
+                          <a:effectLst/>
+                          <a:latin typeface="Arial" panose="020B0604020202020204" pitchFamily="34" charset="0"/>
+                        </a:rPr>
+                        <a:t> dropship yang </a:t>
+                      </a:r>
+                      <a:r>
+                        <a:rPr lang="en-US" sz="1200" b="0" i="0" u="none" strike="noStrike" dirty="0" err="1">
+                          <a:solidFill>
+                            <a:srgbClr val="333333"/>
+                          </a:solidFill>
+                          <a:effectLst/>
+                          <a:latin typeface="Arial" panose="020B0604020202020204" pitchFamily="34" charset="0"/>
+                        </a:rPr>
+                        <a:t>aman</a:t>
+                      </a:r>
+                      <a:r>
+                        <a:rPr lang="en-US" sz="1200" b="0" i="0" u="none" strike="noStrike" dirty="0">
+                          <a:solidFill>
+                            <a:srgbClr val="333333"/>
+                          </a:solidFill>
+                          <a:effectLst/>
+                          <a:latin typeface="Arial" panose="020B0604020202020204" pitchFamily="34" charset="0"/>
+                        </a:rPr>
+                        <a:t>.</a:t>
+                      </a:r>
+                      <a:endParaRPr lang="en-US" sz="2400" dirty="0">
+                        <a:effectLst/>
+                      </a:endParaRPr>
+                    </a:p>
+                  </a:txBody>
+                  <a:tcPr marL="59503" marR="59503" marT="59503" marB="59503">
+                    <a:lnL w="9525" cap="flat" cmpd="sng" algn="ctr">
+                      <a:solidFill>
+                        <a:srgbClr val="E2E8F0"/>
+                      </a:solidFill>
+                      <a:prstDash val="solid"/>
+                      <a:round/>
+                      <a:headEnd type="none" w="med" len="med"/>
+                      <a:tailEnd type="none" w="med" len="med"/>
+                    </a:lnL>
+                    <a:lnR w="9525" cap="flat" cmpd="sng" algn="ctr">
+                      <a:solidFill>
+                        <a:srgbClr val="E2E8F0"/>
+                      </a:solidFill>
+                      <a:prstDash val="solid"/>
+                      <a:round/>
+                      <a:headEnd type="none" w="med" len="med"/>
+                      <a:tailEnd type="none" w="med" len="med"/>
+                    </a:lnR>
+                    <a:lnT w="9525" cap="flat" cmpd="sng" algn="ctr">
+                      <a:solidFill>
+                        <a:srgbClr val="E2E8F0"/>
+                      </a:solidFill>
+                      <a:prstDash val="solid"/>
+                      <a:round/>
+                      <a:headEnd type="none" w="med" len="med"/>
+                      <a:tailEnd type="none" w="med" len="med"/>
+                    </a:lnT>
+                    <a:lnB w="9525" cap="flat" cmpd="sng" algn="ctr">
+                      <a:solidFill>
+                        <a:srgbClr val="E2E8F0"/>
+                      </a:solidFill>
+                      <a:prstDash val="solid"/>
+                      <a:round/>
+                      <a:headEnd type="none" w="med" len="med"/>
+                      <a:tailEnd type="none" w="med" len="med"/>
+                    </a:lnB>
+                    <a:noFill/>
+                  </a:tcPr>
+                </a:tc>
+                <a:extLst>
+                  <a:ext uri="{0D108BD9-81ED-4DB2-BD59-A6C34878D82A}">
+                    <a16:rowId xmlns:a16="http://schemas.microsoft.com/office/drawing/2014/main" val="3085390014"/>
+                  </a:ext>
+                </a:extLst>
+              </a:tr>
+              <a:tr h="642631">
+                <a:tc>
+                  <a:txBody>
+                    <a:bodyPr/>
+                    <a:lstStyle/>
+                    <a:p>
+                      <a:pPr rtl="0" fontAlgn="t">
+                        <a:spcBef>
+                          <a:spcPts val="750"/>
+                        </a:spcBef>
+                        <a:spcAft>
+                          <a:spcPts val="750"/>
+                        </a:spcAft>
+                        <a:buNone/>
+                      </a:pPr>
+                      <a:r>
+                        <a:rPr lang="en-US" sz="1200" b="1" i="0" u="none" strike="noStrike">
+                          <a:solidFill>
+                            <a:srgbClr val="333333"/>
+                          </a:solidFill>
+                          <a:effectLst/>
+                          <a:latin typeface="Arial" panose="020B0604020202020204" pitchFamily="34" charset="0"/>
+                        </a:rPr>
+                        <a:t>Inovasi Penjualan</a:t>
+                      </a:r>
+                      <a:endParaRPr lang="en-US" sz="2400">
+                        <a:effectLst/>
+                      </a:endParaRPr>
+                    </a:p>
+                  </a:txBody>
+                  <a:tcPr marL="59503" marR="59503" marT="59503" marB="59503">
+                    <a:lnL w="9525" cap="flat" cmpd="sng" algn="ctr">
+                      <a:solidFill>
+                        <a:srgbClr val="E2E8F0"/>
+                      </a:solidFill>
+                      <a:prstDash val="solid"/>
+                      <a:round/>
+                      <a:headEnd type="none" w="med" len="med"/>
+                      <a:tailEnd type="none" w="med" len="med"/>
+                    </a:lnL>
+                    <a:lnR w="9525" cap="flat" cmpd="sng" algn="ctr">
+                      <a:solidFill>
+                        <a:srgbClr val="E2E8F0"/>
+                      </a:solidFill>
+                      <a:prstDash val="solid"/>
+                      <a:round/>
+                      <a:headEnd type="none" w="med" len="med"/>
+                      <a:tailEnd type="none" w="med" len="med"/>
+                    </a:lnR>
+                    <a:lnT w="9525" cap="flat" cmpd="sng" algn="ctr">
+                      <a:solidFill>
+                        <a:srgbClr val="E2E8F0"/>
+                      </a:solidFill>
+                      <a:prstDash val="solid"/>
+                      <a:round/>
+                      <a:headEnd type="none" w="med" len="med"/>
+                      <a:tailEnd type="none" w="med" len="med"/>
+                    </a:lnT>
+                    <a:lnB w="9525" cap="flat" cmpd="sng" algn="ctr">
+                      <a:solidFill>
+                        <a:srgbClr val="E2E8F0"/>
+                      </a:solidFill>
+                      <a:prstDash val="solid"/>
+                      <a:round/>
+                      <a:headEnd type="none" w="med" len="med"/>
+                      <a:tailEnd type="none" w="med" len="med"/>
+                    </a:lnB>
+                    <a:noFill/>
+                  </a:tcPr>
+                </a:tc>
+                <a:tc>
+                  <a:txBody>
+                    <a:bodyPr/>
+                    <a:lstStyle/>
+                    <a:p>
+                      <a:pPr rtl="0" fontAlgn="t">
+                        <a:spcBef>
+                          <a:spcPts val="750"/>
+                        </a:spcBef>
+                        <a:spcAft>
+                          <a:spcPts val="750"/>
+                        </a:spcAft>
+                        <a:buNone/>
+                      </a:pPr>
+                      <a:r>
+                        <a:rPr lang="en-US" sz="1200" b="0" i="0" u="none" strike="noStrike">
+                          <a:solidFill>
+                            <a:srgbClr val="333333"/>
+                          </a:solidFill>
+                          <a:effectLst/>
+                          <a:latin typeface="Arial" panose="020B0604020202020204" pitchFamily="34" charset="0"/>
+                        </a:rPr>
+                        <a:t>Fitur Paket Bundling (gabung produk hemat) untuk menghabiskan stok lama dan meningkatkan nilai transaksi (AOV).</a:t>
+                      </a:r>
+                      <a:endParaRPr lang="en-US" sz="2400">
+                        <a:effectLst/>
+                      </a:endParaRPr>
+                    </a:p>
+                  </a:txBody>
+                  <a:tcPr marL="59503" marR="59503" marT="59503" marB="59503">
+                    <a:lnL w="9525" cap="flat" cmpd="sng" algn="ctr">
+                      <a:solidFill>
+                        <a:srgbClr val="E2E8F0"/>
+                      </a:solidFill>
+                      <a:prstDash val="solid"/>
+                      <a:round/>
+                      <a:headEnd type="none" w="med" len="med"/>
+                      <a:tailEnd type="none" w="med" len="med"/>
+                    </a:lnL>
+                    <a:lnR w="9525" cap="flat" cmpd="sng" algn="ctr">
+                      <a:solidFill>
+                        <a:srgbClr val="E2E8F0"/>
+                      </a:solidFill>
+                      <a:prstDash val="solid"/>
+                      <a:round/>
+                      <a:headEnd type="none" w="med" len="med"/>
+                      <a:tailEnd type="none" w="med" len="med"/>
+                    </a:lnR>
+                    <a:lnT w="9525" cap="flat" cmpd="sng" algn="ctr">
+                      <a:solidFill>
+                        <a:srgbClr val="E2E8F0"/>
+                      </a:solidFill>
+                      <a:prstDash val="solid"/>
+                      <a:round/>
+                      <a:headEnd type="none" w="med" len="med"/>
+                      <a:tailEnd type="none" w="med" len="med"/>
+                    </a:lnT>
+                    <a:lnB w="9525" cap="flat" cmpd="sng" algn="ctr">
+                      <a:solidFill>
+                        <a:srgbClr val="E2E8F0"/>
+                      </a:solidFill>
+                      <a:prstDash val="solid"/>
+                      <a:round/>
+                      <a:headEnd type="none" w="med" len="med"/>
+                      <a:tailEnd type="none" w="med" len="med"/>
+                    </a:lnB>
+                    <a:noFill/>
+                  </a:tcPr>
+                </a:tc>
+                <a:extLst>
+                  <a:ext uri="{0D108BD9-81ED-4DB2-BD59-A6C34878D82A}">
+                    <a16:rowId xmlns:a16="http://schemas.microsoft.com/office/drawing/2014/main" val="1106758877"/>
+                  </a:ext>
+                </a:extLst>
+              </a:tr>
+              <a:tr h="642631">
+                <a:tc>
+                  <a:txBody>
+                    <a:bodyPr/>
+                    <a:lstStyle/>
+                    <a:p>
+                      <a:pPr rtl="0" fontAlgn="t">
+                        <a:spcBef>
+                          <a:spcPts val="750"/>
+                        </a:spcBef>
+                        <a:spcAft>
+                          <a:spcPts val="750"/>
+                        </a:spcAft>
+                        <a:buNone/>
+                      </a:pPr>
+                      <a:r>
+                        <a:rPr lang="en-US" sz="1200" b="1" i="0" u="none" strike="noStrike">
+                          <a:solidFill>
+                            <a:srgbClr val="333333"/>
+                          </a:solidFill>
+                          <a:effectLst/>
+                          <a:latin typeface="Arial" panose="020B0604020202020204" pitchFamily="34" charset="0"/>
+                        </a:rPr>
+                        <a:t>Keuangan &amp; Laporan</a:t>
+                      </a:r>
+                      <a:endParaRPr lang="en-US" sz="2400">
+                        <a:effectLst/>
+                      </a:endParaRPr>
+                    </a:p>
+                  </a:txBody>
+                  <a:tcPr marL="59503" marR="59503" marT="59503" marB="59503">
+                    <a:lnL w="9525" cap="flat" cmpd="sng" algn="ctr">
+                      <a:solidFill>
+                        <a:srgbClr val="E2E8F0"/>
+                      </a:solidFill>
+                      <a:prstDash val="solid"/>
+                      <a:round/>
+                      <a:headEnd type="none" w="med" len="med"/>
+                      <a:tailEnd type="none" w="med" len="med"/>
+                    </a:lnL>
+                    <a:lnR w="9525" cap="flat" cmpd="sng" algn="ctr">
+                      <a:solidFill>
+                        <a:srgbClr val="E2E8F0"/>
+                      </a:solidFill>
+                      <a:prstDash val="solid"/>
+                      <a:round/>
+                      <a:headEnd type="none" w="med" len="med"/>
+                      <a:tailEnd type="none" w="med" len="med"/>
+                    </a:lnR>
+                    <a:lnT w="9525" cap="flat" cmpd="sng" algn="ctr">
+                      <a:solidFill>
+                        <a:srgbClr val="E2E8F0"/>
+                      </a:solidFill>
+                      <a:prstDash val="solid"/>
+                      <a:round/>
+                      <a:headEnd type="none" w="med" len="med"/>
+                      <a:tailEnd type="none" w="med" len="med"/>
+                    </a:lnT>
+                    <a:lnB w="9525" cap="flat" cmpd="sng" algn="ctr">
+                      <a:solidFill>
+                        <a:srgbClr val="E2E8F0"/>
+                      </a:solidFill>
+                      <a:prstDash val="solid"/>
+                      <a:round/>
+                      <a:headEnd type="none" w="med" len="med"/>
+                      <a:tailEnd type="none" w="med" len="med"/>
+                    </a:lnB>
+                    <a:noFill/>
+                  </a:tcPr>
+                </a:tc>
+                <a:tc>
+                  <a:txBody>
+                    <a:bodyPr/>
+                    <a:lstStyle/>
+                    <a:p>
+                      <a:pPr rtl="0" fontAlgn="t">
+                        <a:spcBef>
+                          <a:spcPts val="750"/>
+                        </a:spcBef>
+                        <a:spcAft>
+                          <a:spcPts val="750"/>
+                        </a:spcAft>
+                        <a:buNone/>
+                      </a:pPr>
+                      <a:r>
+                        <a:rPr lang="en-US" sz="1200" b="0" i="0" u="none" strike="noStrike" dirty="0" err="1">
+                          <a:solidFill>
+                            <a:srgbClr val="333333"/>
+                          </a:solidFill>
+                          <a:effectLst/>
+                          <a:latin typeface="Arial" panose="020B0604020202020204" pitchFamily="34" charset="0"/>
+                        </a:rPr>
+                        <a:t>Laporan</a:t>
+                      </a:r>
+                      <a:r>
+                        <a:rPr lang="en-US" sz="1200" b="0" i="0" u="none" strike="noStrike" dirty="0">
+                          <a:solidFill>
+                            <a:srgbClr val="333333"/>
+                          </a:solidFill>
+                          <a:effectLst/>
+                          <a:latin typeface="Arial" panose="020B0604020202020204" pitchFamily="34" charset="0"/>
+                        </a:rPr>
+                        <a:t> </a:t>
+                      </a:r>
+                      <a:r>
+                        <a:rPr lang="en-US" sz="1200" b="0" i="0" u="none" strike="noStrike" dirty="0" err="1">
+                          <a:solidFill>
+                            <a:srgbClr val="333333"/>
+                          </a:solidFill>
+                          <a:effectLst/>
+                          <a:latin typeface="Arial" panose="020B0604020202020204" pitchFamily="34" charset="0"/>
+                        </a:rPr>
+                        <a:t>pendapatan</a:t>
+                      </a:r>
+                      <a:r>
+                        <a:rPr lang="en-US" sz="1200" b="0" i="0" u="none" strike="noStrike" dirty="0">
+                          <a:solidFill>
+                            <a:srgbClr val="333333"/>
+                          </a:solidFill>
+                          <a:effectLst/>
+                          <a:latin typeface="Arial" panose="020B0604020202020204" pitchFamily="34" charset="0"/>
+                        </a:rPr>
+                        <a:t> per </a:t>
+                      </a:r>
+                      <a:r>
+                        <a:rPr lang="en-US" sz="1200" b="0" i="0" u="none" strike="noStrike" dirty="0" err="1">
+                          <a:solidFill>
+                            <a:srgbClr val="333333"/>
+                          </a:solidFill>
+                          <a:effectLst/>
+                          <a:latin typeface="Arial" panose="020B0604020202020204" pitchFamily="34" charset="0"/>
+                        </a:rPr>
+                        <a:t>transaksi</a:t>
+                      </a:r>
+                      <a:r>
+                        <a:rPr lang="en-US" sz="1200" b="0" i="0" u="none" strike="noStrike" dirty="0">
+                          <a:solidFill>
+                            <a:srgbClr val="333333"/>
+                          </a:solidFill>
+                          <a:effectLst/>
+                          <a:latin typeface="Arial" panose="020B0604020202020204" pitchFamily="34" charset="0"/>
+                        </a:rPr>
+                        <a:t>, </a:t>
+                      </a:r>
+                      <a:r>
+                        <a:rPr lang="en-US" sz="1200" b="0" i="0" u="none" strike="noStrike" dirty="0" err="1">
+                          <a:solidFill>
+                            <a:srgbClr val="333333"/>
+                          </a:solidFill>
+                          <a:effectLst/>
+                          <a:latin typeface="Arial" panose="020B0604020202020204" pitchFamily="34" charset="0"/>
+                        </a:rPr>
+                        <a:t>laporan</a:t>
+                      </a:r>
+                      <a:r>
+                        <a:rPr lang="en-US" sz="1200" b="0" i="0" u="none" strike="noStrike" dirty="0">
+                          <a:solidFill>
+                            <a:srgbClr val="333333"/>
+                          </a:solidFill>
+                          <a:effectLst/>
+                          <a:latin typeface="Arial" panose="020B0604020202020204" pitchFamily="34" charset="0"/>
+                        </a:rPr>
+                        <a:t> </a:t>
+                      </a:r>
+                      <a:r>
+                        <a:rPr lang="en-US" sz="1200" b="0" i="0" u="none" strike="noStrike" dirty="0" err="1">
+                          <a:solidFill>
+                            <a:srgbClr val="333333"/>
+                          </a:solidFill>
+                          <a:effectLst/>
+                          <a:latin typeface="Arial" panose="020B0604020202020204" pitchFamily="34" charset="0"/>
+                        </a:rPr>
+                        <a:t>komisi</a:t>
+                      </a:r>
+                      <a:r>
+                        <a:rPr lang="en-US" sz="1200" b="0" i="0" u="none" strike="noStrike" dirty="0">
+                          <a:solidFill>
+                            <a:srgbClr val="333333"/>
+                          </a:solidFill>
+                          <a:effectLst/>
+                          <a:latin typeface="Arial" panose="020B0604020202020204" pitchFamily="34" charset="0"/>
+                        </a:rPr>
+                        <a:t> sales/reseller, </a:t>
+                      </a:r>
+                      <a:r>
+                        <a:rPr lang="en-US" sz="1200" b="0" i="0" u="none" strike="noStrike" dirty="0" err="1">
+                          <a:solidFill>
+                            <a:srgbClr val="333333"/>
+                          </a:solidFill>
+                          <a:effectLst/>
+                          <a:latin typeface="Arial" panose="020B0604020202020204" pitchFamily="34" charset="0"/>
+                        </a:rPr>
+                        <a:t>perhitungan</a:t>
+                      </a:r>
+                      <a:r>
+                        <a:rPr lang="en-US" sz="1200" b="0" i="0" u="none" strike="noStrike" dirty="0">
+                          <a:solidFill>
+                            <a:srgbClr val="333333"/>
+                          </a:solidFill>
+                          <a:effectLst/>
+                          <a:latin typeface="Arial" panose="020B0604020202020204" pitchFamily="34" charset="0"/>
+                        </a:rPr>
+                        <a:t> ROAS </a:t>
+                      </a:r>
+                      <a:r>
+                        <a:rPr lang="en-US" sz="1200" b="0" i="0" u="none" strike="noStrike" dirty="0" err="1">
+                          <a:solidFill>
+                            <a:srgbClr val="333333"/>
+                          </a:solidFill>
+                          <a:effectLst/>
+                          <a:latin typeface="Arial" panose="020B0604020202020204" pitchFamily="34" charset="0"/>
+                        </a:rPr>
+                        <a:t>Iklan</a:t>
+                      </a:r>
+                      <a:r>
+                        <a:rPr lang="en-US" sz="1200" b="0" i="0" u="none" strike="noStrike" dirty="0">
+                          <a:solidFill>
+                            <a:srgbClr val="333333"/>
+                          </a:solidFill>
+                          <a:effectLst/>
+                          <a:latin typeface="Arial" panose="020B0604020202020204" pitchFamily="34" charset="0"/>
+                        </a:rPr>
+                        <a:t>, dan </a:t>
+                      </a:r>
+                      <a:r>
+                        <a:rPr lang="en-US" sz="1200" b="0" i="0" u="none" strike="noStrike" dirty="0" err="1">
+                          <a:solidFill>
+                            <a:srgbClr val="333333"/>
+                          </a:solidFill>
+                          <a:effectLst/>
+                          <a:latin typeface="Arial" panose="020B0604020202020204" pitchFamily="34" charset="0"/>
+                        </a:rPr>
+                        <a:t>ekspor</a:t>
+                      </a:r>
+                      <a:r>
+                        <a:rPr lang="en-US" sz="1200" b="0" i="0" u="none" strike="noStrike" dirty="0">
+                          <a:solidFill>
+                            <a:srgbClr val="333333"/>
+                          </a:solidFill>
+                          <a:effectLst/>
+                          <a:latin typeface="Arial" panose="020B0604020202020204" pitchFamily="34" charset="0"/>
+                        </a:rPr>
+                        <a:t> data </a:t>
+                      </a:r>
+                      <a:r>
+                        <a:rPr lang="en-US" sz="1200" b="0" i="0" u="none" strike="noStrike" dirty="0" err="1">
+                          <a:solidFill>
+                            <a:srgbClr val="333333"/>
+                          </a:solidFill>
+                          <a:effectLst/>
+                          <a:latin typeface="Arial" panose="020B0604020202020204" pitchFamily="34" charset="0"/>
+                        </a:rPr>
+                        <a:t>ke</a:t>
+                      </a:r>
+                      <a:r>
+                        <a:rPr lang="en-US" sz="1200" b="0" i="0" u="none" strike="noStrike" dirty="0">
+                          <a:solidFill>
+                            <a:srgbClr val="333333"/>
+                          </a:solidFill>
+                          <a:effectLst/>
+                          <a:latin typeface="Arial" panose="020B0604020202020204" pitchFamily="34" charset="0"/>
+                        </a:rPr>
+                        <a:t> Excel.</a:t>
+                      </a:r>
+                      <a:endParaRPr lang="en-US" sz="2400" dirty="0">
+                        <a:effectLst/>
+                      </a:endParaRPr>
+                    </a:p>
+                  </a:txBody>
+                  <a:tcPr marL="59503" marR="59503" marT="59503" marB="59503">
+                    <a:lnL w="9525" cap="flat" cmpd="sng" algn="ctr">
+                      <a:solidFill>
+                        <a:srgbClr val="E2E8F0"/>
+                      </a:solidFill>
+                      <a:prstDash val="solid"/>
+                      <a:round/>
+                      <a:headEnd type="none" w="med" len="med"/>
+                      <a:tailEnd type="none" w="med" len="med"/>
+                    </a:lnL>
+                    <a:lnR w="9525" cap="flat" cmpd="sng" algn="ctr">
+                      <a:solidFill>
+                        <a:srgbClr val="E2E8F0"/>
+                      </a:solidFill>
+                      <a:prstDash val="solid"/>
+                      <a:round/>
+                      <a:headEnd type="none" w="med" len="med"/>
+                      <a:tailEnd type="none" w="med" len="med"/>
+                    </a:lnR>
+                    <a:lnT w="9525" cap="flat" cmpd="sng" algn="ctr">
+                      <a:solidFill>
+                        <a:srgbClr val="E2E8F0"/>
+                      </a:solidFill>
+                      <a:prstDash val="solid"/>
+                      <a:round/>
+                      <a:headEnd type="none" w="med" len="med"/>
+                      <a:tailEnd type="none" w="med" len="med"/>
+                    </a:lnT>
+                    <a:lnB w="9525" cap="flat" cmpd="sng" algn="ctr">
+                      <a:solidFill>
+                        <a:srgbClr val="E2E8F0"/>
+                      </a:solidFill>
+                      <a:prstDash val="solid"/>
+                      <a:round/>
+                      <a:headEnd type="none" w="med" len="med"/>
+                      <a:tailEnd type="none" w="med" len="med"/>
+                    </a:lnB>
+                    <a:noFill/>
+                  </a:tcPr>
+                </a:tc>
+                <a:extLst>
+                  <a:ext uri="{0D108BD9-81ED-4DB2-BD59-A6C34878D82A}">
+                    <a16:rowId xmlns:a16="http://schemas.microsoft.com/office/drawing/2014/main" val="2865306360"/>
+                  </a:ext>
+                </a:extLst>
+              </a:tr>
+            </a:tbl>
+          </a:graphicData>
+        </a:graphic>
+      </p:graphicFrame>
     </p:spTree>
   </p:cSld>
   <p:clrMapOvr>
@@ -8181,31 +10088,15 @@
         </p:spPr>
         <p:txBody>
           <a:bodyPr>
-            <a:normAutofit/>
+            <a:noAutofit/>
           </a:bodyPr>
           <a:lstStyle/>
           <a:p>
             <a:r>
-              <a:rPr sz="3200" dirty="0" err="1"/>
-              <a:t>Tampilan</a:t>
-            </a:r>
-            <a:r>
-              <a:rPr sz="3200" dirty="0"/>
-              <a:t> Dashboard &amp; </a:t>
-            </a:r>
-            <a:r>
-              <a:rPr sz="3200" dirty="0" err="1"/>
-              <a:t>Transaksi</a:t>
-            </a:r>
-            <a:r>
-              <a:rPr sz="3200" dirty="0"/>
-              <a:t> </a:t>
-            </a:r>
-            <a:r>
-              <a:rPr sz="3200" dirty="0" err="1"/>
-              <a:t>Penjualan</a:t>
-            </a:r>
-            <a:endParaRPr sz="3200" dirty="0"/>
+              <a:rPr lang="fi-FI" sz="2800" b="1" dirty="0"/>
+              <a:t>Tampilan Antarmuka &amp; Kemudahan Penggunaan</a:t>
+            </a:r>
+            <a:endParaRPr sz="2400" dirty="0"/>
           </a:p>
         </p:txBody>
       </p:sp>
@@ -8311,25 +10202,16 @@
           </a:xfrm>
         </p:spPr>
         <p:txBody>
-          <a:bodyPr/>
+          <a:bodyPr>
+            <a:noAutofit/>
+          </a:bodyPr>
           <a:lstStyle/>
           <a:p>
             <a:r>
-              <a:rPr dirty="0" err="1"/>
-              <a:t>Laporan</a:t>
-            </a:r>
-            <a:r>
-              <a:rPr dirty="0"/>
-              <a:t> </a:t>
-            </a:r>
-            <a:r>
-              <a:rPr dirty="0" err="1"/>
-              <a:t>Penjualan</a:t>
-            </a:r>
-            <a:r>
-              <a:rPr dirty="0"/>
-              <a:t> &amp; Stok</a:t>
-            </a:r>
+              <a:rPr lang="fi-FI" sz="2400" b="1" dirty="0"/>
+              <a:t>Tampilan Antarmuka &amp; Kemudahan Penggunaan</a:t>
+            </a:r>
+            <a:endParaRPr sz="2400" dirty="0"/>
           </a:p>
         </p:txBody>
       </p:sp>
@@ -8405,13 +10287,7 @@
   <p:cSld>
     <p:spTree>
       <p:nvGrpSpPr>
-        <p:cNvPr id="1" name="">
-          <a:extLst>
-            <a:ext uri="{FF2B5EF4-FFF2-40B4-BE49-F238E27FC236}">
-              <a16:creationId xmlns:a16="http://schemas.microsoft.com/office/drawing/2014/main" id="{53653320-1AFC-9E7B-4C28-9C5C839B66A2}"/>
-            </a:ext>
-          </a:extLst>
-        </p:cNvPr>
+        <p:cNvPr id="1" name=""/>
         <p:cNvGrpSpPr/>
         <p:nvPr/>
       </p:nvGrpSpPr>
@@ -8425,13 +10301,7 @@
       </p:grpSpPr>
       <p:sp>
         <p:nvSpPr>
-          <p:cNvPr id="2" name="Title 1">
-            <a:extLst>
-              <a:ext uri="{FF2B5EF4-FFF2-40B4-BE49-F238E27FC236}">
-                <a16:creationId xmlns:a16="http://schemas.microsoft.com/office/drawing/2014/main" id="{07D8A67F-CC4E-BCA7-E099-57E8720344A4}"/>
-              </a:ext>
-            </a:extLst>
-          </p:cNvPr>
+          <p:cNvPr id="2" name="Title 1"/>
           <p:cNvSpPr>
             <a:spLocks noGrp="1"/>
           </p:cNvSpPr>
@@ -8442,30 +10312,33 @@
         <p:spPr>
           <a:xfrm>
             <a:off x="982133" y="457201"/>
-            <a:ext cx="7704667" cy="718456"/>
+            <a:ext cx="7704667" cy="1262742"/>
           </a:xfrm>
         </p:spPr>
         <p:txBody>
-          <a:bodyPr/>
+          <a:bodyPr>
+            <a:normAutofit/>
+          </a:bodyPr>
           <a:lstStyle/>
           <a:p>
             <a:r>
-              <a:rPr lang="en-US" dirty="0"/>
-              <a:t>All Screen Shoot App</a:t>
-            </a:r>
-            <a:endParaRPr dirty="0"/>
+              <a:rPr lang="sv-SE" sz="3200" b="1" dirty="0"/>
+              <a:t>Area Reseller </a:t>
+            </a:r>
+            <a:br>
+              <a:rPr lang="sv-SE" sz="3200" b="1" dirty="0"/>
+            </a:br>
+            <a:r>
+              <a:rPr lang="sv-SE" sz="3200" b="1" dirty="0"/>
+              <a:t>Perluas Jangkauan Penjualan Tanpa Batas</a:t>
+            </a:r>
+            <a:endParaRPr sz="2400" dirty="0"/>
           </a:p>
         </p:txBody>
       </p:sp>
       <p:sp>
         <p:nvSpPr>
-          <p:cNvPr id="4" name="Content Placeholder 3">
-            <a:extLst>
-              <a:ext uri="{FF2B5EF4-FFF2-40B4-BE49-F238E27FC236}">
-                <a16:creationId xmlns:a16="http://schemas.microsoft.com/office/drawing/2014/main" id="{24C0A3F3-A012-4455-3567-890440E55842}"/>
-              </a:ext>
-            </a:extLst>
-          </p:cNvPr>
+          <p:cNvPr id="3" name="Content Placeholder 2"/>
           <p:cNvSpPr>
             <a:spLocks noGrp="1"/>
           </p:cNvSpPr>
@@ -8475,71 +10348,368 @@
         </p:nvSpPr>
         <p:spPr>
           <a:xfrm>
-            <a:off x="1090990" y="1583871"/>
-            <a:ext cx="7704667" cy="381000"/>
+            <a:off x="982132" y="2024744"/>
+            <a:ext cx="7704667" cy="3332816"/>
           </a:xfrm>
         </p:spPr>
         <p:txBody>
           <a:bodyPr>
-            <a:normAutofit fontScale="92500" lnSpcReduction="20000"/>
+            <a:normAutofit fontScale="92500"/>
           </a:bodyPr>
           <a:lstStyle/>
           <a:p>
-            <a:pPr marL="0" indent="0">
-              <a:buNone/>
-            </a:pPr>
-            <a:r>
-              <a:rPr lang="en-US" dirty="0" err="1">
-                <a:hlinkClick r:id="rId2"/>
-              </a:rPr>
-              <a:t>Screenshoot</a:t>
-            </a:r>
-            <a:r>
-              <a:rPr lang="en-US" dirty="0">
-                <a:hlinkClick r:id="rId2"/>
-              </a:rPr>
-              <a:t> Application</a:t>
-            </a:r>
-            <a:endParaRPr lang="en-US" dirty="0"/>
+            <a:r>
+              <a:rPr lang="en-US" dirty="0" err="1"/>
+              <a:t>Tingkatkan</a:t>
+            </a:r>
+            <a:r>
+              <a:rPr lang="en-US" dirty="0"/>
+              <a:t> </a:t>
+            </a:r>
+            <a:r>
+              <a:rPr lang="en-US" dirty="0" err="1"/>
+              <a:t>omzet</a:t>
+            </a:r>
+            <a:r>
+              <a:rPr lang="en-US" dirty="0"/>
+              <a:t> </a:t>
+            </a:r>
+            <a:r>
+              <a:rPr lang="en-US" dirty="0" err="1"/>
+              <a:t>dengan</a:t>
+            </a:r>
+            <a:r>
+              <a:rPr lang="en-US" dirty="0"/>
+              <a:t> </a:t>
+            </a:r>
+            <a:r>
+              <a:rPr lang="en-US" dirty="0" err="1"/>
+              <a:t>memberdayakan</a:t>
+            </a:r>
+            <a:r>
+              <a:rPr lang="en-US" dirty="0"/>
+              <a:t> </a:t>
+            </a:r>
+            <a:r>
+              <a:rPr lang="en-US" dirty="0" err="1"/>
+              <a:t>jaringan</a:t>
+            </a:r>
+            <a:r>
+              <a:rPr lang="en-US" dirty="0"/>
+              <a:t> reseller </a:t>
+            </a:r>
+            <a:r>
+              <a:rPr lang="en-US" dirty="0" err="1"/>
+              <a:t>melalui</a:t>
+            </a:r>
+            <a:r>
+              <a:rPr lang="en-US" dirty="0"/>
+              <a:t> portal </a:t>
+            </a:r>
+            <a:r>
+              <a:rPr lang="en-US" dirty="0" err="1"/>
+              <a:t>khusus</a:t>
+            </a:r>
+            <a:r>
+              <a:rPr lang="en-US" dirty="0"/>
+              <a:t> </a:t>
+            </a:r>
+            <a:r>
+              <a:rPr lang="en-US" dirty="0" err="1"/>
+              <a:t>SBiZ</a:t>
+            </a:r>
+            <a:r>
+              <a:rPr lang="en-US" dirty="0"/>
+              <a:t>:</a:t>
+            </a:r>
+          </a:p>
+          <a:p>
+            <a:pPr fontAlgn="base"/>
+            <a:r>
+              <a:rPr lang="en-US" b="1" dirty="0"/>
+              <a:t>Portal Login </a:t>
+            </a:r>
+            <a:r>
+              <a:rPr lang="en-US" b="1" dirty="0" err="1"/>
+              <a:t>Khusus</a:t>
+            </a:r>
+            <a:r>
+              <a:rPr lang="en-US" b="1" dirty="0"/>
+              <a:t>:</a:t>
+            </a:r>
+            <a:r>
+              <a:rPr lang="en-US" dirty="0"/>
+              <a:t> Reseller </a:t>
+            </a:r>
+            <a:r>
+              <a:rPr lang="en-US" dirty="0" err="1"/>
+              <a:t>memiliki</a:t>
+            </a:r>
+            <a:r>
+              <a:rPr lang="en-US" dirty="0"/>
+              <a:t> </a:t>
+            </a:r>
+            <a:r>
+              <a:rPr lang="en-US" dirty="0" err="1"/>
+              <a:t>akun</a:t>
+            </a:r>
+            <a:r>
+              <a:rPr lang="en-US" dirty="0"/>
+              <a:t> </a:t>
+            </a:r>
+            <a:r>
+              <a:rPr lang="en-US" dirty="0" err="1"/>
+              <a:t>mandiri</a:t>
+            </a:r>
+            <a:r>
+              <a:rPr lang="en-US" dirty="0"/>
+              <a:t> </a:t>
+            </a:r>
+            <a:r>
+              <a:rPr lang="en-US" dirty="0" err="1"/>
+              <a:t>untuk</a:t>
+            </a:r>
+            <a:r>
+              <a:rPr lang="en-US" dirty="0"/>
+              <a:t> </a:t>
+            </a:r>
+            <a:r>
+              <a:rPr lang="en-US" dirty="0" err="1"/>
+              <a:t>cek</a:t>
+            </a:r>
+            <a:r>
+              <a:rPr lang="en-US" dirty="0"/>
+              <a:t> </a:t>
+            </a:r>
+            <a:r>
+              <a:rPr lang="en-US" dirty="0" err="1"/>
+              <a:t>stok</a:t>
+            </a:r>
+            <a:r>
+              <a:rPr lang="en-US" dirty="0"/>
+              <a:t> dan </a:t>
+            </a:r>
+            <a:r>
+              <a:rPr lang="en-US" dirty="0" err="1"/>
+              <a:t>melakukan</a:t>
+            </a:r>
+            <a:r>
+              <a:rPr lang="en-US" dirty="0"/>
+              <a:t> </a:t>
+            </a:r>
+            <a:r>
+              <a:rPr lang="en-US" dirty="0" err="1"/>
+              <a:t>pemesanan</a:t>
+            </a:r>
+            <a:r>
+              <a:rPr lang="en-US" dirty="0"/>
+              <a:t>.</a:t>
+            </a:r>
+          </a:p>
+          <a:p>
+            <a:pPr fontAlgn="base"/>
+            <a:r>
+              <a:rPr lang="en-US" b="1" dirty="0" err="1"/>
+              <a:t>Sistem</a:t>
+            </a:r>
+            <a:r>
+              <a:rPr lang="en-US" b="1" dirty="0"/>
+              <a:t> </a:t>
+            </a:r>
+            <a:r>
+              <a:rPr lang="en-US" b="1" dirty="0" err="1"/>
+              <a:t>Komisi</a:t>
+            </a:r>
+            <a:r>
+              <a:rPr lang="en-US" b="1" dirty="0"/>
+              <a:t> &amp; </a:t>
+            </a:r>
+            <a:r>
+              <a:rPr lang="en-US" b="1" dirty="0" err="1"/>
+              <a:t>Poin</a:t>
+            </a:r>
+            <a:r>
+              <a:rPr lang="en-US" b="1" dirty="0"/>
+              <a:t> </a:t>
+            </a:r>
+            <a:r>
+              <a:rPr lang="en-US" b="1" dirty="0" err="1"/>
+              <a:t>Otomatis</a:t>
+            </a:r>
+            <a:r>
+              <a:rPr lang="en-US" b="1" dirty="0"/>
+              <a:t>:</a:t>
+            </a:r>
+            <a:r>
+              <a:rPr lang="en-US" dirty="0"/>
+              <a:t> </a:t>
+            </a:r>
+            <a:r>
+              <a:rPr lang="en-US" dirty="0" err="1"/>
+              <a:t>Komisi</a:t>
+            </a:r>
+            <a:r>
+              <a:rPr lang="en-US" dirty="0"/>
+              <a:t> </a:t>
+            </a:r>
+            <a:r>
+              <a:rPr lang="en-US" dirty="0" err="1"/>
+              <a:t>transparan</a:t>
+            </a:r>
+            <a:r>
+              <a:rPr lang="en-US" dirty="0"/>
+              <a:t> yang </a:t>
+            </a:r>
+            <a:r>
+              <a:rPr lang="en-US" dirty="0" err="1"/>
+              <a:t>langsung</a:t>
+            </a:r>
+            <a:r>
+              <a:rPr lang="en-US" dirty="0"/>
+              <a:t> </a:t>
+            </a:r>
+            <a:r>
+              <a:rPr lang="en-US" dirty="0" err="1"/>
+              <a:t>terrekap</a:t>
+            </a:r>
+            <a:r>
+              <a:rPr lang="en-US" dirty="0"/>
+              <a:t> </a:t>
+            </a:r>
+            <a:r>
+              <a:rPr lang="en-US" dirty="0" err="1"/>
+              <a:t>saat</a:t>
+            </a:r>
+            <a:r>
+              <a:rPr lang="en-US" dirty="0"/>
+              <a:t> </a:t>
+            </a:r>
+            <a:r>
+              <a:rPr lang="en-US" dirty="0" err="1"/>
+              <a:t>transaksi</a:t>
+            </a:r>
+            <a:r>
+              <a:rPr lang="en-US" dirty="0"/>
+              <a:t> </a:t>
+            </a:r>
+            <a:r>
+              <a:rPr lang="en-US" dirty="0" err="1"/>
+              <a:t>berhasil</a:t>
+            </a:r>
+            <a:r>
+              <a:rPr lang="en-US" dirty="0"/>
+              <a:t>.</a:t>
+            </a:r>
+          </a:p>
+          <a:p>
+            <a:pPr fontAlgn="base"/>
+            <a:r>
+              <a:rPr lang="en-US" b="1" dirty="0" err="1"/>
+              <a:t>Dukungan</a:t>
+            </a:r>
+            <a:r>
+              <a:rPr lang="en-US" b="1" dirty="0"/>
+              <a:t> Dropship:</a:t>
+            </a:r>
+            <a:r>
+              <a:rPr lang="en-US" dirty="0"/>
+              <a:t> Reseller </a:t>
+            </a:r>
+            <a:r>
+              <a:rPr lang="en-US" dirty="0" err="1"/>
+              <a:t>dapat</a:t>
+            </a:r>
+            <a:r>
+              <a:rPr lang="en-US" dirty="0"/>
+              <a:t> </a:t>
+            </a:r>
+            <a:r>
+              <a:rPr lang="en-US" dirty="0" err="1"/>
+              <a:t>mengirimkan</a:t>
+            </a:r>
+            <a:r>
+              <a:rPr lang="en-US" dirty="0"/>
+              <a:t> </a:t>
+            </a:r>
+            <a:r>
+              <a:rPr lang="en-US" dirty="0" err="1"/>
+              <a:t>barang</a:t>
+            </a:r>
+            <a:r>
+              <a:rPr lang="en-US" dirty="0"/>
+              <a:t> </a:t>
+            </a:r>
+            <a:r>
+              <a:rPr lang="en-US" dirty="0" err="1"/>
+              <a:t>langsung</a:t>
+            </a:r>
+            <a:r>
+              <a:rPr lang="en-US" dirty="0"/>
+              <a:t> </a:t>
+            </a:r>
+            <a:r>
+              <a:rPr lang="en-US" dirty="0" err="1"/>
+              <a:t>ke</a:t>
+            </a:r>
+            <a:r>
+              <a:rPr lang="en-US" dirty="0"/>
+              <a:t> </a:t>
+            </a:r>
+            <a:r>
+              <a:rPr lang="en-US" dirty="0" err="1"/>
+              <a:t>pembeli</a:t>
+            </a:r>
+            <a:r>
+              <a:rPr lang="en-US" dirty="0"/>
+              <a:t> </a:t>
+            </a:r>
+            <a:r>
+              <a:rPr lang="en-US" dirty="0" err="1"/>
+              <a:t>akhir</a:t>
+            </a:r>
+            <a:r>
+              <a:rPr lang="en-US" dirty="0"/>
+              <a:t> </a:t>
+            </a:r>
+            <a:r>
+              <a:rPr lang="en-US" dirty="0" err="1"/>
+              <a:t>dengan</a:t>
+            </a:r>
+            <a:r>
+              <a:rPr lang="en-US" dirty="0"/>
+              <a:t> nama </a:t>
+            </a:r>
+            <a:r>
+              <a:rPr lang="en-US" dirty="0" err="1"/>
+              <a:t>toko</a:t>
+            </a:r>
+            <a:r>
+              <a:rPr lang="en-US" dirty="0"/>
+              <a:t> </a:t>
+            </a:r>
+            <a:r>
+              <a:rPr lang="en-US" dirty="0" err="1"/>
+              <a:t>mereka</a:t>
+            </a:r>
+            <a:r>
+              <a:rPr lang="en-US" dirty="0"/>
+              <a:t> </a:t>
+            </a:r>
+            <a:r>
+              <a:rPr lang="en-US" dirty="0" err="1"/>
+              <a:t>sendiri</a:t>
+            </a:r>
+            <a:r>
+              <a:rPr lang="en-US" dirty="0"/>
+              <a:t>.</a:t>
+            </a:r>
+          </a:p>
+          <a:p>
+            <a:endParaRPr dirty="0"/>
           </a:p>
         </p:txBody>
       </p:sp>
-      <p:pic>
-        <p:nvPicPr>
-          <p:cNvPr id="6" name="Picture 5">
-            <a:extLst>
-              <a:ext uri="{FF2B5EF4-FFF2-40B4-BE49-F238E27FC236}">
-                <a16:creationId xmlns:a16="http://schemas.microsoft.com/office/drawing/2014/main" id="{73FE4F4D-DA44-4224-6F8B-EC69AFFDB12A}"/>
-              </a:ext>
-            </a:extLst>
-          </p:cNvPr>
-          <p:cNvPicPr>
-            <a:picLocks noChangeAspect="1"/>
-          </p:cNvPicPr>
-          <p:nvPr/>
-        </p:nvPicPr>
-        <p:blipFill>
-          <a:blip r:embed="rId3"/>
-          <a:stretch>
-            <a:fillRect/>
-          </a:stretch>
-        </p:blipFill>
-        <p:spPr>
-          <a:xfrm>
-            <a:off x="1090990" y="2144486"/>
-            <a:ext cx="7511143" cy="3810624"/>
-          </a:xfrm>
-          <a:prstGeom prst="rect">
-            <a:avLst/>
-          </a:prstGeom>
-        </p:spPr>
-      </p:pic>
     </p:spTree>
-    <p:extLst>
-      <p:ext uri="{BB962C8B-B14F-4D97-AF65-F5344CB8AC3E}">
-        <p14:creationId xmlns:p14="http://schemas.microsoft.com/office/powerpoint/2010/main" val="2475563122"/>
-      </p:ext>
-    </p:extLst>
   </p:cSld>
   <p:clrMapOvr>
     <a:masterClrMapping/>
@@ -8574,7 +10744,12 @@
             <p:ph type="title"/>
           </p:nvPr>
         </p:nvSpPr>
-        <p:spPr/>
+        <p:spPr>
+          <a:xfrm>
+            <a:off x="982133" y="457201"/>
+            <a:ext cx="7704667" cy="968828"/>
+          </a:xfrm>
+        </p:spPr>
         <p:txBody>
           <a:bodyPr>
             <a:normAutofit/>
@@ -8582,270 +10757,1531 @@
           <a:lstStyle/>
           <a:p>
             <a:r>
-              <a:rPr sz="3200" dirty="0"/>
-              <a:t>Reseller </a:t>
-            </a:r>
-            <a:r>
-              <a:rPr lang="en-US" sz="3200" dirty="0"/>
-              <a:t>Fitur </a:t>
+              <a:rPr lang="en-US" sz="2400" b="1" dirty="0"/>
+              <a:t> </a:t>
+            </a:r>
+            <a:r>
+              <a:rPr lang="en-US" sz="2400" b="1" dirty="0" err="1"/>
+              <a:t>Mengapa</a:t>
+            </a:r>
+            <a:r>
+              <a:rPr lang="en-US" sz="2400" b="1" dirty="0"/>
+              <a:t> </a:t>
+            </a:r>
+            <a:r>
+              <a:rPr lang="en-US" sz="2400" b="1" dirty="0" err="1"/>
+              <a:t>Memilih</a:t>
+            </a:r>
+            <a:r>
+              <a:rPr lang="en-US" sz="2400" b="1" dirty="0"/>
+              <a:t> </a:t>
+            </a:r>
+            <a:r>
+              <a:rPr lang="en-US" sz="2400" b="1" dirty="0" err="1"/>
+              <a:t>SBiZ</a:t>
+            </a:r>
+            <a:r>
+              <a:rPr lang="en-US" sz="2400" b="1" dirty="0"/>
+              <a:t> </a:t>
+            </a:r>
+            <a:r>
+              <a:rPr lang="en-US" sz="2400" b="1" dirty="0" err="1"/>
+              <a:t>dibanding</a:t>
+            </a:r>
+            <a:r>
+              <a:rPr lang="en-US" sz="2400" b="1" dirty="0"/>
+              <a:t> </a:t>
             </a:r>
             <a:br>
-              <a:rPr lang="en-US" sz="3200" dirty="0"/>
+              <a:rPr lang="en-US" sz="2400" b="1" dirty="0"/>
             </a:br>
             <a:r>
-              <a:rPr sz="3200" dirty="0" err="1"/>
-              <a:t>Perluas</a:t>
-            </a:r>
-            <a:r>
-              <a:rPr lang="en-US" sz="3200" dirty="0" err="1"/>
-              <a:t>an</a:t>
-            </a:r>
-            <a:r>
-              <a:rPr sz="3200" dirty="0"/>
-              <a:t> </a:t>
-            </a:r>
-            <a:r>
-              <a:rPr sz="3200" dirty="0" err="1"/>
-              <a:t>Jangkauan</a:t>
-            </a:r>
-            <a:r>
-              <a:rPr sz="3200" dirty="0"/>
-              <a:t> </a:t>
-            </a:r>
-            <a:r>
-              <a:rPr sz="3200" dirty="0" err="1"/>
-              <a:t>Penjualan</a:t>
-            </a:r>
-            <a:r>
-              <a:rPr sz="3200" dirty="0"/>
-              <a:t> Anda</a:t>
-            </a:r>
+              <a:rPr lang="en-US" sz="2400" b="1" dirty="0"/>
+              <a:t>Software Lain? (Daya Saing)</a:t>
+            </a:r>
+            <a:endParaRPr sz="1800" dirty="0"/>
           </a:p>
         </p:txBody>
       </p:sp>
-      <p:sp>
-        <p:nvSpPr>
-          <p:cNvPr id="3" name="Content Placeholder 2"/>
-          <p:cNvSpPr>
-            <a:spLocks noGrp="1"/>
-          </p:cNvSpPr>
+      <p:graphicFrame>
+        <p:nvGraphicFramePr>
+          <p:cNvPr id="8" name="Table 7">
+            <a:extLst>
+              <a:ext uri="{FF2B5EF4-FFF2-40B4-BE49-F238E27FC236}">
+                <a16:creationId xmlns:a16="http://schemas.microsoft.com/office/drawing/2014/main" id="{F4AA79C8-214F-7CDF-1648-43CA9D09351C}"/>
+              </a:ext>
+            </a:extLst>
+          </p:cNvPr>
+          <p:cNvGraphicFramePr>
+            <a:graphicFrameLocks noGrp="1"/>
+          </p:cNvGraphicFramePr>
           <p:nvPr>
-            <p:ph idx="1"/>
+            <p:extLst>
+              <p:ext uri="{D42A27DB-BD31-4B8C-83A1-F6EECF244321}">
+                <p14:modId xmlns:p14="http://schemas.microsoft.com/office/powerpoint/2010/main" val="1646475359"/>
+              </p:ext>
+            </p:extLst>
           </p:nvPr>
-        </p:nvSpPr>
-        <p:spPr>
-          <a:xfrm>
-            <a:off x="982132" y="2427515"/>
-            <a:ext cx="7704667" cy="3332816"/>
-          </a:xfrm>
-        </p:spPr>
-        <p:txBody>
-          <a:bodyPr>
-            <a:normAutofit fontScale="85000" lnSpcReduction="10000"/>
-          </a:bodyPr>
-          <a:lstStyle/>
-          <a:p>
-            <a:r>
-              <a:rPr dirty="0"/>
-              <a:t>Apa </a:t>
-            </a:r>
-            <a:r>
-              <a:rPr dirty="0" err="1"/>
-              <a:t>itu</a:t>
-            </a:r>
-            <a:r>
-              <a:rPr dirty="0"/>
-              <a:t> Reseller Area?</a:t>
-            </a:r>
-          </a:p>
-          <a:p>
-            <a:pPr marL="0" indent="0">
-              <a:buNone/>
-            </a:pPr>
-            <a:r>
-              <a:rPr lang="en-US" dirty="0"/>
-              <a:t>     </a:t>
-            </a:r>
-            <a:r>
-              <a:rPr dirty="0"/>
-              <a:t>Fitur </a:t>
-            </a:r>
-            <a:r>
-              <a:rPr dirty="0" err="1"/>
-              <a:t>ini</a:t>
-            </a:r>
-            <a:r>
-              <a:rPr dirty="0"/>
-              <a:t> </a:t>
-            </a:r>
-            <a:r>
-              <a:rPr dirty="0" err="1"/>
-              <a:t>memungkinkan</a:t>
-            </a:r>
-            <a:r>
-              <a:rPr dirty="0"/>
-              <a:t> Anda </a:t>
-            </a:r>
-            <a:r>
-              <a:rPr dirty="0" err="1"/>
-              <a:t>mengelola</a:t>
-            </a:r>
-            <a:r>
-              <a:rPr dirty="0"/>
-              <a:t> reseller </a:t>
-            </a:r>
-            <a:r>
-              <a:rPr dirty="0" err="1"/>
-              <a:t>secara</a:t>
-            </a:r>
-            <a:r>
-              <a:rPr dirty="0"/>
-              <a:t> </a:t>
-            </a:r>
-            <a:r>
-              <a:rPr dirty="0" err="1"/>
-              <a:t>sistematis</a:t>
-            </a:r>
-            <a:r>
-              <a:rPr dirty="0"/>
-              <a:t>.</a:t>
-            </a:r>
-          </a:p>
-          <a:p>
-            <a:endParaRPr dirty="0"/>
-          </a:p>
-          <a:p>
-            <a:r>
-              <a:rPr dirty="0"/>
-              <a:t>Fitur Utama:</a:t>
-            </a:r>
-          </a:p>
-          <a:p>
-            <a:pPr marL="0" indent="0">
-              <a:buNone/>
-            </a:pPr>
-            <a:r>
-              <a:rPr lang="en-US" dirty="0"/>
-              <a:t>    </a:t>
-            </a:r>
-            <a:r>
-              <a:rPr dirty="0"/>
-              <a:t> Data reseller, </a:t>
-            </a:r>
-            <a:r>
-              <a:rPr dirty="0" err="1"/>
-              <a:t>harga</a:t>
-            </a:r>
-            <a:r>
-              <a:rPr dirty="0"/>
-              <a:t> </a:t>
-            </a:r>
-            <a:r>
-              <a:rPr dirty="0" err="1"/>
-              <a:t>khusus</a:t>
-            </a:r>
-            <a:r>
-              <a:rPr dirty="0"/>
-              <a:t>, </a:t>
-            </a:r>
-            <a:r>
-              <a:rPr dirty="0" err="1"/>
-              <a:t>komisi</a:t>
-            </a:r>
-            <a:r>
-              <a:rPr dirty="0"/>
-              <a:t>, </a:t>
-            </a:r>
-            <a:r>
-              <a:rPr dirty="0" err="1"/>
-              <a:t>poin</a:t>
-            </a:r>
-            <a:r>
-              <a:rPr dirty="0"/>
-              <a:t> &amp; </a:t>
-            </a:r>
-            <a:r>
-              <a:rPr dirty="0" err="1"/>
-              <a:t>brosur</a:t>
-            </a:r>
-            <a:r>
-              <a:rPr dirty="0"/>
-              <a:t> </a:t>
-            </a:r>
-            <a:r>
-              <a:rPr dirty="0" err="1"/>
-              <a:t>produk</a:t>
-            </a:r>
-            <a:r>
-              <a:rPr dirty="0"/>
-              <a:t>.</a:t>
-            </a:r>
-          </a:p>
-          <a:p>
-            <a:endParaRPr lang="en-US" dirty="0"/>
-          </a:p>
-          <a:p>
-            <a:r>
-              <a:rPr dirty="0"/>
-              <a:t>Manfaat:</a:t>
-            </a:r>
-            <a:endParaRPr lang="en-US" dirty="0"/>
-          </a:p>
-          <a:p>
-            <a:pPr marL="0" indent="0">
-              <a:buNone/>
-            </a:pPr>
-            <a:r>
-              <a:rPr lang="en-US" dirty="0"/>
-              <a:t>    </a:t>
-            </a:r>
-            <a:r>
-              <a:rPr dirty="0"/>
-              <a:t> </a:t>
-            </a:r>
-            <a:r>
-              <a:rPr dirty="0" err="1"/>
-              <a:t>Menambah</a:t>
-            </a:r>
-            <a:r>
-              <a:rPr dirty="0"/>
-              <a:t> channel </a:t>
-            </a:r>
-            <a:r>
-              <a:rPr dirty="0" err="1"/>
-              <a:t>penjualan</a:t>
-            </a:r>
-            <a:r>
-              <a:rPr dirty="0"/>
-              <a:t>, </a:t>
-            </a:r>
-            <a:r>
-              <a:rPr dirty="0" err="1"/>
-              <a:t>transparan</a:t>
-            </a:r>
-            <a:r>
-              <a:rPr dirty="0"/>
-              <a:t>, dan </a:t>
-            </a:r>
-            <a:r>
-              <a:rPr dirty="0" err="1"/>
-              <a:t>bisa</a:t>
-            </a:r>
-            <a:r>
-              <a:rPr dirty="0"/>
-              <a:t> </a:t>
-            </a:r>
-            <a:r>
-              <a:rPr dirty="0" err="1"/>
-              <a:t>untuk</a:t>
-            </a:r>
-            <a:r>
-              <a:rPr dirty="0"/>
-              <a:t> dropship.</a:t>
-            </a:r>
-          </a:p>
-        </p:txBody>
-      </p:sp>
+        </p:nvGraphicFramePr>
+        <p:xfrm>
+          <a:off x="1308690" y="1706617"/>
+          <a:ext cx="7301910" cy="4898835"/>
+        </p:xfrm>
+        <a:graphic>
+          <a:graphicData uri="http://schemas.openxmlformats.org/drawingml/2006/table">
+            <a:tbl>
+              <a:tblPr/>
+              <a:tblGrid>
+                <a:gridCol w="3230653">
+                  <a:extLst>
+                    <a:ext uri="{9D8B030D-6E8A-4147-A177-3AD203B41FA5}">
+                      <a16:colId xmlns:a16="http://schemas.microsoft.com/office/drawing/2014/main" val="2106163040"/>
+                    </a:ext>
+                  </a:extLst>
+                </a:gridCol>
+                <a:gridCol w="4071257">
+                  <a:extLst>
+                    <a:ext uri="{9D8B030D-6E8A-4147-A177-3AD203B41FA5}">
+                      <a16:colId xmlns:a16="http://schemas.microsoft.com/office/drawing/2014/main" val="2051096991"/>
+                    </a:ext>
+                  </a:extLst>
+                </a:gridCol>
+              </a:tblGrid>
+              <a:tr h="510098">
+                <a:tc>
+                  <a:txBody>
+                    <a:bodyPr/>
+                    <a:lstStyle/>
+                    <a:p>
+                      <a:pPr rtl="0" fontAlgn="t">
+                        <a:spcBef>
+                          <a:spcPts val="750"/>
+                        </a:spcBef>
+                        <a:spcAft>
+                          <a:spcPts val="750"/>
+                        </a:spcAft>
+                        <a:buNone/>
+                      </a:pPr>
+                      <a:r>
+                        <a:rPr lang="en-US" sz="1100" b="1" i="0" u="none" strike="noStrike">
+                          <a:solidFill>
+                            <a:srgbClr val="FFFFFF"/>
+                          </a:solidFill>
+                          <a:effectLst/>
+                          <a:latin typeface="Arial" panose="020B0604020202020204" pitchFamily="34" charset="0"/>
+                        </a:rPr>
+                        <a:t>Keunggulan SBiZ</a:t>
+                      </a:r>
+                      <a:endParaRPr lang="en-US" sz="1800">
+                        <a:effectLst/>
+                      </a:endParaRPr>
+                    </a:p>
+                  </a:txBody>
+                  <a:tcPr marL="91212" marR="91212" marT="91212" marB="91212">
+                    <a:lnL w="9525" cap="flat" cmpd="sng" algn="ctr">
+                      <a:solidFill>
+                        <a:srgbClr val="E2E8F0"/>
+                      </a:solidFill>
+                      <a:prstDash val="solid"/>
+                      <a:round/>
+                      <a:headEnd type="none" w="med" len="med"/>
+                      <a:tailEnd type="none" w="med" len="med"/>
+                    </a:lnL>
+                    <a:lnR w="9525" cap="flat" cmpd="sng" algn="ctr">
+                      <a:solidFill>
+                        <a:srgbClr val="E2E8F0"/>
+                      </a:solidFill>
+                      <a:prstDash val="solid"/>
+                      <a:round/>
+                      <a:headEnd type="none" w="med" len="med"/>
+                      <a:tailEnd type="none" w="med" len="med"/>
+                    </a:lnR>
+                    <a:lnT w="9525" cap="flat" cmpd="sng" algn="ctr">
+                      <a:solidFill>
+                        <a:srgbClr val="E2E8F0"/>
+                      </a:solidFill>
+                      <a:prstDash val="solid"/>
+                      <a:round/>
+                      <a:headEnd type="none" w="med" len="med"/>
+                      <a:tailEnd type="none" w="med" len="med"/>
+                    </a:lnT>
+                    <a:lnB w="9525" cap="flat" cmpd="sng" algn="ctr">
+                      <a:solidFill>
+                        <a:srgbClr val="E2E8F0"/>
+                      </a:solidFill>
+                      <a:prstDash val="solid"/>
+                      <a:round/>
+                      <a:headEnd type="none" w="med" len="med"/>
+                      <a:tailEnd type="none" w="med" len="med"/>
+                    </a:lnB>
+                    <a:solidFill>
+                      <a:srgbClr val="2B6CB0"/>
+                    </a:solidFill>
+                  </a:tcPr>
+                </a:tc>
+                <a:tc>
+                  <a:txBody>
+                    <a:bodyPr/>
+                    <a:lstStyle/>
+                    <a:p>
+                      <a:pPr rtl="0" fontAlgn="t">
+                        <a:spcBef>
+                          <a:spcPts val="750"/>
+                        </a:spcBef>
+                        <a:spcAft>
+                          <a:spcPts val="750"/>
+                        </a:spcAft>
+                        <a:buNone/>
+                      </a:pPr>
+                      <a:r>
+                        <a:rPr lang="fi-FI" sz="1100" b="1" i="0" u="none" strike="noStrike">
+                          <a:solidFill>
+                            <a:srgbClr val="FFFFFF"/>
+                          </a:solidFill>
+                          <a:effectLst/>
+                          <a:latin typeface="Arial" panose="020B0604020202020204" pitchFamily="34" charset="0"/>
+                        </a:rPr>
+                        <a:t>Software SaaS Pasaran / Kategori Lain</a:t>
+                      </a:r>
+                      <a:endParaRPr lang="fi-FI" sz="1800">
+                        <a:effectLst/>
+                      </a:endParaRPr>
+                    </a:p>
+                  </a:txBody>
+                  <a:tcPr marL="91212" marR="91212" marT="91212" marB="91212">
+                    <a:lnL w="9525" cap="flat" cmpd="sng" algn="ctr">
+                      <a:solidFill>
+                        <a:srgbClr val="E2E8F0"/>
+                      </a:solidFill>
+                      <a:prstDash val="solid"/>
+                      <a:round/>
+                      <a:headEnd type="none" w="med" len="med"/>
+                      <a:tailEnd type="none" w="med" len="med"/>
+                    </a:lnL>
+                    <a:lnR w="9525" cap="flat" cmpd="sng" algn="ctr">
+                      <a:solidFill>
+                        <a:srgbClr val="E2E8F0"/>
+                      </a:solidFill>
+                      <a:prstDash val="solid"/>
+                      <a:round/>
+                      <a:headEnd type="none" w="med" len="med"/>
+                      <a:tailEnd type="none" w="med" len="med"/>
+                    </a:lnR>
+                    <a:lnT w="9525" cap="flat" cmpd="sng" algn="ctr">
+                      <a:solidFill>
+                        <a:srgbClr val="E2E8F0"/>
+                      </a:solidFill>
+                      <a:prstDash val="solid"/>
+                      <a:round/>
+                      <a:headEnd type="none" w="med" len="med"/>
+                      <a:tailEnd type="none" w="med" len="med"/>
+                    </a:lnT>
+                    <a:lnB w="9525" cap="flat" cmpd="sng" algn="ctr">
+                      <a:solidFill>
+                        <a:srgbClr val="E2E8F0"/>
+                      </a:solidFill>
+                      <a:prstDash val="solid"/>
+                      <a:round/>
+                      <a:headEnd type="none" w="med" len="med"/>
+                      <a:tailEnd type="none" w="med" len="med"/>
+                    </a:lnB>
+                    <a:solidFill>
+                      <a:srgbClr val="2B6CB0"/>
+                    </a:solidFill>
+                  </a:tcPr>
+                </a:tc>
+                <a:extLst>
+                  <a:ext uri="{0D108BD9-81ED-4DB2-BD59-A6C34878D82A}">
+                    <a16:rowId xmlns:a16="http://schemas.microsoft.com/office/drawing/2014/main" val="566704936"/>
+                  </a:ext>
+                </a:extLst>
+              </a:tr>
+              <a:tr h="974305">
+                <a:tc>
+                  <a:txBody>
+                    <a:bodyPr/>
+                    <a:lstStyle/>
+                    <a:p>
+                      <a:pPr rtl="0" fontAlgn="t">
+                        <a:buNone/>
+                      </a:pPr>
+                      <a:r>
+                        <a:rPr lang="es-ES" sz="1100" b="1" i="0" u="none" strike="noStrike" dirty="0" err="1">
+                          <a:solidFill>
+                            <a:srgbClr val="333333"/>
+                          </a:solidFill>
+                          <a:effectLst/>
+                          <a:latin typeface="Arial" panose="020B0604020202020204" pitchFamily="34" charset="0"/>
+                        </a:rPr>
+                        <a:t>Private</a:t>
+                      </a:r>
+                      <a:r>
+                        <a:rPr lang="es-ES" sz="1100" b="1" i="0" u="none" strike="noStrike" dirty="0">
+                          <a:solidFill>
+                            <a:srgbClr val="333333"/>
+                          </a:solidFill>
+                          <a:effectLst/>
+                          <a:latin typeface="Arial" panose="020B0604020202020204" pitchFamily="34" charset="0"/>
+                        </a:rPr>
+                        <a:t> Server / </a:t>
+                      </a:r>
+                      <a:r>
+                        <a:rPr lang="es-ES" sz="1100" b="1" i="0" u="none" strike="noStrike" dirty="0" err="1">
+                          <a:solidFill>
+                            <a:srgbClr val="333333"/>
+                          </a:solidFill>
+                          <a:effectLst/>
+                          <a:latin typeface="Arial" panose="020B0604020202020204" pitchFamily="34" charset="0"/>
+                        </a:rPr>
+                        <a:t>Dedicated</a:t>
+                      </a:r>
+                      <a:endParaRPr lang="es-ES" sz="1800" dirty="0">
+                        <a:effectLst/>
+                      </a:endParaRPr>
+                    </a:p>
+                    <a:p>
+                      <a:pPr rtl="0" fontAlgn="t">
+                        <a:spcBef>
+                          <a:spcPts val="750"/>
+                        </a:spcBef>
+                        <a:spcAft>
+                          <a:spcPts val="750"/>
+                        </a:spcAft>
+                        <a:buNone/>
+                      </a:pPr>
+                      <a:r>
+                        <a:rPr lang="es-ES" sz="1100" b="0" i="0" u="none" strike="noStrike" dirty="0">
+                          <a:solidFill>
+                            <a:srgbClr val="333333"/>
+                          </a:solidFill>
+                          <a:effectLst/>
+                          <a:latin typeface="Arial" panose="020B0604020202020204" pitchFamily="34" charset="0"/>
+                        </a:rPr>
+                        <a:t>Data 100% aman dan </a:t>
+                      </a:r>
+                      <a:r>
+                        <a:rPr lang="es-ES" sz="1100" b="0" i="0" u="none" strike="noStrike" dirty="0" err="1">
+                          <a:solidFill>
+                            <a:srgbClr val="333333"/>
+                          </a:solidFill>
+                          <a:effectLst/>
+                          <a:latin typeface="Arial" panose="020B0604020202020204" pitchFamily="34" charset="0"/>
+                        </a:rPr>
+                        <a:t>tidak</a:t>
+                      </a:r>
+                      <a:r>
+                        <a:rPr lang="es-ES" sz="1100" b="0" i="0" u="none" strike="noStrike" dirty="0">
+                          <a:solidFill>
+                            <a:srgbClr val="333333"/>
+                          </a:solidFill>
+                          <a:effectLst/>
+                          <a:latin typeface="Arial" panose="020B0604020202020204" pitchFamily="34" charset="0"/>
+                        </a:rPr>
+                        <a:t> </a:t>
+                      </a:r>
+                      <a:r>
+                        <a:rPr lang="es-ES" sz="1100" b="0" i="0" u="none" strike="noStrike" dirty="0" err="1">
+                          <a:solidFill>
+                            <a:srgbClr val="333333"/>
+                          </a:solidFill>
+                          <a:effectLst/>
+                          <a:latin typeface="Arial" panose="020B0604020202020204" pitchFamily="34" charset="0"/>
+                        </a:rPr>
+                        <a:t>bercampur</a:t>
+                      </a:r>
+                      <a:r>
+                        <a:rPr lang="es-ES" sz="1100" b="0" i="0" u="none" strike="noStrike" dirty="0">
+                          <a:solidFill>
+                            <a:srgbClr val="333333"/>
+                          </a:solidFill>
+                          <a:effectLst/>
+                          <a:latin typeface="Arial" panose="020B0604020202020204" pitchFamily="34" charset="0"/>
+                        </a:rPr>
+                        <a:t> </a:t>
+                      </a:r>
+                      <a:r>
+                        <a:rPr lang="es-ES" sz="1100" b="0" i="0" u="none" strike="noStrike" dirty="0" err="1">
+                          <a:solidFill>
+                            <a:srgbClr val="333333"/>
+                          </a:solidFill>
+                          <a:effectLst/>
+                          <a:latin typeface="Arial" panose="020B0604020202020204" pitchFamily="34" charset="0"/>
+                        </a:rPr>
+                        <a:t>dengan</a:t>
+                      </a:r>
+                      <a:r>
+                        <a:rPr lang="es-ES" sz="1100" b="0" i="0" u="none" strike="noStrike" dirty="0">
+                          <a:solidFill>
+                            <a:srgbClr val="333333"/>
+                          </a:solidFill>
+                          <a:effectLst/>
+                          <a:latin typeface="Arial" panose="020B0604020202020204" pitchFamily="34" charset="0"/>
+                        </a:rPr>
+                        <a:t> </a:t>
+                      </a:r>
+                      <a:r>
+                        <a:rPr lang="es-ES" sz="1100" b="0" i="0" u="none" strike="noStrike" dirty="0" err="1">
+                          <a:solidFill>
+                            <a:srgbClr val="333333"/>
+                          </a:solidFill>
+                          <a:effectLst/>
+                          <a:latin typeface="Arial" panose="020B0604020202020204" pitchFamily="34" charset="0"/>
+                        </a:rPr>
+                        <a:t>perusahaan</a:t>
+                      </a:r>
+                      <a:r>
+                        <a:rPr lang="es-ES" sz="1100" b="0" i="0" u="none" strike="noStrike" dirty="0">
+                          <a:solidFill>
+                            <a:srgbClr val="333333"/>
+                          </a:solidFill>
+                          <a:effectLst/>
+                          <a:latin typeface="Arial" panose="020B0604020202020204" pitchFamily="34" charset="0"/>
+                        </a:rPr>
+                        <a:t> </a:t>
+                      </a:r>
+                      <a:r>
+                        <a:rPr lang="es-ES" sz="1100" b="0" i="0" u="none" strike="noStrike" dirty="0" err="1">
+                          <a:solidFill>
+                            <a:srgbClr val="333333"/>
+                          </a:solidFill>
+                          <a:effectLst/>
+                          <a:latin typeface="Arial" panose="020B0604020202020204" pitchFamily="34" charset="0"/>
+                        </a:rPr>
+                        <a:t>lain</a:t>
+                      </a:r>
+                      <a:r>
+                        <a:rPr lang="es-ES" sz="1100" b="0" i="0" u="none" strike="noStrike" dirty="0">
+                          <a:solidFill>
+                            <a:srgbClr val="333333"/>
+                          </a:solidFill>
+                          <a:effectLst/>
+                          <a:latin typeface="Arial" panose="020B0604020202020204" pitchFamily="34" charset="0"/>
+                        </a:rPr>
+                        <a:t>.</a:t>
+                      </a:r>
+                      <a:endParaRPr lang="es-ES" sz="1800" dirty="0">
+                        <a:effectLst/>
+                      </a:endParaRPr>
+                    </a:p>
+                  </a:txBody>
+                  <a:tcPr marL="91212" marR="91212" marT="91212" marB="91212">
+                    <a:lnL w="9525" cap="flat" cmpd="sng" algn="ctr">
+                      <a:solidFill>
+                        <a:srgbClr val="E2E8F0"/>
+                      </a:solidFill>
+                      <a:prstDash val="solid"/>
+                      <a:round/>
+                      <a:headEnd type="none" w="med" len="med"/>
+                      <a:tailEnd type="none" w="med" len="med"/>
+                    </a:lnL>
+                    <a:lnR w="9525" cap="flat" cmpd="sng" algn="ctr">
+                      <a:solidFill>
+                        <a:srgbClr val="E2E8F0"/>
+                      </a:solidFill>
+                      <a:prstDash val="solid"/>
+                      <a:round/>
+                      <a:headEnd type="none" w="med" len="med"/>
+                      <a:tailEnd type="none" w="med" len="med"/>
+                    </a:lnR>
+                    <a:lnT w="9525" cap="flat" cmpd="sng" algn="ctr">
+                      <a:solidFill>
+                        <a:srgbClr val="E2E8F0"/>
+                      </a:solidFill>
+                      <a:prstDash val="solid"/>
+                      <a:round/>
+                      <a:headEnd type="none" w="med" len="med"/>
+                      <a:tailEnd type="none" w="med" len="med"/>
+                    </a:lnT>
+                    <a:lnB w="9525" cap="flat" cmpd="sng" algn="ctr">
+                      <a:solidFill>
+                        <a:srgbClr val="E2E8F0"/>
+                      </a:solidFill>
+                      <a:prstDash val="solid"/>
+                      <a:round/>
+                      <a:headEnd type="none" w="med" len="med"/>
+                      <a:tailEnd type="none" w="med" len="med"/>
+                    </a:lnB>
+                    <a:noFill/>
+                  </a:tcPr>
+                </a:tc>
+                <a:tc>
+                  <a:txBody>
+                    <a:bodyPr/>
+                    <a:lstStyle/>
+                    <a:p>
+                      <a:pPr rtl="0" fontAlgn="t">
+                        <a:spcBef>
+                          <a:spcPts val="750"/>
+                        </a:spcBef>
+                        <a:spcAft>
+                          <a:spcPts val="750"/>
+                        </a:spcAft>
+                        <a:buNone/>
+                      </a:pPr>
+                      <a:r>
+                        <a:rPr lang="it-IT" sz="1100" b="0" i="0" u="none" strike="noStrike">
+                          <a:solidFill>
+                            <a:srgbClr val="333333"/>
+                          </a:solidFill>
+                          <a:effectLst/>
+                          <a:latin typeface="Arial" panose="020B0604020202020204" pitchFamily="34" charset="0"/>
+                        </a:rPr>
+                        <a:t>Multi-tenant (data bergabung di server umum bersama ribuan pengguna lain).</a:t>
+                      </a:r>
+                      <a:endParaRPr lang="it-IT" sz="1800">
+                        <a:effectLst/>
+                      </a:endParaRPr>
+                    </a:p>
+                  </a:txBody>
+                  <a:tcPr marL="91212" marR="91212" marT="91212" marB="91212">
+                    <a:lnL w="9525" cap="flat" cmpd="sng" algn="ctr">
+                      <a:solidFill>
+                        <a:srgbClr val="E2E8F0"/>
+                      </a:solidFill>
+                      <a:prstDash val="solid"/>
+                      <a:round/>
+                      <a:headEnd type="none" w="med" len="med"/>
+                      <a:tailEnd type="none" w="med" len="med"/>
+                    </a:lnL>
+                    <a:lnR w="9525" cap="flat" cmpd="sng" algn="ctr">
+                      <a:solidFill>
+                        <a:srgbClr val="E2E8F0"/>
+                      </a:solidFill>
+                      <a:prstDash val="solid"/>
+                      <a:round/>
+                      <a:headEnd type="none" w="med" len="med"/>
+                      <a:tailEnd type="none" w="med" len="med"/>
+                    </a:lnR>
+                    <a:lnT w="9525" cap="flat" cmpd="sng" algn="ctr">
+                      <a:solidFill>
+                        <a:srgbClr val="E2E8F0"/>
+                      </a:solidFill>
+                      <a:prstDash val="solid"/>
+                      <a:round/>
+                      <a:headEnd type="none" w="med" len="med"/>
+                      <a:tailEnd type="none" w="med" len="med"/>
+                    </a:lnT>
+                    <a:lnB w="9525" cap="flat" cmpd="sng" algn="ctr">
+                      <a:solidFill>
+                        <a:srgbClr val="E2E8F0"/>
+                      </a:solidFill>
+                      <a:prstDash val="solid"/>
+                      <a:round/>
+                      <a:headEnd type="none" w="med" len="med"/>
+                      <a:tailEnd type="none" w="med" len="med"/>
+                    </a:lnB>
+                    <a:noFill/>
+                  </a:tcPr>
+                </a:tc>
+                <a:extLst>
+                  <a:ext uri="{0D108BD9-81ED-4DB2-BD59-A6C34878D82A}">
+                    <a16:rowId xmlns:a16="http://schemas.microsoft.com/office/drawing/2014/main" val="1170173978"/>
+                  </a:ext>
+                </a:extLst>
+              </a:tr>
+              <a:tr h="1138144">
+                <a:tc>
+                  <a:txBody>
+                    <a:bodyPr/>
+                    <a:lstStyle/>
+                    <a:p>
+                      <a:pPr rtl="0" fontAlgn="t">
+                        <a:buNone/>
+                      </a:pPr>
+                      <a:r>
+                        <a:rPr lang="en-US" sz="1100" b="1" i="0" u="none" strike="noStrike" dirty="0">
+                          <a:solidFill>
+                            <a:srgbClr val="333333"/>
+                          </a:solidFill>
+                          <a:effectLst/>
+                          <a:latin typeface="Arial" panose="020B0604020202020204" pitchFamily="34" charset="0"/>
+                        </a:rPr>
+                        <a:t>Unlimited User &amp; </a:t>
+                      </a:r>
+                      <a:r>
+                        <a:rPr lang="en-US" sz="1100" b="1" i="0" u="none" strike="noStrike" dirty="0" err="1">
+                          <a:solidFill>
+                            <a:srgbClr val="333333"/>
+                          </a:solidFill>
+                          <a:effectLst/>
+                          <a:latin typeface="Arial" panose="020B0604020202020204" pitchFamily="34" charset="0"/>
+                        </a:rPr>
+                        <a:t>Transaksi</a:t>
+                      </a:r>
+                      <a:endParaRPr lang="en-US" sz="1800" dirty="0">
+                        <a:effectLst/>
+                      </a:endParaRPr>
+                    </a:p>
+                    <a:p>
+                      <a:pPr rtl="0" fontAlgn="t">
+                        <a:spcBef>
+                          <a:spcPts val="750"/>
+                        </a:spcBef>
+                        <a:spcAft>
+                          <a:spcPts val="750"/>
+                        </a:spcAft>
+                        <a:buNone/>
+                      </a:pPr>
+                      <a:r>
+                        <a:rPr lang="en-US" sz="1100" b="0" i="0" u="none" strike="noStrike" dirty="0" err="1">
+                          <a:solidFill>
+                            <a:srgbClr val="333333"/>
+                          </a:solidFill>
+                          <a:effectLst/>
+                          <a:latin typeface="Arial" panose="020B0604020202020204" pitchFamily="34" charset="0"/>
+                        </a:rPr>
+                        <a:t>Bebas</a:t>
+                      </a:r>
+                      <a:r>
+                        <a:rPr lang="en-US" sz="1100" b="0" i="0" u="none" strike="noStrike" dirty="0">
+                          <a:solidFill>
+                            <a:srgbClr val="333333"/>
+                          </a:solidFill>
+                          <a:effectLst/>
+                          <a:latin typeface="Arial" panose="020B0604020202020204" pitchFamily="34" charset="0"/>
+                        </a:rPr>
+                        <a:t> </a:t>
+                      </a:r>
+                      <a:r>
+                        <a:rPr lang="en-US" sz="1100" b="0" i="0" u="none" strike="noStrike" dirty="0" err="1">
+                          <a:solidFill>
+                            <a:srgbClr val="333333"/>
+                          </a:solidFill>
+                          <a:effectLst/>
+                          <a:latin typeface="Arial" panose="020B0604020202020204" pitchFamily="34" charset="0"/>
+                        </a:rPr>
+                        <a:t>tambah</a:t>
+                      </a:r>
+                      <a:r>
+                        <a:rPr lang="en-US" sz="1100" b="0" i="0" u="none" strike="noStrike" dirty="0">
+                          <a:solidFill>
+                            <a:srgbClr val="333333"/>
+                          </a:solidFill>
+                          <a:effectLst/>
+                          <a:latin typeface="Arial" panose="020B0604020202020204" pitchFamily="34" charset="0"/>
+                        </a:rPr>
+                        <a:t> admin, </a:t>
+                      </a:r>
+                      <a:r>
+                        <a:rPr lang="en-US" sz="1100" b="0" i="0" u="none" strike="noStrike" dirty="0" err="1">
+                          <a:solidFill>
+                            <a:srgbClr val="333333"/>
+                          </a:solidFill>
+                          <a:effectLst/>
+                          <a:latin typeface="Arial" panose="020B0604020202020204" pitchFamily="34" charset="0"/>
+                        </a:rPr>
+                        <a:t>gudang</a:t>
+                      </a:r>
+                      <a:r>
+                        <a:rPr lang="en-US" sz="1100" b="0" i="0" u="none" strike="noStrike" dirty="0">
+                          <a:solidFill>
+                            <a:srgbClr val="333333"/>
+                          </a:solidFill>
+                          <a:effectLst/>
+                          <a:latin typeface="Arial" panose="020B0604020202020204" pitchFamily="34" charset="0"/>
+                        </a:rPr>
+                        <a:t>, dan sales </a:t>
+                      </a:r>
+                      <a:r>
+                        <a:rPr lang="en-US" sz="1100" b="0" i="0" u="none" strike="noStrike" dirty="0" err="1">
+                          <a:solidFill>
+                            <a:srgbClr val="333333"/>
+                          </a:solidFill>
+                          <a:effectLst/>
+                          <a:latin typeface="Arial" panose="020B0604020202020204" pitchFamily="34" charset="0"/>
+                        </a:rPr>
+                        <a:t>tanpa</a:t>
+                      </a:r>
+                      <a:r>
+                        <a:rPr lang="en-US" sz="1100" b="0" i="0" u="none" strike="noStrike" dirty="0">
+                          <a:solidFill>
+                            <a:srgbClr val="333333"/>
+                          </a:solidFill>
+                          <a:effectLst/>
+                          <a:latin typeface="Arial" panose="020B0604020202020204" pitchFamily="34" charset="0"/>
+                        </a:rPr>
+                        <a:t> </a:t>
+                      </a:r>
+                      <a:r>
+                        <a:rPr lang="en-US" sz="1100" b="0" i="0" u="none" strike="noStrike" dirty="0" err="1">
+                          <a:solidFill>
+                            <a:srgbClr val="333333"/>
+                          </a:solidFill>
+                          <a:effectLst/>
+                          <a:latin typeface="Arial" panose="020B0604020202020204" pitchFamily="34" charset="0"/>
+                        </a:rPr>
+                        <a:t>biaya</a:t>
+                      </a:r>
+                      <a:r>
+                        <a:rPr lang="en-US" sz="1100" b="0" i="0" u="none" strike="noStrike" dirty="0">
+                          <a:solidFill>
+                            <a:srgbClr val="333333"/>
+                          </a:solidFill>
+                          <a:effectLst/>
+                          <a:latin typeface="Arial" panose="020B0604020202020204" pitchFamily="34" charset="0"/>
+                        </a:rPr>
+                        <a:t> per </a:t>
+                      </a:r>
+                      <a:r>
+                        <a:rPr lang="en-US" sz="1100" b="0" i="0" u="none" strike="noStrike" dirty="0" err="1">
+                          <a:solidFill>
+                            <a:srgbClr val="333333"/>
+                          </a:solidFill>
+                          <a:effectLst/>
+                          <a:latin typeface="Arial" panose="020B0604020202020204" pitchFamily="34" charset="0"/>
+                        </a:rPr>
+                        <a:t>kepala</a:t>
+                      </a:r>
+                      <a:r>
+                        <a:rPr lang="en-US" sz="1100" b="0" i="0" u="none" strike="noStrike" dirty="0">
+                          <a:solidFill>
+                            <a:srgbClr val="333333"/>
+                          </a:solidFill>
+                          <a:effectLst/>
+                          <a:latin typeface="Arial" panose="020B0604020202020204" pitchFamily="34" charset="0"/>
+                        </a:rPr>
+                        <a:t>.</a:t>
+                      </a:r>
+                      <a:endParaRPr lang="en-US" sz="1800" dirty="0">
+                        <a:effectLst/>
+                      </a:endParaRPr>
+                    </a:p>
+                  </a:txBody>
+                  <a:tcPr marL="91212" marR="91212" marT="91212" marB="91212">
+                    <a:lnL w="9525" cap="flat" cmpd="sng" algn="ctr">
+                      <a:solidFill>
+                        <a:srgbClr val="E2E8F0"/>
+                      </a:solidFill>
+                      <a:prstDash val="solid"/>
+                      <a:round/>
+                      <a:headEnd type="none" w="med" len="med"/>
+                      <a:tailEnd type="none" w="med" len="med"/>
+                    </a:lnL>
+                    <a:lnR w="9525" cap="flat" cmpd="sng" algn="ctr">
+                      <a:solidFill>
+                        <a:srgbClr val="E2E8F0"/>
+                      </a:solidFill>
+                      <a:prstDash val="solid"/>
+                      <a:round/>
+                      <a:headEnd type="none" w="med" len="med"/>
+                      <a:tailEnd type="none" w="med" len="med"/>
+                    </a:lnR>
+                    <a:lnT w="9525" cap="flat" cmpd="sng" algn="ctr">
+                      <a:solidFill>
+                        <a:srgbClr val="E2E8F0"/>
+                      </a:solidFill>
+                      <a:prstDash val="solid"/>
+                      <a:round/>
+                      <a:headEnd type="none" w="med" len="med"/>
+                      <a:tailEnd type="none" w="med" len="med"/>
+                    </a:lnT>
+                    <a:lnB w="9525" cap="flat" cmpd="sng" algn="ctr">
+                      <a:solidFill>
+                        <a:srgbClr val="E2E8F0"/>
+                      </a:solidFill>
+                      <a:prstDash val="solid"/>
+                      <a:round/>
+                      <a:headEnd type="none" w="med" len="med"/>
+                      <a:tailEnd type="none" w="med" len="med"/>
+                    </a:lnB>
+                    <a:noFill/>
+                  </a:tcPr>
+                </a:tc>
+                <a:tc>
+                  <a:txBody>
+                    <a:bodyPr/>
+                    <a:lstStyle/>
+                    <a:p>
+                      <a:pPr rtl="0" fontAlgn="t">
+                        <a:spcBef>
+                          <a:spcPts val="750"/>
+                        </a:spcBef>
+                        <a:spcAft>
+                          <a:spcPts val="750"/>
+                        </a:spcAft>
+                        <a:buNone/>
+                      </a:pPr>
+                      <a:r>
+                        <a:rPr lang="nn-NO" sz="1100" b="0" i="0" u="none" strike="noStrike">
+                          <a:solidFill>
+                            <a:srgbClr val="333333"/>
+                          </a:solidFill>
+                          <a:effectLst/>
+                          <a:latin typeface="Arial" panose="020B0604020202020204" pitchFamily="34" charset="0"/>
+                        </a:rPr>
+                        <a:t>Bayar per user / per transaksi (biaya membengkak saat usaha membesar).</a:t>
+                      </a:r>
+                      <a:endParaRPr lang="nn-NO" sz="1800">
+                        <a:effectLst/>
+                      </a:endParaRPr>
+                    </a:p>
+                  </a:txBody>
+                  <a:tcPr marL="91212" marR="91212" marT="91212" marB="91212">
+                    <a:lnL w="9525" cap="flat" cmpd="sng" algn="ctr">
+                      <a:solidFill>
+                        <a:srgbClr val="E2E8F0"/>
+                      </a:solidFill>
+                      <a:prstDash val="solid"/>
+                      <a:round/>
+                      <a:headEnd type="none" w="med" len="med"/>
+                      <a:tailEnd type="none" w="med" len="med"/>
+                    </a:lnL>
+                    <a:lnR w="9525" cap="flat" cmpd="sng" algn="ctr">
+                      <a:solidFill>
+                        <a:srgbClr val="E2E8F0"/>
+                      </a:solidFill>
+                      <a:prstDash val="solid"/>
+                      <a:round/>
+                      <a:headEnd type="none" w="med" len="med"/>
+                      <a:tailEnd type="none" w="med" len="med"/>
+                    </a:lnR>
+                    <a:lnT w="9525" cap="flat" cmpd="sng" algn="ctr">
+                      <a:solidFill>
+                        <a:srgbClr val="E2E8F0"/>
+                      </a:solidFill>
+                      <a:prstDash val="solid"/>
+                      <a:round/>
+                      <a:headEnd type="none" w="med" len="med"/>
+                      <a:tailEnd type="none" w="med" len="med"/>
+                    </a:lnT>
+                    <a:lnB w="9525" cap="flat" cmpd="sng" algn="ctr">
+                      <a:solidFill>
+                        <a:srgbClr val="E2E8F0"/>
+                      </a:solidFill>
+                      <a:prstDash val="solid"/>
+                      <a:round/>
+                      <a:headEnd type="none" w="med" len="med"/>
+                      <a:tailEnd type="none" w="med" len="med"/>
+                    </a:lnB>
+                    <a:noFill/>
+                  </a:tcPr>
+                </a:tc>
+                <a:extLst>
+                  <a:ext uri="{0D108BD9-81ED-4DB2-BD59-A6C34878D82A}">
+                    <a16:rowId xmlns:a16="http://schemas.microsoft.com/office/drawing/2014/main" val="1669868946"/>
+                  </a:ext>
+                </a:extLst>
+              </a:tr>
+              <a:tr h="1138144">
+                <a:tc>
+                  <a:txBody>
+                    <a:bodyPr/>
+                    <a:lstStyle/>
+                    <a:p>
+                      <a:pPr rtl="0" fontAlgn="t">
+                        <a:buNone/>
+                      </a:pPr>
+                      <a:r>
+                        <a:rPr lang="en-US" sz="1100" b="1" i="0" u="none" strike="noStrike" dirty="0">
+                          <a:solidFill>
+                            <a:srgbClr val="333333"/>
+                          </a:solidFill>
+                          <a:effectLst/>
+                          <a:latin typeface="Arial" panose="020B0604020202020204" pitchFamily="34" charset="0"/>
+                        </a:rPr>
+                        <a:t>Full </a:t>
+                      </a:r>
+                      <a:r>
+                        <a:rPr lang="en-US" sz="1100" b="1" i="0" u="none" strike="noStrike" dirty="0" err="1">
+                          <a:solidFill>
+                            <a:srgbClr val="333333"/>
+                          </a:solidFill>
+                          <a:effectLst/>
+                          <a:latin typeface="Arial" panose="020B0604020202020204" pitchFamily="34" charset="0"/>
+                        </a:rPr>
+                        <a:t>Dampingan</a:t>
+                      </a:r>
+                      <a:r>
+                        <a:rPr lang="en-US" sz="1100" b="1" i="0" u="none" strike="noStrike" dirty="0">
+                          <a:solidFill>
+                            <a:srgbClr val="333333"/>
+                          </a:solidFill>
+                          <a:effectLst/>
+                          <a:latin typeface="Arial" panose="020B0604020202020204" pitchFamily="34" charset="0"/>
+                        </a:rPr>
+                        <a:t> &amp; Support</a:t>
+                      </a:r>
+                      <a:endParaRPr lang="en-US" sz="1800" dirty="0">
+                        <a:effectLst/>
+                      </a:endParaRPr>
+                    </a:p>
+                    <a:p>
+                      <a:pPr rtl="0" fontAlgn="t">
+                        <a:spcBef>
+                          <a:spcPts val="750"/>
+                        </a:spcBef>
+                        <a:spcAft>
+                          <a:spcPts val="750"/>
+                        </a:spcAft>
+                        <a:buNone/>
+                      </a:pPr>
+                      <a:r>
+                        <a:rPr lang="en-US" sz="1100" b="0" i="0" u="none" strike="noStrike" dirty="0">
+                          <a:solidFill>
+                            <a:srgbClr val="333333"/>
+                          </a:solidFill>
+                          <a:effectLst/>
+                          <a:latin typeface="Arial" panose="020B0604020202020204" pitchFamily="34" charset="0"/>
+                        </a:rPr>
+                        <a:t>Bantuan </a:t>
+                      </a:r>
+                      <a:r>
+                        <a:rPr lang="en-US" sz="1100" b="0" i="0" u="none" strike="noStrike" dirty="0" err="1">
+                          <a:solidFill>
+                            <a:srgbClr val="333333"/>
+                          </a:solidFill>
+                          <a:effectLst/>
+                          <a:latin typeface="Arial" panose="020B0604020202020204" pitchFamily="34" charset="0"/>
+                        </a:rPr>
+                        <a:t>migrasi</a:t>
+                      </a:r>
+                      <a:r>
+                        <a:rPr lang="en-US" sz="1100" b="0" i="0" u="none" strike="noStrike" dirty="0">
+                          <a:solidFill>
+                            <a:srgbClr val="333333"/>
+                          </a:solidFill>
+                          <a:effectLst/>
+                          <a:latin typeface="Arial" panose="020B0604020202020204" pitchFamily="34" charset="0"/>
+                        </a:rPr>
+                        <a:t> data master </a:t>
+                      </a:r>
+                      <a:r>
+                        <a:rPr lang="en-US" sz="1100" b="0" i="0" u="none" strike="noStrike" dirty="0" err="1">
+                          <a:solidFill>
+                            <a:srgbClr val="333333"/>
+                          </a:solidFill>
+                          <a:effectLst/>
+                          <a:latin typeface="Arial" panose="020B0604020202020204" pitchFamily="34" charset="0"/>
+                        </a:rPr>
+                        <a:t>dari</a:t>
+                      </a:r>
+                      <a:r>
+                        <a:rPr lang="en-US" sz="1100" b="0" i="0" u="none" strike="noStrike" dirty="0">
+                          <a:solidFill>
+                            <a:srgbClr val="333333"/>
+                          </a:solidFill>
+                          <a:effectLst/>
+                          <a:latin typeface="Arial" panose="020B0604020202020204" pitchFamily="34" charset="0"/>
+                        </a:rPr>
+                        <a:t>  Excel, </a:t>
+                      </a:r>
+                      <a:r>
+                        <a:rPr lang="en-US" sz="1100" b="0" i="0" u="none" strike="noStrike" dirty="0" err="1">
+                          <a:solidFill>
+                            <a:srgbClr val="333333"/>
+                          </a:solidFill>
+                          <a:effectLst/>
+                          <a:latin typeface="Arial" panose="020B0604020202020204" pitchFamily="34" charset="0"/>
+                        </a:rPr>
+                        <a:t>pelatihan</a:t>
+                      </a:r>
+                      <a:r>
+                        <a:rPr lang="en-US" sz="1100" b="0" i="0" u="none" strike="noStrike" dirty="0">
+                          <a:solidFill>
+                            <a:srgbClr val="333333"/>
+                          </a:solidFill>
+                          <a:effectLst/>
+                          <a:latin typeface="Arial" panose="020B0604020202020204" pitchFamily="34" charset="0"/>
+                        </a:rPr>
+                        <a:t> </a:t>
+                      </a:r>
+                      <a:r>
+                        <a:rPr lang="en-US" sz="1100" b="0" i="0" u="none" strike="noStrike" dirty="0" err="1">
+                          <a:solidFill>
+                            <a:srgbClr val="333333"/>
+                          </a:solidFill>
+                          <a:effectLst/>
+                          <a:latin typeface="Arial" panose="020B0604020202020204" pitchFamily="34" charset="0"/>
+                        </a:rPr>
+                        <a:t>staf</a:t>
+                      </a:r>
+                      <a:r>
+                        <a:rPr lang="en-US" sz="1100" b="0" i="0" u="none" strike="noStrike" dirty="0">
+                          <a:solidFill>
+                            <a:srgbClr val="333333"/>
+                          </a:solidFill>
+                          <a:effectLst/>
+                          <a:latin typeface="Arial" panose="020B0604020202020204" pitchFamily="34" charset="0"/>
+                        </a:rPr>
+                        <a:t>, dan </a:t>
+                      </a:r>
+                      <a:r>
+                        <a:rPr lang="en-US" sz="1100" b="0" i="0" u="none" strike="noStrike" dirty="0" err="1">
+                          <a:solidFill>
+                            <a:srgbClr val="333333"/>
+                          </a:solidFill>
+                          <a:effectLst/>
+                          <a:latin typeface="Arial" panose="020B0604020202020204" pitchFamily="34" charset="0"/>
+                        </a:rPr>
+                        <a:t>pemeliharaan</a:t>
+                      </a:r>
+                      <a:r>
+                        <a:rPr lang="en-US" sz="1100" b="0" i="0" u="none" strike="noStrike" dirty="0">
+                          <a:solidFill>
+                            <a:srgbClr val="333333"/>
+                          </a:solidFill>
+                          <a:effectLst/>
+                          <a:latin typeface="Arial" panose="020B0604020202020204" pitchFamily="34" charset="0"/>
+                        </a:rPr>
+                        <a:t> rutin.</a:t>
+                      </a:r>
+                      <a:endParaRPr lang="en-US" sz="1800" dirty="0">
+                        <a:effectLst/>
+                      </a:endParaRPr>
+                    </a:p>
+                  </a:txBody>
+                  <a:tcPr marL="91212" marR="91212" marT="91212" marB="91212">
+                    <a:lnL w="9525" cap="flat" cmpd="sng" algn="ctr">
+                      <a:solidFill>
+                        <a:srgbClr val="E2E8F0"/>
+                      </a:solidFill>
+                      <a:prstDash val="solid"/>
+                      <a:round/>
+                      <a:headEnd type="none" w="med" len="med"/>
+                      <a:tailEnd type="none" w="med" len="med"/>
+                    </a:lnL>
+                    <a:lnR w="9525" cap="flat" cmpd="sng" algn="ctr">
+                      <a:solidFill>
+                        <a:srgbClr val="E2E8F0"/>
+                      </a:solidFill>
+                      <a:prstDash val="solid"/>
+                      <a:round/>
+                      <a:headEnd type="none" w="med" len="med"/>
+                      <a:tailEnd type="none" w="med" len="med"/>
+                    </a:lnR>
+                    <a:lnT w="9525" cap="flat" cmpd="sng" algn="ctr">
+                      <a:solidFill>
+                        <a:srgbClr val="E2E8F0"/>
+                      </a:solidFill>
+                      <a:prstDash val="solid"/>
+                      <a:round/>
+                      <a:headEnd type="none" w="med" len="med"/>
+                      <a:tailEnd type="none" w="med" len="med"/>
+                    </a:lnT>
+                    <a:lnB w="9525" cap="flat" cmpd="sng" algn="ctr">
+                      <a:solidFill>
+                        <a:srgbClr val="E2E8F0"/>
+                      </a:solidFill>
+                      <a:prstDash val="solid"/>
+                      <a:round/>
+                      <a:headEnd type="none" w="med" len="med"/>
+                      <a:tailEnd type="none" w="med" len="med"/>
+                    </a:lnB>
+                    <a:noFill/>
+                  </a:tcPr>
+                </a:tc>
+                <a:tc>
+                  <a:txBody>
+                    <a:bodyPr/>
+                    <a:lstStyle/>
+                    <a:p>
+                      <a:pPr rtl="0" fontAlgn="t">
+                        <a:spcBef>
+                          <a:spcPts val="750"/>
+                        </a:spcBef>
+                        <a:spcAft>
+                          <a:spcPts val="750"/>
+                        </a:spcAft>
+                        <a:buNone/>
+                      </a:pPr>
+                      <a:r>
+                        <a:rPr lang="en-US" sz="1100" b="0" i="0" u="none" strike="noStrike">
+                          <a:solidFill>
+                            <a:srgbClr val="333333"/>
+                          </a:solidFill>
+                          <a:effectLst/>
+                          <a:latin typeface="Arial" panose="020B0604020202020204" pitchFamily="34" charset="0"/>
+                        </a:rPr>
+                        <a:t>Support terbatas melalui tiket / bot dan biaya pelatihan tambahan yang mahal.</a:t>
+                      </a:r>
+                      <a:endParaRPr lang="en-US" sz="1800">
+                        <a:effectLst/>
+                      </a:endParaRPr>
+                    </a:p>
+                  </a:txBody>
+                  <a:tcPr marL="91212" marR="91212" marT="91212" marB="91212">
+                    <a:lnL w="9525" cap="flat" cmpd="sng" algn="ctr">
+                      <a:solidFill>
+                        <a:srgbClr val="E2E8F0"/>
+                      </a:solidFill>
+                      <a:prstDash val="solid"/>
+                      <a:round/>
+                      <a:headEnd type="none" w="med" len="med"/>
+                      <a:tailEnd type="none" w="med" len="med"/>
+                    </a:lnL>
+                    <a:lnR w="9525" cap="flat" cmpd="sng" algn="ctr">
+                      <a:solidFill>
+                        <a:srgbClr val="E2E8F0"/>
+                      </a:solidFill>
+                      <a:prstDash val="solid"/>
+                      <a:round/>
+                      <a:headEnd type="none" w="med" len="med"/>
+                      <a:tailEnd type="none" w="med" len="med"/>
+                    </a:lnR>
+                    <a:lnT w="9525" cap="flat" cmpd="sng" algn="ctr">
+                      <a:solidFill>
+                        <a:srgbClr val="E2E8F0"/>
+                      </a:solidFill>
+                      <a:prstDash val="solid"/>
+                      <a:round/>
+                      <a:headEnd type="none" w="med" len="med"/>
+                      <a:tailEnd type="none" w="med" len="med"/>
+                    </a:lnT>
+                    <a:lnB w="9525" cap="flat" cmpd="sng" algn="ctr">
+                      <a:solidFill>
+                        <a:srgbClr val="E2E8F0"/>
+                      </a:solidFill>
+                      <a:prstDash val="solid"/>
+                      <a:round/>
+                      <a:headEnd type="none" w="med" len="med"/>
+                      <a:tailEnd type="none" w="med" len="med"/>
+                    </a:lnB>
+                    <a:noFill/>
+                  </a:tcPr>
+                </a:tc>
+                <a:extLst>
+                  <a:ext uri="{0D108BD9-81ED-4DB2-BD59-A6C34878D82A}">
+                    <a16:rowId xmlns:a16="http://schemas.microsoft.com/office/drawing/2014/main" val="862421025"/>
+                  </a:ext>
+                </a:extLst>
+              </a:tr>
+              <a:tr h="1138144">
+                <a:tc>
+                  <a:txBody>
+                    <a:bodyPr/>
+                    <a:lstStyle/>
+                    <a:p>
+                      <a:pPr rtl="0" fontAlgn="t">
+                        <a:buNone/>
+                      </a:pPr>
+                      <a:r>
+                        <a:rPr lang="en-US" sz="1100" b="1" i="0" u="none" strike="noStrike" dirty="0">
+                          <a:solidFill>
+                            <a:srgbClr val="333333"/>
+                          </a:solidFill>
+                          <a:effectLst/>
+                          <a:latin typeface="Arial" panose="020B0604020202020204" pitchFamily="34" charset="0"/>
+                        </a:rPr>
+                        <a:t>Fitur Reseller &amp; Bundling </a:t>
+                      </a:r>
+                      <a:r>
+                        <a:rPr lang="en-US" sz="1100" b="1" i="0" u="none" strike="noStrike" dirty="0" err="1">
+                          <a:solidFill>
+                            <a:srgbClr val="333333"/>
+                          </a:solidFill>
+                          <a:effectLst/>
+                          <a:latin typeface="Arial" panose="020B0604020202020204" pitchFamily="34" charset="0"/>
+                        </a:rPr>
+                        <a:t>Bawaan</a:t>
+                      </a:r>
+                      <a:endParaRPr lang="en-US" sz="1800" dirty="0">
+                        <a:effectLst/>
+                      </a:endParaRPr>
+                    </a:p>
+                    <a:p>
+                      <a:pPr rtl="0" fontAlgn="t">
+                        <a:spcBef>
+                          <a:spcPts val="750"/>
+                        </a:spcBef>
+                        <a:spcAft>
+                          <a:spcPts val="750"/>
+                        </a:spcAft>
+                        <a:buNone/>
+                      </a:pPr>
+                      <a:r>
+                        <a:rPr lang="en-US" sz="1100" b="0" i="0" u="none" strike="noStrike" dirty="0" err="1">
+                          <a:solidFill>
+                            <a:srgbClr val="333333"/>
+                          </a:solidFill>
+                          <a:effectLst/>
+                          <a:latin typeface="Arial" panose="020B0604020202020204" pitchFamily="34" charset="0"/>
+                        </a:rPr>
+                        <a:t>Sudah</a:t>
+                      </a:r>
+                      <a:r>
+                        <a:rPr lang="en-US" sz="1100" b="0" i="0" u="none" strike="noStrike" dirty="0">
+                          <a:solidFill>
+                            <a:srgbClr val="333333"/>
+                          </a:solidFill>
+                          <a:effectLst/>
+                          <a:latin typeface="Arial" panose="020B0604020202020204" pitchFamily="34" charset="0"/>
+                        </a:rPr>
+                        <a:t> </a:t>
+                      </a:r>
+                      <a:r>
+                        <a:rPr lang="en-US" sz="1100" b="0" i="0" u="none" strike="noStrike" dirty="0" err="1">
+                          <a:solidFill>
+                            <a:srgbClr val="333333"/>
+                          </a:solidFill>
+                          <a:effectLst/>
+                          <a:latin typeface="Arial" panose="020B0604020202020204" pitchFamily="34" charset="0"/>
+                        </a:rPr>
+                        <a:t>termasuk</a:t>
+                      </a:r>
+                      <a:r>
+                        <a:rPr lang="en-US" sz="1100" b="0" i="0" u="none" strike="noStrike" dirty="0">
+                          <a:solidFill>
+                            <a:srgbClr val="333333"/>
+                          </a:solidFill>
+                          <a:effectLst/>
+                          <a:latin typeface="Arial" panose="020B0604020202020204" pitchFamily="34" charset="0"/>
+                        </a:rPr>
+                        <a:t> </a:t>
+                      </a:r>
+                      <a:r>
+                        <a:rPr lang="en-US" sz="1100" b="0" i="0" u="none" strike="noStrike" dirty="0" err="1">
+                          <a:solidFill>
+                            <a:srgbClr val="333333"/>
+                          </a:solidFill>
+                          <a:effectLst/>
+                          <a:latin typeface="Arial" panose="020B0604020202020204" pitchFamily="34" charset="0"/>
+                        </a:rPr>
+                        <a:t>tanpa</a:t>
+                      </a:r>
+                      <a:r>
+                        <a:rPr lang="en-US" sz="1100" b="0" i="0" u="none" strike="noStrike" dirty="0">
+                          <a:solidFill>
+                            <a:srgbClr val="333333"/>
+                          </a:solidFill>
+                          <a:effectLst/>
+                          <a:latin typeface="Arial" panose="020B0604020202020204" pitchFamily="34" charset="0"/>
+                        </a:rPr>
+                        <a:t> </a:t>
+                      </a:r>
+                      <a:r>
+                        <a:rPr lang="en-US" sz="1100" b="0" i="0" u="none" strike="noStrike" dirty="0" err="1">
+                          <a:solidFill>
+                            <a:srgbClr val="333333"/>
+                          </a:solidFill>
+                          <a:effectLst/>
+                          <a:latin typeface="Arial" panose="020B0604020202020204" pitchFamily="34" charset="0"/>
+                        </a:rPr>
+                        <a:t>perlu</a:t>
+                      </a:r>
+                      <a:r>
+                        <a:rPr lang="en-US" sz="1100" b="0" i="0" u="none" strike="noStrike" dirty="0">
+                          <a:solidFill>
+                            <a:srgbClr val="333333"/>
+                          </a:solidFill>
+                          <a:effectLst/>
+                          <a:latin typeface="Arial" panose="020B0604020202020204" pitchFamily="34" charset="0"/>
+                        </a:rPr>
+                        <a:t> </a:t>
+                      </a:r>
+                      <a:r>
+                        <a:rPr lang="en-US" sz="1100" b="0" i="0" u="none" strike="noStrike" dirty="0" err="1">
+                          <a:solidFill>
+                            <a:srgbClr val="333333"/>
+                          </a:solidFill>
+                          <a:effectLst/>
+                          <a:latin typeface="Arial" panose="020B0604020202020204" pitchFamily="34" charset="0"/>
+                        </a:rPr>
+                        <a:t>beli</a:t>
+                      </a:r>
+                      <a:r>
+                        <a:rPr lang="en-US" sz="1100" b="0" i="0" u="none" strike="noStrike" dirty="0">
+                          <a:solidFill>
+                            <a:srgbClr val="333333"/>
+                          </a:solidFill>
+                          <a:effectLst/>
+                          <a:latin typeface="Arial" panose="020B0604020202020204" pitchFamily="34" charset="0"/>
+                        </a:rPr>
+                        <a:t> </a:t>
+                      </a:r>
+                      <a:r>
+                        <a:rPr lang="en-US" sz="1100" b="0" i="0" u="none" strike="noStrike" dirty="0" err="1">
+                          <a:solidFill>
+                            <a:srgbClr val="333333"/>
+                          </a:solidFill>
+                          <a:effectLst/>
+                          <a:latin typeface="Arial" panose="020B0604020202020204" pitchFamily="34" charset="0"/>
+                        </a:rPr>
+                        <a:t>modul</a:t>
+                      </a:r>
+                      <a:r>
+                        <a:rPr lang="en-US" sz="1100" b="0" i="0" u="none" strike="noStrike" dirty="0">
+                          <a:solidFill>
+                            <a:srgbClr val="333333"/>
+                          </a:solidFill>
+                          <a:effectLst/>
+                          <a:latin typeface="Arial" panose="020B0604020202020204" pitchFamily="34" charset="0"/>
+                        </a:rPr>
+                        <a:t> add-on </a:t>
+                      </a:r>
+                      <a:r>
+                        <a:rPr lang="en-US" sz="1100" b="0" i="0" u="none" strike="noStrike" dirty="0" err="1">
+                          <a:solidFill>
+                            <a:srgbClr val="333333"/>
+                          </a:solidFill>
+                          <a:effectLst/>
+                          <a:latin typeface="Arial" panose="020B0604020202020204" pitchFamily="34" charset="0"/>
+                        </a:rPr>
+                        <a:t>tambahan</a:t>
+                      </a:r>
+                      <a:r>
+                        <a:rPr lang="en-US" sz="1100" b="0" i="0" u="none" strike="noStrike" dirty="0">
+                          <a:solidFill>
+                            <a:srgbClr val="333333"/>
+                          </a:solidFill>
+                          <a:effectLst/>
+                          <a:latin typeface="Arial" panose="020B0604020202020204" pitchFamily="34" charset="0"/>
+                        </a:rPr>
+                        <a:t>.</a:t>
+                      </a:r>
+                      <a:endParaRPr lang="en-US" sz="1800" dirty="0">
+                        <a:effectLst/>
+                      </a:endParaRPr>
+                    </a:p>
+                  </a:txBody>
+                  <a:tcPr marL="91212" marR="91212" marT="91212" marB="91212">
+                    <a:lnL w="9525" cap="flat" cmpd="sng" algn="ctr">
+                      <a:solidFill>
+                        <a:srgbClr val="E2E8F0"/>
+                      </a:solidFill>
+                      <a:prstDash val="solid"/>
+                      <a:round/>
+                      <a:headEnd type="none" w="med" len="med"/>
+                      <a:tailEnd type="none" w="med" len="med"/>
+                    </a:lnL>
+                    <a:lnR w="9525" cap="flat" cmpd="sng" algn="ctr">
+                      <a:solidFill>
+                        <a:srgbClr val="E2E8F0"/>
+                      </a:solidFill>
+                      <a:prstDash val="solid"/>
+                      <a:round/>
+                      <a:headEnd type="none" w="med" len="med"/>
+                      <a:tailEnd type="none" w="med" len="med"/>
+                    </a:lnR>
+                    <a:lnT w="9525" cap="flat" cmpd="sng" algn="ctr">
+                      <a:solidFill>
+                        <a:srgbClr val="E2E8F0"/>
+                      </a:solidFill>
+                      <a:prstDash val="solid"/>
+                      <a:round/>
+                      <a:headEnd type="none" w="med" len="med"/>
+                      <a:tailEnd type="none" w="med" len="med"/>
+                    </a:lnT>
+                    <a:lnB w="9525" cap="flat" cmpd="sng" algn="ctr">
+                      <a:solidFill>
+                        <a:srgbClr val="E2E8F0"/>
+                      </a:solidFill>
+                      <a:prstDash val="solid"/>
+                      <a:round/>
+                      <a:headEnd type="none" w="med" len="med"/>
+                      <a:tailEnd type="none" w="med" len="med"/>
+                    </a:lnB>
+                    <a:noFill/>
+                  </a:tcPr>
+                </a:tc>
+                <a:tc>
+                  <a:txBody>
+                    <a:bodyPr/>
+                    <a:lstStyle/>
+                    <a:p>
+                      <a:pPr rtl="0" fontAlgn="t">
+                        <a:spcBef>
+                          <a:spcPts val="750"/>
+                        </a:spcBef>
+                        <a:spcAft>
+                          <a:spcPts val="750"/>
+                        </a:spcAft>
+                        <a:buNone/>
+                      </a:pPr>
+                      <a:r>
+                        <a:rPr lang="en-US" sz="1100" b="0" i="0" u="none" strike="noStrike" dirty="0" err="1">
+                          <a:solidFill>
+                            <a:srgbClr val="333333"/>
+                          </a:solidFill>
+                          <a:effectLst/>
+                          <a:latin typeface="Arial" panose="020B0604020202020204" pitchFamily="34" charset="0"/>
+                        </a:rPr>
+                        <a:t>Membutuhkan</a:t>
+                      </a:r>
+                      <a:r>
+                        <a:rPr lang="en-US" sz="1100" b="0" i="0" u="none" strike="noStrike" dirty="0">
+                          <a:solidFill>
+                            <a:srgbClr val="333333"/>
+                          </a:solidFill>
+                          <a:effectLst/>
+                          <a:latin typeface="Arial" panose="020B0604020202020204" pitchFamily="34" charset="0"/>
+                        </a:rPr>
+                        <a:t> </a:t>
+                      </a:r>
+                      <a:r>
+                        <a:rPr lang="en-US" sz="1100" b="0" i="0" u="none" strike="noStrike" dirty="0" err="1">
+                          <a:solidFill>
+                            <a:srgbClr val="333333"/>
+                          </a:solidFill>
+                          <a:effectLst/>
+                          <a:latin typeface="Arial" panose="020B0604020202020204" pitchFamily="34" charset="0"/>
+                        </a:rPr>
+                        <a:t>integrasi</a:t>
+                      </a:r>
+                      <a:r>
+                        <a:rPr lang="en-US" sz="1100" b="0" i="0" u="none" strike="noStrike" dirty="0">
+                          <a:solidFill>
+                            <a:srgbClr val="333333"/>
+                          </a:solidFill>
+                          <a:effectLst/>
+                          <a:latin typeface="Arial" panose="020B0604020202020204" pitchFamily="34" charset="0"/>
+                        </a:rPr>
+                        <a:t> </a:t>
+                      </a:r>
+                      <a:r>
+                        <a:rPr lang="en-US" sz="1100" b="0" i="0" u="none" strike="noStrike" dirty="0" err="1">
+                          <a:solidFill>
+                            <a:srgbClr val="333333"/>
+                          </a:solidFill>
+                          <a:effectLst/>
+                          <a:latin typeface="Arial" panose="020B0604020202020204" pitchFamily="34" charset="0"/>
+                        </a:rPr>
+                        <a:t>pihak</a:t>
+                      </a:r>
+                      <a:r>
+                        <a:rPr lang="en-US" sz="1100" b="0" i="0" u="none" strike="noStrike" dirty="0">
+                          <a:solidFill>
+                            <a:srgbClr val="333333"/>
+                          </a:solidFill>
+                          <a:effectLst/>
+                          <a:latin typeface="Arial" panose="020B0604020202020204" pitchFamily="34" charset="0"/>
+                        </a:rPr>
+                        <a:t> </a:t>
+                      </a:r>
+                      <a:r>
+                        <a:rPr lang="en-US" sz="1100" b="0" i="0" u="none" strike="noStrike" dirty="0" err="1">
+                          <a:solidFill>
+                            <a:srgbClr val="333333"/>
+                          </a:solidFill>
+                          <a:effectLst/>
+                          <a:latin typeface="Arial" panose="020B0604020202020204" pitchFamily="34" charset="0"/>
+                        </a:rPr>
+                        <a:t>ketiga</a:t>
+                      </a:r>
+                      <a:r>
+                        <a:rPr lang="en-US" sz="1100" b="0" i="0" u="none" strike="noStrike" dirty="0">
+                          <a:solidFill>
+                            <a:srgbClr val="333333"/>
+                          </a:solidFill>
+                          <a:effectLst/>
+                          <a:latin typeface="Arial" panose="020B0604020202020204" pitchFamily="34" charset="0"/>
+                        </a:rPr>
+                        <a:t> </a:t>
+                      </a:r>
+                      <a:r>
+                        <a:rPr lang="en-US" sz="1100" b="0" i="0" u="none" strike="noStrike" dirty="0" err="1">
+                          <a:solidFill>
+                            <a:srgbClr val="333333"/>
+                          </a:solidFill>
+                          <a:effectLst/>
+                          <a:latin typeface="Arial" panose="020B0604020202020204" pitchFamily="34" charset="0"/>
+                        </a:rPr>
+                        <a:t>atau</a:t>
+                      </a:r>
+                      <a:r>
+                        <a:rPr lang="en-US" sz="1100" b="0" i="0" u="none" strike="noStrike" dirty="0">
+                          <a:solidFill>
+                            <a:srgbClr val="333333"/>
+                          </a:solidFill>
+                          <a:effectLst/>
+                          <a:latin typeface="Arial" panose="020B0604020202020204" pitchFamily="34" charset="0"/>
+                        </a:rPr>
+                        <a:t> </a:t>
+                      </a:r>
+                      <a:r>
+                        <a:rPr lang="en-US" sz="1100" b="0" i="0" u="none" strike="noStrike" dirty="0" err="1">
+                          <a:solidFill>
+                            <a:srgbClr val="333333"/>
+                          </a:solidFill>
+                          <a:effectLst/>
+                          <a:latin typeface="Arial" panose="020B0604020202020204" pitchFamily="34" charset="0"/>
+                        </a:rPr>
+                        <a:t>biaya</a:t>
+                      </a:r>
+                      <a:r>
+                        <a:rPr lang="en-US" sz="1100" b="0" i="0" u="none" strike="noStrike" dirty="0">
+                          <a:solidFill>
+                            <a:srgbClr val="333333"/>
+                          </a:solidFill>
+                          <a:effectLst/>
+                          <a:latin typeface="Arial" panose="020B0604020202020204" pitchFamily="34" charset="0"/>
+                        </a:rPr>
+                        <a:t> add-on </a:t>
+                      </a:r>
+                      <a:r>
+                        <a:rPr lang="en-US" sz="1100" b="0" i="0" u="none" strike="noStrike" dirty="0" err="1">
+                          <a:solidFill>
+                            <a:srgbClr val="333333"/>
+                          </a:solidFill>
+                          <a:effectLst/>
+                          <a:latin typeface="Arial" panose="020B0604020202020204" pitchFamily="34" charset="0"/>
+                        </a:rPr>
+                        <a:t>terpisah</a:t>
+                      </a:r>
+                      <a:r>
+                        <a:rPr lang="en-US" sz="1100" b="0" i="0" u="none" strike="noStrike" dirty="0">
+                          <a:solidFill>
+                            <a:srgbClr val="333333"/>
+                          </a:solidFill>
+                          <a:effectLst/>
+                          <a:latin typeface="Arial" panose="020B0604020202020204" pitchFamily="34" charset="0"/>
+                        </a:rPr>
+                        <a:t>.</a:t>
+                      </a:r>
+                      <a:endParaRPr lang="en-US" sz="1800" dirty="0">
+                        <a:effectLst/>
+                      </a:endParaRPr>
+                    </a:p>
+                  </a:txBody>
+                  <a:tcPr marL="91212" marR="91212" marT="91212" marB="91212">
+                    <a:lnL w="9525" cap="flat" cmpd="sng" algn="ctr">
+                      <a:solidFill>
+                        <a:srgbClr val="E2E8F0"/>
+                      </a:solidFill>
+                      <a:prstDash val="solid"/>
+                      <a:round/>
+                      <a:headEnd type="none" w="med" len="med"/>
+                      <a:tailEnd type="none" w="med" len="med"/>
+                    </a:lnL>
+                    <a:lnR w="9525" cap="flat" cmpd="sng" algn="ctr">
+                      <a:solidFill>
+                        <a:srgbClr val="E2E8F0"/>
+                      </a:solidFill>
+                      <a:prstDash val="solid"/>
+                      <a:round/>
+                      <a:headEnd type="none" w="med" len="med"/>
+                      <a:tailEnd type="none" w="med" len="med"/>
+                    </a:lnR>
+                    <a:lnT w="9525" cap="flat" cmpd="sng" algn="ctr">
+                      <a:solidFill>
+                        <a:srgbClr val="E2E8F0"/>
+                      </a:solidFill>
+                      <a:prstDash val="solid"/>
+                      <a:round/>
+                      <a:headEnd type="none" w="med" len="med"/>
+                      <a:tailEnd type="none" w="med" len="med"/>
+                    </a:lnT>
+                    <a:lnB w="9525" cap="flat" cmpd="sng" algn="ctr">
+                      <a:solidFill>
+                        <a:srgbClr val="E2E8F0"/>
+                      </a:solidFill>
+                      <a:prstDash val="solid"/>
+                      <a:round/>
+                      <a:headEnd type="none" w="med" len="med"/>
+                      <a:tailEnd type="none" w="med" len="med"/>
+                    </a:lnB>
+                    <a:noFill/>
+                  </a:tcPr>
+                </a:tc>
+                <a:extLst>
+                  <a:ext uri="{0D108BD9-81ED-4DB2-BD59-A6C34878D82A}">
+                    <a16:rowId xmlns:a16="http://schemas.microsoft.com/office/drawing/2014/main" val="1711296570"/>
+                  </a:ext>
+                </a:extLst>
+              </a:tr>
+            </a:tbl>
+          </a:graphicData>
+        </a:graphic>
+      </p:graphicFrame>
     </p:spTree>
   </p:cSld>
   <p:clrMapOvr>
@@ -8881,241 +12317,85 @@
             <p:ph type="title"/>
           </p:nvPr>
         </p:nvSpPr>
-        <p:spPr/>
-        <p:txBody>
-          <a:bodyPr>
-            <a:normAutofit/>
-          </a:bodyPr>
-          <a:lstStyle/>
-          <a:p>
-            <a:r>
-              <a:rPr sz="3200" dirty="0"/>
-              <a:t>Barang Bundling</a:t>
-            </a:r>
-            <a:br>
-              <a:rPr lang="en-US" sz="3200" dirty="0"/>
-            </a:br>
-            <a:r>
-              <a:rPr sz="3200" dirty="0"/>
-              <a:t>Strategi </a:t>
-            </a:r>
-            <a:r>
-              <a:rPr sz="3200" dirty="0" err="1"/>
-              <a:t>Penjualan</a:t>
-            </a:r>
-            <a:r>
-              <a:rPr sz="3200" dirty="0"/>
-              <a:t> </a:t>
-            </a:r>
-            <a:r>
-              <a:rPr sz="3200" dirty="0" err="1"/>
-              <a:t>Efisien</a:t>
-            </a:r>
-            <a:endParaRPr sz="3200" dirty="0"/>
-          </a:p>
-        </p:txBody>
-      </p:sp>
-      <p:sp>
-        <p:nvSpPr>
-          <p:cNvPr id="3" name="Content Placeholder 2"/>
-          <p:cNvSpPr>
-            <a:spLocks noGrp="1"/>
-          </p:cNvSpPr>
-          <p:nvPr>
-            <p:ph idx="1"/>
-          </p:nvPr>
-        </p:nvSpPr>
         <p:spPr>
           <a:xfrm>
-            <a:off x="1058333" y="2318659"/>
-            <a:ext cx="7704667" cy="3332816"/>
+            <a:off x="982133" y="457201"/>
+            <a:ext cx="7704667" cy="664028"/>
           </a:xfrm>
         </p:spPr>
         <p:txBody>
           <a:bodyPr>
-            <a:normAutofit fontScale="92500" lnSpcReduction="20000"/>
+            <a:noAutofit/>
           </a:bodyPr>
           <a:lstStyle/>
           <a:p>
             <a:r>
-              <a:rPr dirty="0"/>
-              <a:t>Barang bundling = </a:t>
-            </a:r>
-            <a:r>
-              <a:rPr dirty="0" err="1"/>
-              <a:t>penggabungan</a:t>
-            </a:r>
-            <a:r>
-              <a:rPr lang="en-US" dirty="0"/>
-              <a:t> </a:t>
-            </a:r>
-            <a:r>
-              <a:rPr lang="en-US" dirty="0" err="1"/>
-              <a:t>lebih</a:t>
-            </a:r>
-            <a:r>
-              <a:rPr lang="en-US" dirty="0"/>
-              <a:t> </a:t>
-            </a:r>
-            <a:r>
-              <a:rPr lang="en-US" dirty="0" err="1"/>
-              <a:t>dari</a:t>
-            </a:r>
-            <a:r>
-              <a:rPr lang="en-US" dirty="0"/>
-              <a:t> </a:t>
-            </a:r>
-            <a:r>
-              <a:rPr dirty="0"/>
-              <a:t> </a:t>
-            </a:r>
-            <a:r>
-              <a:rPr lang="en-US" dirty="0"/>
-              <a:t>1 </a:t>
-            </a:r>
-            <a:r>
-              <a:rPr dirty="0" err="1"/>
-              <a:t>produk</a:t>
-            </a:r>
-            <a:r>
-              <a:rPr dirty="0"/>
-              <a:t> </a:t>
-            </a:r>
-            <a:r>
-              <a:rPr dirty="0" err="1"/>
-              <a:t>jadi</a:t>
-            </a:r>
-            <a:r>
-              <a:rPr dirty="0"/>
-              <a:t> </a:t>
-            </a:r>
-            <a:r>
-              <a:rPr dirty="0" err="1"/>
-              <a:t>paket</a:t>
-            </a:r>
-            <a:r>
-              <a:rPr dirty="0"/>
-              <a:t> </a:t>
-            </a:r>
-            <a:r>
-              <a:rPr dirty="0" err="1"/>
-              <a:t>hemat</a:t>
-            </a:r>
-            <a:r>
-              <a:rPr lang="en-US" dirty="0" err="1"/>
-              <a:t>t</a:t>
-            </a:r>
-            <a:endParaRPr dirty="0"/>
-          </a:p>
-          <a:p>
-            <a:r>
-              <a:rPr dirty="0" err="1"/>
-              <a:t>Contoh</a:t>
-            </a:r>
-            <a:r>
-              <a:rPr dirty="0"/>
-              <a:t>: Paket Hemat</a:t>
-            </a:r>
-            <a:r>
-              <a:rPr lang="en-US" dirty="0"/>
-              <a:t> </a:t>
-            </a:r>
-            <a:r>
-              <a:rPr dirty="0"/>
-              <a:t> (Rp 100.000</a:t>
-            </a:r>
-            <a:r>
-              <a:rPr lang="en-US" dirty="0"/>
-              <a:t> </a:t>
-            </a:r>
-            <a:r>
-              <a:rPr dirty="0"/>
-              <a:t>, </a:t>
-            </a:r>
-            <a:r>
-              <a:rPr dirty="0" err="1"/>
-              <a:t>Komisi</a:t>
-            </a:r>
-            <a:r>
-              <a:rPr dirty="0"/>
-              <a:t> Rp 1.000)</a:t>
-            </a:r>
-            <a:endParaRPr lang="en-US" dirty="0"/>
-          </a:p>
-          <a:p>
-            <a:pPr marL="0" indent="0">
-              <a:buNone/>
-            </a:pPr>
-            <a:endParaRPr lang="en-US" dirty="0"/>
-          </a:p>
-          <a:p>
-            <a:r>
-              <a:rPr dirty="0"/>
-              <a:t>Manfaat:</a:t>
-            </a:r>
-          </a:p>
-          <a:p>
-            <a:r>
-              <a:rPr dirty="0"/>
-              <a:t>- </a:t>
-            </a:r>
-            <a:r>
-              <a:rPr dirty="0" err="1"/>
-              <a:t>Meningkatkan</a:t>
-            </a:r>
-            <a:r>
-              <a:rPr dirty="0"/>
-              <a:t> </a:t>
-            </a:r>
-            <a:r>
-              <a:rPr dirty="0" err="1"/>
-              <a:t>penjualan</a:t>
-            </a:r>
-            <a:endParaRPr dirty="0"/>
-          </a:p>
-          <a:p>
-            <a:r>
-              <a:rPr dirty="0"/>
-              <a:t>- </a:t>
-            </a:r>
-            <a:r>
-              <a:rPr dirty="0" err="1"/>
-              <a:t>Mengurangi</a:t>
-            </a:r>
-            <a:r>
-              <a:rPr dirty="0"/>
-              <a:t> </a:t>
-            </a:r>
-            <a:r>
-              <a:rPr dirty="0" err="1"/>
-              <a:t>stok</a:t>
-            </a:r>
-            <a:r>
-              <a:rPr dirty="0"/>
-              <a:t> lama</a:t>
-            </a:r>
-          </a:p>
-          <a:p>
-            <a:r>
-              <a:rPr dirty="0"/>
-              <a:t>- </a:t>
-            </a:r>
-            <a:r>
-              <a:rPr dirty="0" err="1"/>
-              <a:t>Menarik</a:t>
-            </a:r>
-            <a:r>
-              <a:rPr dirty="0"/>
-              <a:t> </a:t>
-            </a:r>
-            <a:r>
-              <a:rPr dirty="0" err="1"/>
-              <a:t>pelanggan</a:t>
-            </a:r>
-            <a:endParaRPr dirty="0"/>
+              <a:rPr lang="fi-FI" sz="2400" b="1" dirty="0"/>
+              <a:t>Tampilan Antarmuka &amp; Kemudahan Penggunaan Reseller </a:t>
+            </a:r>
+            <a:endParaRPr sz="2400" dirty="0"/>
           </a:p>
         </p:txBody>
       </p:sp>
+      <p:pic>
+        <p:nvPicPr>
+          <p:cNvPr id="7" name="Content Placeholder 6">
+            <a:extLst>
+              <a:ext uri="{FF2B5EF4-FFF2-40B4-BE49-F238E27FC236}">
+                <a16:creationId xmlns:a16="http://schemas.microsoft.com/office/drawing/2014/main" id="{5F99DF1A-5FCC-33F5-D25F-665332D6BCAF}"/>
+              </a:ext>
+            </a:extLst>
+          </p:cNvPr>
+          <p:cNvPicPr>
+            <a:picLocks noGrp="1" noChangeAspect="1"/>
+          </p:cNvPicPr>
+          <p:nvPr>
+            <p:ph idx="1"/>
+          </p:nvPr>
+        </p:nvPicPr>
+        <p:blipFill>
+          <a:blip r:embed="rId2"/>
+          <a:stretch>
+            <a:fillRect/>
+          </a:stretch>
+        </p:blipFill>
+        <p:spPr>
+          <a:xfrm>
+            <a:off x="982133" y="1284514"/>
+            <a:ext cx="4910335" cy="3332163"/>
+          </a:xfrm>
+        </p:spPr>
+      </p:pic>
+      <p:pic>
+        <p:nvPicPr>
+          <p:cNvPr id="9" name="Picture 8">
+            <a:extLst>
+              <a:ext uri="{FF2B5EF4-FFF2-40B4-BE49-F238E27FC236}">
+                <a16:creationId xmlns:a16="http://schemas.microsoft.com/office/drawing/2014/main" id="{8CE5A44D-F786-D08D-60AC-83EA485FDB51}"/>
+              </a:ext>
+            </a:extLst>
+          </p:cNvPr>
+          <p:cNvPicPr>
+            <a:picLocks noChangeAspect="1"/>
+          </p:cNvPicPr>
+          <p:nvPr/>
+        </p:nvPicPr>
+        <p:blipFill>
+          <a:blip r:embed="rId3"/>
+          <a:stretch>
+            <a:fillRect/>
+          </a:stretch>
+        </p:blipFill>
+        <p:spPr>
+          <a:xfrm>
+            <a:off x="6155934" y="1121229"/>
+            <a:ext cx="2386630" cy="5366657"/>
+          </a:xfrm>
+          <a:prstGeom prst="rect">
+            <a:avLst/>
+          </a:prstGeom>
+        </p:spPr>
+      </p:pic>
     </p:spTree>
   </p:cSld>
   <p:clrMapOvr>
